--- a/project/doc/음식분류_CNN_발표.pptx
+++ b/project/doc/음식분류_CNN_발표.pptx
@@ -4,6 +4,9 @@
   <p:sldMasterIdLst>
     <p:sldMasterId id="2147483648" r:id="rId1"/>
   </p:sldMasterIdLst>
+  <p:notesMasterIdLst>
+    <p:notesMasterId r:id="rId12"/>
+  </p:notesMasterIdLst>
   <p:sldIdLst>
     <p:sldId id="256" r:id="rId2"/>
     <p:sldId id="257" r:id="rId3"/>
@@ -16,10 +19,7 @@
     <p:sldId id="264" r:id="rId10"/>
     <p:sldId id="265" r:id="rId11"/>
   </p:sldIdLst>
-  <p:notesMasterIdLst>
-    <p:notesMasterId r:id="rId12"/>
-  </p:notesMasterIdLst>
-  <p:sldSz cx="9144000" cy="5143500"/>
+  <p:sldSz cx="9144000" cy="5143500" type="screen16x9"/>
   <p:notesSz cx="5143500" cy="9144000"/>
   <p:defaultTextStyle>
     <a:lvl1pPr marL="0" algn="l" defTabSz="914400" rtl="0" eaLnBrk="1" latinLnBrk="0" hangingPunct="1">
@@ -113,13 +113,20 @@
       </a:defRPr>
     </a:lvl9pPr>
   </p:defaultTextStyle>
+  <p:extLst>
+    <p:ext uri="{EFAFB233-063F-42B5-8137-9DF3F51BA10A}">
+      <p15:sldGuideLst xmlns:p15="http://schemas.microsoft.com/office/powerpoint/2012/main"/>
+    </p:ext>
+  </p:extLst>
 </p:presentation>
 </file>
 
 <file path=ppt/charts/chart1.xml><?xml version="1.0" encoding="utf-8"?>
-<c:chartSpace xmlns:c="http://schemas.openxmlformats.org/drawingml/2006/chart" xmlns:a="http://schemas.openxmlformats.org/drawingml/2006/main" xmlns:r="http://schemas.openxmlformats.org/officeDocument/2006/relationships">
+<c:chartSpace xmlns:c="http://schemas.openxmlformats.org/drawingml/2006/chart" xmlns:a="http://schemas.openxmlformats.org/drawingml/2006/main" xmlns:r="http://schemas.openxmlformats.org/officeDocument/2006/relationships" xmlns:c16r2="http://schemas.microsoft.com/office/drawing/2015/06/chart">
   <c:date1904 val="0"/>
+  <c:lang val="ko-KR"/>
   <c:roundedCorners val="1"/>
+  <c:style val="2"/>
   <c:chart>
     <c:title>
       <c:tx>
@@ -147,13 +154,13 @@
           </a:p>
         </c:rich>
       </c:tx>
-      <c:layout/>
       <c:overlay val="0"/>
     </c:title>
     <c:autoTitleDeleted val="0"/>
     <c:plotArea>
       <c:layout/>
       <c:lineChart>
+        <c:grouping val="standard"/>
         <c:varyColors val="0"/>
         <c:ser>
           <c:idx val="0"/>
@@ -170,9 +177,6 @@
             </c:strRef>
           </c:tx>
           <c:spPr>
-            <a:solidFill>
-              <a:srgbClr val="F87171"/>
-            </a:solidFill>
             <a:ln w="31750" cap="flat">
               <a:solidFill>
                 <a:srgbClr val="F87171"/>
@@ -182,31 +186,6 @@
             </a:ln>
             <a:effectLst/>
           </c:spPr>
-          <c:invertIfNegative val="0"/>
-          <c:dLbls>
-            <c:numFmt formatCode="#,##0" sourceLinked="0"/>
-            <c:txPr>
-              <a:bodyPr/>
-              <a:lstStyle/>
-              <a:p>
-                <a:pPr>
-                  <a:defRPr b="0" i="0" strike="noStrike" sz="1200" u="none">
-                    <a:solidFill>
-                      <a:srgbClr val="000000"/>
-                    </a:solidFill>
-                    <a:latin typeface="Arial"/>
-                  </a:defRPr>
-                </a:pPr>
-              </a:p>
-            </c:txPr>
-            <c:showLegendKey val="0"/>
-            <c:showVal val="0"/>
-            <c:showCatName val="0"/>
-            <c:showSerName val="0"/>
-            <c:showPercent val="0"/>
-            <c:showBubbleSize val="0"/>
-            <c:showLeaderLines val="0"/>
-          </c:dLbls>
           <c:marker>
             <c:symbol val="circle"/>
             <c:size val="6"/>
@@ -225,29 +204,27 @@
             </c:spPr>
           </c:marker>
           <c:cat>
-            <c:multiLvlStrRef>
+            <c:strRef>
               <c:f>Sheet1!$A$2:$A$6</c:f>
-              <c:multiLvlStrCache>
+              <c:strCache>
                 <c:ptCount val="5"/>
-                <c:lvl>
-                  <c:pt idx="0">
-                    <c:v>1</c:v>
-                  </c:pt>
-                  <c:pt idx="1">
-                    <c:v>2</c:v>
-                  </c:pt>
-                  <c:pt idx="2">
-                    <c:v>3</c:v>
-                  </c:pt>
-                  <c:pt idx="3">
-                    <c:v>4</c:v>
-                  </c:pt>
-                  <c:pt idx="4">
-                    <c:v>5</c:v>
-                  </c:pt>
-                </c:lvl>
-              </c:multiLvlStrCache>
-            </c:multiLvlStrRef>
+                <c:pt idx="0">
+                  <c:v>1</c:v>
+                </c:pt>
+                <c:pt idx="1">
+                  <c:v>2</c:v>
+                </c:pt>
+                <c:pt idx="2">
+                  <c:v>3</c:v>
+                </c:pt>
+                <c:pt idx="3">
+                  <c:v>4</c:v>
+                </c:pt>
+                <c:pt idx="4">
+                  <c:v>5</c:v>
+                </c:pt>
+              </c:strCache>
+            </c:strRef>
           </c:cat>
           <c:val>
             <c:numRef>
@@ -262,7 +239,7 @@
                   <c:v>1.28</c:v>
                 </c:pt>
                 <c:pt idx="2">
-                  <c:v>1.1</c:v>
+                  <c:v>1.1000000000000001</c:v>
                 </c:pt>
                 <c:pt idx="3">
                   <c:v>0.96</c:v>
@@ -274,6 +251,11 @@
             </c:numRef>
           </c:val>
           <c:smooth val="1"/>
+          <c:extLst>
+            <c:ext xmlns:c16="http://schemas.microsoft.com/office/drawing/2014/chart" uri="{C3380CC4-5D6E-409C-BE32-E72D297353CC}">
+              <c16:uniqueId val="{00000000-65B1-4DC8-9E37-DF9DFC5FD97C}"/>
+            </c:ext>
+          </c:extLst>
         </c:ser>
         <c:ser>
           <c:idx val="1"/>
@@ -290,9 +272,6 @@
             </c:strRef>
           </c:tx>
           <c:spPr>
-            <a:solidFill>
-              <a:srgbClr val="FB923C"/>
-            </a:solidFill>
             <a:ln w="31750" cap="flat">
               <a:solidFill>
                 <a:srgbClr val="FB923C"/>
@@ -302,31 +281,6 @@
             </a:ln>
             <a:effectLst/>
           </c:spPr>
-          <c:invertIfNegative val="0"/>
-          <c:dLbls>
-            <c:numFmt formatCode="#,##0" sourceLinked="0"/>
-            <c:txPr>
-              <a:bodyPr/>
-              <a:lstStyle/>
-              <a:p>
-                <a:pPr>
-                  <a:defRPr b="0" i="0" strike="noStrike" sz="1200" u="none">
-                    <a:solidFill>
-                      <a:srgbClr val="000000"/>
-                    </a:solidFill>
-                    <a:latin typeface="Arial"/>
-                  </a:defRPr>
-                </a:pPr>
-              </a:p>
-            </c:txPr>
-            <c:showLegendKey val="0"/>
-            <c:showVal val="0"/>
-            <c:showCatName val="0"/>
-            <c:showSerName val="0"/>
-            <c:showPercent val="0"/>
-            <c:showBubbleSize val="0"/>
-            <c:showLeaderLines val="0"/>
-          </c:dLbls>
           <c:marker>
             <c:symbol val="circle"/>
             <c:size val="6"/>
@@ -345,29 +299,27 @@
             </c:spPr>
           </c:marker>
           <c:cat>
-            <c:multiLvlStrRef>
+            <c:strRef>
               <c:f>Sheet1!$A$2:$A$6</c:f>
-              <c:multiLvlStrCache>
+              <c:strCache>
                 <c:ptCount val="5"/>
-                <c:lvl>
-                  <c:pt idx="0">
-                    <c:v>1</c:v>
-                  </c:pt>
-                  <c:pt idx="1">
-                    <c:v>2</c:v>
-                  </c:pt>
-                  <c:pt idx="2">
-                    <c:v>3</c:v>
-                  </c:pt>
-                  <c:pt idx="3">
-                    <c:v>4</c:v>
-                  </c:pt>
-                  <c:pt idx="4">
-                    <c:v>5</c:v>
-                  </c:pt>
-                </c:lvl>
-              </c:multiLvlStrCache>
-            </c:multiLvlStrRef>
+                <c:pt idx="0">
+                  <c:v>1</c:v>
+                </c:pt>
+                <c:pt idx="1">
+                  <c:v>2</c:v>
+                </c:pt>
+                <c:pt idx="2">
+                  <c:v>3</c:v>
+                </c:pt>
+                <c:pt idx="3">
+                  <c:v>4</c:v>
+                </c:pt>
+                <c:pt idx="4">
+                  <c:v>5</c:v>
+                </c:pt>
+              </c:strCache>
+            </c:strRef>
           </c:cat>
           <c:val>
             <c:numRef>
@@ -394,35 +346,24 @@
             </c:numRef>
           </c:val>
           <c:smooth val="1"/>
+          <c:extLst>
+            <c:ext xmlns:c16="http://schemas.microsoft.com/office/drawing/2014/chart" uri="{C3380CC4-5D6E-409C-BE32-E72D297353CC}">
+              <c16:uniqueId val="{00000001-65B1-4DC8-9E37-DF9DFC5FD97C}"/>
+            </c:ext>
+          </c:extLst>
         </c:ser>
         <c:dLbls>
-          <c:numFmt formatCode="#,##0" sourceLinked="0"/>
-          <c:txPr>
-            <a:bodyPr/>
-            <a:lstStyle/>
-            <a:p>
-              <a:pPr>
-                <a:defRPr b="0" i="0" strike="noStrike" sz="1200" u="none">
-                  <a:solidFill>
-                    <a:srgbClr val="000000"/>
-                  </a:solidFill>
-                  <a:latin typeface="Arial"/>
-                </a:defRPr>
-              </a:pPr>
-            </a:p>
-          </c:txPr>
           <c:showLegendKey val="0"/>
           <c:showVal val="0"/>
           <c:showCatName val="0"/>
           <c:showSerName val="0"/>
           <c:showPercent val="0"/>
           <c:showBubbleSize val="0"/>
-          <c:showLeaderLines val="0"/>
         </c:dLbls>
         <c:marker val="1"/>
+        <c:smooth val="0"/>
         <c:axId val="2094734554"/>
         <c:axId val="2094734552"/>
-        <c:axId val="2094734556"/>
       </c:lineChart>
       <c:catAx>
         <c:axId val="2094734554"/>
@@ -456,13 +397,14 @@
                 <a:latin typeface="Arial"/>
               </a:defRPr>
             </a:pPr>
-            <a:endParaRPr lang="en-US"/>
+            <a:endParaRPr lang="ko-KR"/>
           </a:p>
         </c:txPr>
         <c:crossAx val="2094734552"/>
         <c:crosses val="autoZero"/>
         <c:auto val="1"/>
         <c:lblAlgn val="ctr"/>
+        <c:lblOffset val="100"/>
         <c:noMultiLvlLbl val="1"/>
       </c:catAx>
       <c:valAx>
@@ -508,7 +450,7 @@
                 <a:latin typeface="Arial"/>
               </a:defRPr>
             </a:pPr>
-            <a:endParaRPr lang="en-US"/>
+            <a:endParaRPr lang="ko-KR"/>
           </a:p>
         </c:txPr>
         <c:crossAx val="2094734554"/>
@@ -531,14 +473,15 @@
         <a:lstStyle/>
         <a:p>
           <a:pPr>
-            <a:defRPr sz="1000">      </a:defRPr>
+            <a:defRPr sz="1000"/>
           </a:pPr>
-          <a:endParaRPr lang="en-US"/>
+          <a:endParaRPr lang="ko-KR"/>
         </a:p>
       </c:txPr>
     </c:legend>
     <c:plotVisOnly val="1"/>
     <c:dispBlanksAs val="span"/>
+    <c:showDLblsOverMax val="1"/>
   </c:chart>
   <c:spPr>
     <a:solidFill>
@@ -556,9 +499,11 @@
 </file>
 
 <file path=ppt/charts/chart2.xml><?xml version="1.0" encoding="utf-8"?>
-<c:chartSpace xmlns:c="http://schemas.openxmlformats.org/drawingml/2006/chart" xmlns:a="http://schemas.openxmlformats.org/drawingml/2006/main" xmlns:r="http://schemas.openxmlformats.org/officeDocument/2006/relationships">
+<c:chartSpace xmlns:c="http://schemas.openxmlformats.org/drawingml/2006/chart" xmlns:a="http://schemas.openxmlformats.org/drawingml/2006/main" xmlns:r="http://schemas.openxmlformats.org/officeDocument/2006/relationships" xmlns:c16r2="http://schemas.microsoft.com/office/drawing/2015/06/chart">
   <c:date1904 val="0"/>
+  <c:lang val="ko-KR"/>
   <c:roundedCorners val="1"/>
+  <c:style val="2"/>
   <c:chart>
     <c:title>
       <c:tx>
@@ -586,13 +531,13 @@
           </a:p>
         </c:rich>
       </c:tx>
-      <c:layout/>
       <c:overlay val="0"/>
     </c:title>
     <c:autoTitleDeleted val="0"/>
     <c:plotArea>
       <c:layout/>
       <c:lineChart>
+        <c:grouping val="standard"/>
         <c:varyColors val="0"/>
         <c:ser>
           <c:idx val="0"/>
@@ -609,9 +554,6 @@
             </c:strRef>
           </c:tx>
           <c:spPr>
-            <a:solidFill>
-              <a:srgbClr val="F87171"/>
-            </a:solidFill>
             <a:ln w="31750" cap="flat">
               <a:solidFill>
                 <a:srgbClr val="F87171"/>
@@ -621,31 +563,6 @@
             </a:ln>
             <a:effectLst/>
           </c:spPr>
-          <c:invertIfNegative val="0"/>
-          <c:dLbls>
-            <c:numFmt formatCode="#,##0" sourceLinked="0"/>
-            <c:txPr>
-              <a:bodyPr/>
-              <a:lstStyle/>
-              <a:p>
-                <a:pPr>
-                  <a:defRPr b="0" i="0" strike="noStrike" sz="1200" u="none">
-                    <a:solidFill>
-                      <a:srgbClr val="000000"/>
-                    </a:solidFill>
-                    <a:latin typeface="Arial"/>
-                  </a:defRPr>
-                </a:pPr>
-              </a:p>
-            </c:txPr>
-            <c:showLegendKey val="0"/>
-            <c:showVal val="0"/>
-            <c:showCatName val="0"/>
-            <c:showSerName val="0"/>
-            <c:showPercent val="0"/>
-            <c:showBubbleSize val="0"/>
-            <c:showLeaderLines val="0"/>
-          </c:dLbls>
           <c:marker>
             <c:symbol val="circle"/>
             <c:size val="6"/>
@@ -664,29 +581,27 @@
             </c:spPr>
           </c:marker>
           <c:cat>
-            <c:multiLvlStrRef>
+            <c:strRef>
               <c:f>Sheet1!$A$2:$A$6</c:f>
-              <c:multiLvlStrCache>
+              <c:strCache>
                 <c:ptCount val="5"/>
-                <c:lvl>
-                  <c:pt idx="0">
-                    <c:v>1</c:v>
-                  </c:pt>
-                  <c:pt idx="1">
-                    <c:v>2</c:v>
-                  </c:pt>
-                  <c:pt idx="2">
-                    <c:v>3</c:v>
-                  </c:pt>
-                  <c:pt idx="3">
-                    <c:v>4</c:v>
-                  </c:pt>
-                  <c:pt idx="4">
-                    <c:v>5</c:v>
-                  </c:pt>
-                </c:lvl>
-              </c:multiLvlStrCache>
-            </c:multiLvlStrRef>
+                <c:pt idx="0">
+                  <c:v>1</c:v>
+                </c:pt>
+                <c:pt idx="1">
+                  <c:v>2</c:v>
+                </c:pt>
+                <c:pt idx="2">
+                  <c:v>3</c:v>
+                </c:pt>
+                <c:pt idx="3">
+                  <c:v>4</c:v>
+                </c:pt>
+                <c:pt idx="4">
+                  <c:v>5</c:v>
+                </c:pt>
+              </c:strCache>
+            </c:strRef>
           </c:cat>
           <c:val>
             <c:numRef>
@@ -713,6 +628,11 @@
             </c:numRef>
           </c:val>
           <c:smooth val="1"/>
+          <c:extLst>
+            <c:ext xmlns:c16="http://schemas.microsoft.com/office/drawing/2014/chart" uri="{C3380CC4-5D6E-409C-BE32-E72D297353CC}">
+              <c16:uniqueId val="{00000000-14FD-4A67-9853-A85A00E000A6}"/>
+            </c:ext>
+          </c:extLst>
         </c:ser>
         <c:ser>
           <c:idx val="1"/>
@@ -729,9 +649,6 @@
             </c:strRef>
           </c:tx>
           <c:spPr>
-            <a:solidFill>
-              <a:srgbClr val="FB923C"/>
-            </a:solidFill>
             <a:ln w="31750" cap="flat">
               <a:solidFill>
                 <a:srgbClr val="FB923C"/>
@@ -741,31 +658,6 @@
             </a:ln>
             <a:effectLst/>
           </c:spPr>
-          <c:invertIfNegative val="0"/>
-          <c:dLbls>
-            <c:numFmt formatCode="#,##0" sourceLinked="0"/>
-            <c:txPr>
-              <a:bodyPr/>
-              <a:lstStyle/>
-              <a:p>
-                <a:pPr>
-                  <a:defRPr b="0" i="0" strike="noStrike" sz="1200" u="none">
-                    <a:solidFill>
-                      <a:srgbClr val="000000"/>
-                    </a:solidFill>
-                    <a:latin typeface="Arial"/>
-                  </a:defRPr>
-                </a:pPr>
-              </a:p>
-            </c:txPr>
-            <c:showLegendKey val="0"/>
-            <c:showVal val="0"/>
-            <c:showCatName val="0"/>
-            <c:showSerName val="0"/>
-            <c:showPercent val="0"/>
-            <c:showBubbleSize val="0"/>
-            <c:showLeaderLines val="0"/>
-          </c:dLbls>
           <c:marker>
             <c:symbol val="circle"/>
             <c:size val="6"/>
@@ -784,29 +676,27 @@
             </c:spPr>
           </c:marker>
           <c:cat>
-            <c:multiLvlStrRef>
+            <c:strRef>
               <c:f>Sheet1!$A$2:$A$6</c:f>
-              <c:multiLvlStrCache>
+              <c:strCache>
                 <c:ptCount val="5"/>
-                <c:lvl>
-                  <c:pt idx="0">
-                    <c:v>1</c:v>
-                  </c:pt>
-                  <c:pt idx="1">
-                    <c:v>2</c:v>
-                  </c:pt>
-                  <c:pt idx="2">
-                    <c:v>3</c:v>
-                  </c:pt>
-                  <c:pt idx="3">
-                    <c:v>4</c:v>
-                  </c:pt>
-                  <c:pt idx="4">
-                    <c:v>5</c:v>
-                  </c:pt>
-                </c:lvl>
-              </c:multiLvlStrCache>
-            </c:multiLvlStrRef>
+                <c:pt idx="0">
+                  <c:v>1</c:v>
+                </c:pt>
+                <c:pt idx="1">
+                  <c:v>2</c:v>
+                </c:pt>
+                <c:pt idx="2">
+                  <c:v>3</c:v>
+                </c:pt>
+                <c:pt idx="3">
+                  <c:v>4</c:v>
+                </c:pt>
+                <c:pt idx="4">
+                  <c:v>5</c:v>
+                </c:pt>
+              </c:strCache>
+            </c:strRef>
           </c:cat>
           <c:val>
             <c:numRef>
@@ -833,35 +723,24 @@
             </c:numRef>
           </c:val>
           <c:smooth val="1"/>
+          <c:extLst>
+            <c:ext xmlns:c16="http://schemas.microsoft.com/office/drawing/2014/chart" uri="{C3380CC4-5D6E-409C-BE32-E72D297353CC}">
+              <c16:uniqueId val="{00000001-14FD-4A67-9853-A85A00E000A6}"/>
+            </c:ext>
+          </c:extLst>
         </c:ser>
         <c:dLbls>
-          <c:numFmt formatCode="#,##0" sourceLinked="0"/>
-          <c:txPr>
-            <a:bodyPr/>
-            <a:lstStyle/>
-            <a:p>
-              <a:pPr>
-                <a:defRPr b="0" i="0" strike="noStrike" sz="1200" u="none">
-                  <a:solidFill>
-                    <a:srgbClr val="000000"/>
-                  </a:solidFill>
-                  <a:latin typeface="Arial"/>
-                </a:defRPr>
-              </a:pPr>
-            </a:p>
-          </c:txPr>
           <c:showLegendKey val="0"/>
           <c:showVal val="0"/>
           <c:showCatName val="0"/>
           <c:showSerName val="0"/>
           <c:showPercent val="0"/>
           <c:showBubbleSize val="0"/>
-          <c:showLeaderLines val="0"/>
         </c:dLbls>
         <c:marker val="1"/>
+        <c:smooth val="0"/>
         <c:axId val="2094734554"/>
         <c:axId val="2094734552"/>
-        <c:axId val="2094734556"/>
       </c:lineChart>
       <c:catAx>
         <c:axId val="2094734554"/>
@@ -895,13 +774,14 @@
                 <a:latin typeface="Arial"/>
               </a:defRPr>
             </a:pPr>
-            <a:endParaRPr lang="en-US"/>
+            <a:endParaRPr lang="ko-KR"/>
           </a:p>
         </c:txPr>
         <c:crossAx val="2094734552"/>
         <c:crosses val="autoZero"/>
         <c:auto val="1"/>
         <c:lblAlgn val="ctr"/>
+        <c:lblOffset val="100"/>
         <c:noMultiLvlLbl val="1"/>
       </c:catAx>
       <c:valAx>
@@ -947,7 +827,7 @@
                 <a:latin typeface="Arial"/>
               </a:defRPr>
             </a:pPr>
-            <a:endParaRPr lang="en-US"/>
+            <a:endParaRPr lang="ko-KR"/>
           </a:p>
         </c:txPr>
         <c:crossAx val="2094734554"/>
@@ -970,14 +850,15 @@
         <a:lstStyle/>
         <a:p>
           <a:pPr>
-            <a:defRPr sz="1000">      </a:defRPr>
+            <a:defRPr sz="1000"/>
           </a:pPr>
-          <a:endParaRPr lang="en-US"/>
+          <a:endParaRPr lang="ko-KR"/>
         </a:p>
       </c:txPr>
     </c:legend>
     <c:plotVisOnly val="1"/>
     <c:dispBlanksAs val="span"/>
+    <c:showDLblsOverMax val="1"/>
   </c:chart>
   <c:spPr>
     <a:solidFill>
@@ -1016,240 +897,16 @@
           <a:chExt cx="0" cy="0"/>
         </a:xfrm>
       </p:grpSpPr>
-      <p:sp>
-        <p:nvSpPr>
-          <p:cNvPr id="2" name="Header Placeholder 1"/>
-          <p:cNvSpPr>
-            <a:spLocks noGrp="1"/>
-          </p:cNvSpPr>
-          <p:nvPr>
-            <p:ph type="hdr" sz="quarter"/>
-          </p:nvPr>
-        </p:nvSpPr>
-        <p:spPr>
-          <a:xfrm>
-            <a:off x="0" y="0"/>
-            <a:ext cx="2971800" cy="458788"/>
-          </a:xfrm>
-          <a:prstGeom prst="rect">
-            <a:avLst/>
-          </a:prstGeom>
-        </p:spPr>
-        <p:txBody>
-          <a:bodyPr vert="horz" lIns="91440" tIns="45720" rIns="91440" bIns="45720" rtlCol="0"/>
-          <a:lstStyle>
-            <a:lvl1pPr algn="l">
-              <a:defRPr sz="1200"/>
-            </a:lvl1pPr>
-          </a:lstStyle>
-          <a:p>
-            <a:endParaRPr lang="en-US"/>
-          </a:p>
-        </p:txBody>
-      </p:sp>
-      <p:sp>
-        <p:nvSpPr>
-          <p:cNvPr id="3" name="Date Placeholder 2"/>
-          <p:cNvSpPr>
-            <a:spLocks noGrp="1"/>
-          </p:cNvSpPr>
-          <p:nvPr>
-            <p:ph type="dt" idx="1"/>
-          </p:nvPr>
-        </p:nvSpPr>
-        <p:spPr>
-          <a:xfrm>
-            <a:off x="3884613" y="0"/>
-            <a:ext cx="2971800" cy="458788"/>
-          </a:xfrm>
-          <a:prstGeom prst="rect">
-            <a:avLst/>
-          </a:prstGeom>
-        </p:spPr>
-        <p:txBody>
-          <a:bodyPr vert="horz" lIns="91440" tIns="45720" rIns="91440" bIns="45720" rtlCol="0"/>
-          <a:lstStyle>
-            <a:lvl1pPr algn="r">
-              <a:defRPr sz="1200"/>
-            </a:lvl1pPr>
-          </a:lstStyle>
-          <a:p>
-            <a:fld id="{5282F153-3F37-0F45-9E97-73ACFA13230C}" type="datetimeFigureOut">
-              <a:rPr lang="en-US"/>
-              <a:t>7/23/19</a:t>
-            </a:fld>
-            <a:endParaRPr lang="en-US"/>
-          </a:p>
-        </p:txBody>
-      </p:sp>
-      <p:sp>
-        <p:nvSpPr>
-          <p:cNvPr id="4" name="Slide Image Placeholder 3"/>
-          <p:cNvSpPr>
-            <a:spLocks noGrp="1" noRot="1" noChangeAspect="1"/>
-          </p:cNvSpPr>
-          <p:nvPr>
-            <p:ph type="sldImg" idx="2"/>
-          </p:nvPr>
-        </p:nvSpPr>
-        <p:spPr>
-          <a:xfrm>
-            <a:off x="685800" y="1143000"/>
-            <a:ext cx="5486400" cy="3086100"/>
-          </a:xfrm>
-          <a:prstGeom prst="rect">
-            <a:avLst/>
-          </a:prstGeom>
-          <a:noFill/>
-          <a:ln w="12700">
-            <a:solidFill>
-              <a:prstClr val="black"/>
-            </a:solidFill>
-          </a:ln>
-        </p:spPr>
-        <p:txBody>
-          <a:bodyPr vert="horz" lIns="91440" tIns="45720" rIns="91440" bIns="45720" rtlCol="0" anchor="ctr"/>
-          <a:lstStyle/>
-          <a:p>
-            <a:endParaRPr lang="en-US"/>
-          </a:p>
-        </p:txBody>
-      </p:sp>
-      <p:sp>
-        <p:nvSpPr>
-          <p:cNvPr id="5" name="Notes Placeholder 4"/>
-          <p:cNvSpPr>
-            <a:spLocks noGrp="1"/>
-          </p:cNvSpPr>
-          <p:nvPr>
-            <p:ph type="body" sz="quarter" idx="3"/>
-          </p:nvPr>
-        </p:nvSpPr>
-        <p:spPr>
-          <a:xfrm>
-            <a:off x="685800" y="4400550"/>
-            <a:ext cx="5486400" cy="3600450"/>
-          </a:xfrm>
-          <a:prstGeom prst="rect">
-            <a:avLst/>
-          </a:prstGeom>
-        </p:spPr>
-        <p:txBody>
-          <a:bodyPr vert="horz" lIns="91440" tIns="45720" rIns="91440" bIns="45720" rtlCol="0"/>
-          <a:lstStyle/>
-          <a:p>
-            <a:pPr lvl="0"/>
-            <a:r>
-              <a:rPr lang="en-US"/>
-              <a:t>Click to edit Master text styles</a:t>
-            </a:r>
-          </a:p>
-          <a:p>
-            <a:pPr lvl="1"/>
-            <a:r>
-              <a:rPr lang="en-US"/>
-              <a:t>Second level</a:t>
-            </a:r>
-          </a:p>
-          <a:p>
-            <a:pPr lvl="2"/>
-            <a:r>
-              <a:rPr lang="en-US"/>
-              <a:t>Third level</a:t>
-            </a:r>
-          </a:p>
-          <a:p>
-            <a:pPr lvl="3"/>
-            <a:r>
-              <a:rPr lang="en-US"/>
-              <a:t>Fourth level</a:t>
-            </a:r>
-          </a:p>
-          <a:p>
-            <a:pPr lvl="4"/>
-            <a:r>
-              <a:rPr lang="en-US"/>
-              <a:t>Fifth level</a:t>
-            </a:r>
-          </a:p>
-        </p:txBody>
-      </p:sp>
-      <p:sp>
-        <p:nvSpPr>
-          <p:cNvPr id="6" name="Footer Placeholder 5"/>
-          <p:cNvSpPr>
-            <a:spLocks noGrp="1"/>
-          </p:cNvSpPr>
-          <p:nvPr>
-            <p:ph type="ftr" sz="quarter" idx="4"/>
-          </p:nvPr>
-        </p:nvSpPr>
-        <p:spPr>
-          <a:xfrm>
-            <a:off x="0" y="8685213"/>
-            <a:ext cx="2971800" cy="458787"/>
-          </a:xfrm>
-          <a:prstGeom prst="rect">
-            <a:avLst/>
-          </a:prstGeom>
-        </p:spPr>
-        <p:txBody>
-          <a:bodyPr vert="horz" lIns="91440" tIns="45720" rIns="91440" bIns="45720" rtlCol="0" anchor="b"/>
-          <a:lstStyle>
-            <a:lvl1pPr algn="l">
-              <a:defRPr sz="1200"/>
-            </a:lvl1pPr>
-          </a:lstStyle>
-          <a:p>
-            <a:endParaRPr lang="en-US"/>
-          </a:p>
-        </p:txBody>
-      </p:sp>
-      <p:sp>
-        <p:nvSpPr>
-          <p:cNvPr id="7" name="Slide Number Placeholder 6"/>
-          <p:cNvSpPr>
-            <a:spLocks noGrp="1"/>
-          </p:cNvSpPr>
-          <p:nvPr>
-            <p:ph type="sldNum" sz="quarter" idx="5"/>
-          </p:nvPr>
-        </p:nvSpPr>
-        <p:spPr>
-          <a:xfrm>
-            <a:off x="3884613" y="8685213"/>
-            <a:ext cx="2971800" cy="458787"/>
-          </a:xfrm>
-          <a:prstGeom prst="rect">
-            <a:avLst/>
-          </a:prstGeom>
-        </p:spPr>
-        <p:txBody>
-          <a:bodyPr vert="horz" lIns="91440" tIns="45720" rIns="91440" bIns="45720" rtlCol="0" anchor="b"/>
-          <a:lstStyle>
-            <a:lvl1pPr algn="r">
-              <a:defRPr sz="1200"/>
-            </a:lvl1pPr>
-          </a:lstStyle>
-          <a:p>
-            <a:fld id="{CE5E9CC1-C706-0F49-92D6-E571CC5EEA8F}" type="slidenum">
-              <a:rPr lang="en-US"/>
-              <a:t>‹#›</a:t>
-            </a:fld>
-            <a:endParaRPr lang="en-US"/>
-          </a:p>
-        </p:txBody>
-      </p:sp>
     </p:spTree>
     <p:extLst>
       <p:ext uri="{BB962C8B-B14F-4D97-AF65-F5344CB8AC3E}">
-        <p14:creationId xmlns:p14="http://schemas.microsoft.com/office/powerpoint/2010/main" val="1024086991"/>
+        <p14:creationId xmlns:p14="http://schemas.microsoft.com/office/powerpoint/2010/main" val="3135273260"/>
       </p:ext>
     </p:extLst>
   </p:cSld>
   <p:clrMap bg1="lt1" tx1="dk1" bg2="lt2" tx2="dk2" accent1="accent1" accent2="accent2" accent3="accent3" accent4="accent4" accent5="accent5" accent6="accent6" hlink="hlink" folHlink="folHlink"/>
   <p:notesStyle>
-    <a:lvl1pPr marL="0" algn="l" defTabSz="914400" rtl="0" eaLnBrk="1" latinLnBrk="0" hangingPunct="1">
+    <a:lvl1pPr marL="0" algn="l" defTabSz="914400" rtl="0" eaLnBrk="1" latinLnBrk="1" hangingPunct="1">
       <a:defRPr sz="1200" kern="1200">
         <a:solidFill>
           <a:schemeClr val="tx1"/>
@@ -1259,7 +916,7 @@
         <a:cs typeface="+mn-cs"/>
       </a:defRPr>
     </a:lvl1pPr>
-    <a:lvl2pPr marL="457200" algn="l" defTabSz="914400" rtl="0" eaLnBrk="1" latinLnBrk="0" hangingPunct="1">
+    <a:lvl2pPr marL="457200" algn="l" defTabSz="914400" rtl="0" eaLnBrk="1" latinLnBrk="1" hangingPunct="1">
       <a:defRPr sz="1200" kern="1200">
         <a:solidFill>
           <a:schemeClr val="tx1"/>
@@ -1269,7 +926,7 @@
         <a:cs typeface="+mn-cs"/>
       </a:defRPr>
     </a:lvl2pPr>
-    <a:lvl3pPr marL="914400" algn="l" defTabSz="914400" rtl="0" eaLnBrk="1" latinLnBrk="0" hangingPunct="1">
+    <a:lvl3pPr marL="914400" algn="l" defTabSz="914400" rtl="0" eaLnBrk="1" latinLnBrk="1" hangingPunct="1">
       <a:defRPr sz="1200" kern="1200">
         <a:solidFill>
           <a:schemeClr val="tx1"/>
@@ -1279,7 +936,7 @@
         <a:cs typeface="+mn-cs"/>
       </a:defRPr>
     </a:lvl3pPr>
-    <a:lvl4pPr marL="1371600" algn="l" defTabSz="914400" rtl="0" eaLnBrk="1" latinLnBrk="0" hangingPunct="1">
+    <a:lvl4pPr marL="1371600" algn="l" defTabSz="914400" rtl="0" eaLnBrk="1" latinLnBrk="1" hangingPunct="1">
       <a:defRPr sz="1200" kern="1200">
         <a:solidFill>
           <a:schemeClr val="tx1"/>
@@ -1289,7 +946,7 @@
         <a:cs typeface="+mn-cs"/>
       </a:defRPr>
     </a:lvl4pPr>
-    <a:lvl5pPr marL="1828800" algn="l" defTabSz="914400" rtl="0" eaLnBrk="1" latinLnBrk="0" hangingPunct="1">
+    <a:lvl5pPr marL="1828800" algn="l" defTabSz="914400" rtl="0" eaLnBrk="1" latinLnBrk="1" hangingPunct="1">
       <a:defRPr sz="1200" kern="1200">
         <a:solidFill>
           <a:schemeClr val="tx1"/>
@@ -1299,7 +956,7 @@
         <a:cs typeface="+mn-cs"/>
       </a:defRPr>
     </a:lvl5pPr>
-    <a:lvl6pPr marL="2286000" algn="l" defTabSz="914400" rtl="0" eaLnBrk="1" latinLnBrk="0" hangingPunct="1">
+    <a:lvl6pPr marL="2286000" algn="l" defTabSz="914400" rtl="0" eaLnBrk="1" latinLnBrk="1" hangingPunct="1">
       <a:defRPr sz="1200" kern="1200">
         <a:solidFill>
           <a:schemeClr val="tx1"/>
@@ -1309,7 +966,7 @@
         <a:cs typeface="+mn-cs"/>
       </a:defRPr>
     </a:lvl6pPr>
-    <a:lvl7pPr marL="2743200" algn="l" defTabSz="914400" rtl="0" eaLnBrk="1" latinLnBrk="0" hangingPunct="1">
+    <a:lvl7pPr marL="2743200" algn="l" defTabSz="914400" rtl="0" eaLnBrk="1" latinLnBrk="1" hangingPunct="1">
       <a:defRPr sz="1200" kern="1200">
         <a:solidFill>
           <a:schemeClr val="tx1"/>
@@ -1319,7 +976,7 @@
         <a:cs typeface="+mn-cs"/>
       </a:defRPr>
     </a:lvl7pPr>
-    <a:lvl8pPr marL="3200400" algn="l" defTabSz="914400" rtl="0" eaLnBrk="1" latinLnBrk="0" hangingPunct="1">
+    <a:lvl8pPr marL="3200400" algn="l" defTabSz="914400" rtl="0" eaLnBrk="1" latinLnBrk="1" hangingPunct="1">
       <a:defRPr sz="1200" kern="1200">
         <a:solidFill>
           <a:schemeClr val="tx1"/>
@@ -1329,7 +986,7 @@
         <a:cs typeface="+mn-cs"/>
       </a:defRPr>
     </a:lvl8pPr>
-    <a:lvl9pPr marL="3657600" algn="l" defTabSz="914400" rtl="0" eaLnBrk="1" latinLnBrk="0" hangingPunct="1">
+    <a:lvl9pPr marL="3657600" algn="l" defTabSz="914400" rtl="0" eaLnBrk="1" latinLnBrk="1" hangingPunct="1">
       <a:defRPr sz="1200" kern="1200">
         <a:solidFill>
           <a:schemeClr val="tx1"/>
@@ -1387,10 +1044,6 @@
           <a:bodyPr/>
           <a:lstStyle/>
           <a:p>
-            <a:r>
-              <a:rPr lang="en-US" dirty="0"/>
-              <a:t/>
-            </a:r>
             <a:endParaRPr lang="en-US" dirty="0"/>
           </a:p>
         </p:txBody>
@@ -1475,10 +1128,6 @@
           <a:bodyPr/>
           <a:lstStyle/>
           <a:p>
-            <a:r>
-              <a:rPr lang="en-US" dirty="0"/>
-              <a:t/>
-            </a:r>
             <a:endParaRPr lang="en-US" dirty="0"/>
           </a:p>
         </p:txBody>
@@ -1563,10 +1212,6 @@
           <a:bodyPr/>
           <a:lstStyle/>
           <a:p>
-            <a:r>
-              <a:rPr lang="en-US" dirty="0"/>
-              <a:t/>
-            </a:r>
             <a:endParaRPr lang="en-US" dirty="0"/>
           </a:p>
         </p:txBody>
@@ -1651,10 +1296,6 @@
           <a:bodyPr/>
           <a:lstStyle/>
           <a:p>
-            <a:r>
-              <a:rPr lang="en-US" dirty="0"/>
-              <a:t/>
-            </a:r>
             <a:endParaRPr lang="en-US" dirty="0"/>
           </a:p>
         </p:txBody>
@@ -1739,10 +1380,6 @@
           <a:bodyPr/>
           <a:lstStyle/>
           <a:p>
-            <a:r>
-              <a:rPr lang="en-US" dirty="0"/>
-              <a:t/>
-            </a:r>
             <a:endParaRPr lang="en-US" dirty="0"/>
           </a:p>
         </p:txBody>
@@ -1827,10 +1464,6 @@
           <a:bodyPr/>
           <a:lstStyle/>
           <a:p>
-            <a:r>
-              <a:rPr lang="en-US" dirty="0"/>
-              <a:t/>
-            </a:r>
             <a:endParaRPr lang="en-US" dirty="0"/>
           </a:p>
         </p:txBody>
@@ -1915,10 +1548,6 @@
           <a:bodyPr/>
           <a:lstStyle/>
           <a:p>
-            <a:r>
-              <a:rPr lang="en-US" dirty="0"/>
-              <a:t/>
-            </a:r>
             <a:endParaRPr lang="en-US" dirty="0"/>
           </a:p>
         </p:txBody>
@@ -2003,10 +1632,6 @@
           <a:bodyPr/>
           <a:lstStyle/>
           <a:p>
-            <a:r>
-              <a:rPr lang="en-US" dirty="0"/>
-              <a:t/>
-            </a:r>
             <a:endParaRPr lang="en-US" dirty="0"/>
           </a:p>
         </p:txBody>
@@ -2091,10 +1716,6 @@
           <a:bodyPr/>
           <a:lstStyle/>
           <a:p>
-            <a:r>
-              <a:rPr lang="en-US" dirty="0"/>
-              <a:t/>
-            </a:r>
             <a:endParaRPr lang="en-US" dirty="0"/>
           </a:p>
         </p:txBody>
@@ -2179,10 +1800,6 @@
           <a:bodyPr/>
           <a:lstStyle/>
           <a:p>
-            <a:r>
-              <a:rPr lang="en-US" dirty="0"/>
-              <a:t/>
-            </a:r>
             <a:endParaRPr lang="en-US" dirty="0"/>
           </a:p>
         </p:txBody>
@@ -2256,6 +1873,11 @@
 <file path=ppt/slideMasters/slideMaster1.xml><?xml version="1.0" encoding="utf-8"?>
 <p:sldMaster xmlns:a="http://schemas.openxmlformats.org/drawingml/2006/main" xmlns:r="http://schemas.openxmlformats.org/officeDocument/2006/relationships" xmlns:p="http://schemas.openxmlformats.org/presentationml/2006/main">
   <p:cSld>
+    <p:bg>
+      <p:bgRef idx="1001">
+        <a:schemeClr val="bg1"/>
+      </p:bgRef>
+    </p:bg>
     <p:spTree>
       <p:nvGrpSpPr>
         <p:cNvPr id="1" name=""/>
@@ -2538,6 +2160,7 @@
         <a:solidFill>
           <a:srgbClr val="1B2A4A"/>
         </a:solidFill>
+        <a:effectLst/>
       </p:bgPr>
     </p:bg>
     <p:spTree>
@@ -2633,14 +2256,14 @@
       </p:sp>
       <p:pic>
         <p:nvPicPr>
-          <p:cNvPr id="5" name="Image 0" descr="preencoded.png">    </p:cNvPr>
+          <p:cNvPr id="5" name="Image 0" descr="preencoded.png"/>
           <p:cNvPicPr>
             <a:picLocks noChangeAspect="1"/>
           </p:cNvPicPr>
           <p:nvPr/>
         </p:nvPicPr>
         <p:blipFill>
-          <a:blip r:embed="rId1"/>
+          <a:blip r:embed="rId3"/>
           <a:stretch>
             <a:fillRect/>
           </a:stretch>
@@ -2676,7 +2299,7 @@
           <a:bodyPr wrap="square" rtlCol="0" anchor="ctr"/>
           <a:lstStyle/>
           <a:p>
-            <a:pPr indent="0" marL="0">
+            <a:pPr marL="0" indent="0">
               <a:buNone/>
             </a:pPr>
             <a:r>
@@ -2715,7 +2338,7 @@
           <a:bodyPr wrap="square" rtlCol="0" anchor="ctr"/>
           <a:lstStyle/>
           <a:p>
-            <a:pPr indent="0" marL="0">
+            <a:pPr marL="0" indent="0">
               <a:buNone/>
             </a:pPr>
             <a:r>
@@ -2754,7 +2377,7 @@
           <a:bodyPr wrap="square" rtlCol="0" anchor="ctr"/>
           <a:lstStyle/>
           <a:p>
-            <a:pPr indent="0" marL="0">
+            <a:pPr marL="0" indent="0">
               <a:buNone/>
             </a:pPr>
             <a:r>
@@ -2818,7 +2441,7 @@
           <a:bodyPr wrap="square" rtlCol="0" anchor="ctr"/>
           <a:lstStyle/>
           <a:p>
-            <a:pPr indent="0" marL="0">
+            <a:pPr marL="0" indent="0">
               <a:buNone/>
             </a:pPr>
             <a:r>
@@ -2857,7 +2480,7 @@
           <a:bodyPr wrap="square" rtlCol="0" anchor="ctr"/>
           <a:lstStyle/>
           <a:p>
-            <a:pPr indent="0" marL="0">
+            <a:pPr marL="0" indent="0">
               <a:buNone/>
             </a:pPr>
             <a:r>
@@ -2891,6 +2514,7 @@
         <a:solidFill>
           <a:srgbClr val="1B2A4A"/>
         </a:solidFill>
+        <a:effectLst/>
       </p:bgPr>
     </p:bg>
     <p:spTree>
@@ -2978,7 +2602,7 @@
           <a:bodyPr wrap="square" rtlCol="0" anchor="ctr"/>
           <a:lstStyle/>
           <a:p>
-            <a:pPr algn="ctr" indent="0" marL="0">
+            <a:pPr marL="0" indent="0" algn="ctr">
               <a:buNone/>
             </a:pPr>
             <a:r>
@@ -3042,7 +2666,7 @@
           <a:bodyPr wrap="square" rtlCol="0" anchor="ctr"/>
           <a:lstStyle/>
           <a:p>
-            <a:pPr algn="ctr" indent="0" marL="0">
+            <a:pPr marL="0" indent="0" algn="ctr">
               <a:buNone/>
             </a:pPr>
             <a:r>
@@ -3081,7 +2705,7 @@
           <a:bodyPr wrap="square" rtlCol="0" anchor="ctr"/>
           <a:lstStyle/>
           <a:p>
-            <a:pPr algn="ctr" indent="0" marL="0">
+            <a:pPr marL="0" indent="0" algn="ctr">
               <a:buNone/>
             </a:pPr>
             <a:r>
@@ -3101,14 +2725,14 @@
       </p:sp>
       <p:pic>
         <p:nvPicPr>
-          <p:cNvPr id="8" name="Image 0" descr="preencoded.png">    </p:cNvPr>
+          <p:cNvPr id="8" name="Image 0" descr="preencoded.png"/>
           <p:cNvPicPr>
             <a:picLocks noChangeAspect="1"/>
           </p:cNvPicPr>
           <p:nvPr/>
         </p:nvPicPr>
         <p:blipFill>
-          <a:blip r:embed="rId1"/>
+          <a:blip r:embed="rId3"/>
           <a:stretch>
             <a:fillRect/>
           </a:stretch>
@@ -3144,7 +2768,7 @@
           <a:bodyPr wrap="square" rtlCol="0" anchor="ctr"/>
           <a:lstStyle/>
           <a:p>
-            <a:pPr algn="ctr" indent="0" marL="0">
+            <a:pPr marL="0" indent="0" algn="ctr">
               <a:buNone/>
             </a:pPr>
             <a:r>
@@ -3178,6 +2802,7 @@
         <a:solidFill>
           <a:srgbClr val="F1F5F9"/>
         </a:solidFill>
+        <a:effectLst/>
       </p:bgPr>
     </p:bg>
     <p:spTree>
@@ -3215,7 +2840,7 @@
           <a:bodyPr wrap="square" rtlCol="0" anchor="ctr"/>
           <a:lstStyle/>
           <a:p>
-            <a:pPr indent="0" marL="0">
+            <a:pPr marL="0" indent="0">
               <a:buNone/>
             </a:pPr>
             <a:r>
@@ -3257,7 +2882,7 @@
             <a:prstDash val="solid"/>
           </a:ln>
           <a:effectLst>
-            <a:outerShdw sx="100000" sy="100000" kx="0" ky="0" algn="bl" rotWithShape="0" blurRad="101600" dist="38100" dir="8100000">
+            <a:outerShdw blurRad="101600" dist="38100" dir="8100000" algn="bl" rotWithShape="0">
               <a:srgbClr val="000000">
                 <a:alpha val="15000"/>
               </a:srgbClr>
@@ -3311,7 +2936,7 @@
           <a:bodyPr wrap="square" rtlCol="0" anchor="ctr"/>
           <a:lstStyle/>
           <a:p>
-            <a:pPr algn="ctr" indent="0" marL="0">
+            <a:pPr marL="0" indent="0" algn="ctr">
               <a:buNone/>
             </a:pPr>
             <a:r>
@@ -3350,7 +2975,7 @@
           <a:bodyPr wrap="square" rtlCol="0" anchor="ctr"/>
           <a:lstStyle/>
           <a:p>
-            <a:pPr indent="0" marL="0">
+            <a:pPr marL="0" indent="0">
               <a:buNone/>
             </a:pPr>
             <a:r>
@@ -3389,7 +3014,7 @@
           <a:bodyPr wrap="square" rtlCol="0" anchor="ctr"/>
           <a:lstStyle/>
           <a:p>
-            <a:pPr indent="0" marL="0">
+            <a:pPr marL="0" indent="0">
               <a:buNone/>
             </a:pPr>
             <a:r>
@@ -3431,7 +3056,7 @@
             <a:prstDash val="solid"/>
           </a:ln>
           <a:effectLst>
-            <a:outerShdw sx="100000" sy="100000" kx="0" ky="0" algn="bl" rotWithShape="0" blurRad="101600" dist="38100" dir="8100000">
+            <a:outerShdw blurRad="101600" dist="38100" dir="8100000" algn="bl" rotWithShape="0">
               <a:srgbClr val="000000">
                 <a:alpha val="15000"/>
               </a:srgbClr>
@@ -3485,7 +3110,7 @@
           <a:bodyPr wrap="square" rtlCol="0" anchor="ctr"/>
           <a:lstStyle/>
           <a:p>
-            <a:pPr algn="ctr" indent="0" marL="0">
+            <a:pPr marL="0" indent="0" algn="ctr">
               <a:buNone/>
             </a:pPr>
             <a:r>
@@ -3524,7 +3149,7 @@
           <a:bodyPr wrap="square" rtlCol="0" anchor="ctr"/>
           <a:lstStyle/>
           <a:p>
-            <a:pPr indent="0" marL="0">
+            <a:pPr marL="0" indent="0">
               <a:buNone/>
             </a:pPr>
             <a:r>
@@ -3563,7 +3188,7 @@
           <a:bodyPr wrap="square" rtlCol="0" anchor="ctr"/>
           <a:lstStyle/>
           <a:p>
-            <a:pPr indent="0" marL="0">
+            <a:pPr marL="0" indent="0">
               <a:buNone/>
             </a:pPr>
             <a:r>
@@ -3605,7 +3230,7 @@
             <a:prstDash val="solid"/>
           </a:ln>
           <a:effectLst>
-            <a:outerShdw sx="100000" sy="100000" kx="0" ky="0" algn="bl" rotWithShape="0" blurRad="101600" dist="38100" dir="8100000">
+            <a:outerShdw blurRad="101600" dist="38100" dir="8100000" algn="bl" rotWithShape="0">
               <a:srgbClr val="000000">
                 <a:alpha val="15000"/>
               </a:srgbClr>
@@ -3659,7 +3284,7 @@
           <a:bodyPr wrap="square" rtlCol="0" anchor="ctr"/>
           <a:lstStyle/>
           <a:p>
-            <a:pPr algn="ctr" indent="0" marL="0">
+            <a:pPr marL="0" indent="0" algn="ctr">
               <a:buNone/>
             </a:pPr>
             <a:r>
@@ -3698,7 +3323,7 @@
           <a:bodyPr wrap="square" rtlCol="0" anchor="ctr"/>
           <a:lstStyle/>
           <a:p>
-            <a:pPr indent="0" marL="0">
+            <a:pPr marL="0" indent="0">
               <a:buNone/>
             </a:pPr>
             <a:r>
@@ -3737,7 +3362,7 @@
           <a:bodyPr wrap="square" rtlCol="0" anchor="ctr"/>
           <a:lstStyle/>
           <a:p>
-            <a:pPr indent="0" marL="0">
+            <a:pPr marL="0" indent="0">
               <a:buNone/>
             </a:pPr>
             <a:r>
@@ -3779,7 +3404,7 @@
             <a:prstDash val="solid"/>
           </a:ln>
           <a:effectLst>
-            <a:outerShdw sx="100000" sy="100000" kx="0" ky="0" algn="bl" rotWithShape="0" blurRad="101600" dist="38100" dir="8100000">
+            <a:outerShdw blurRad="101600" dist="38100" dir="8100000" algn="bl" rotWithShape="0">
               <a:srgbClr val="000000">
                 <a:alpha val="15000"/>
               </a:srgbClr>
@@ -3833,7 +3458,7 @@
           <a:bodyPr wrap="square" rtlCol="0" anchor="ctr"/>
           <a:lstStyle/>
           <a:p>
-            <a:pPr algn="ctr" indent="0" marL="0">
+            <a:pPr marL="0" indent="0" algn="ctr">
               <a:buNone/>
             </a:pPr>
             <a:r>
@@ -3872,7 +3497,7 @@
           <a:bodyPr wrap="square" rtlCol="0" anchor="ctr"/>
           <a:lstStyle/>
           <a:p>
-            <a:pPr indent="0" marL="0">
+            <a:pPr marL="0" indent="0">
               <a:buNone/>
             </a:pPr>
             <a:r>
@@ -3911,7 +3536,7 @@
           <a:bodyPr wrap="square" rtlCol="0" anchor="ctr"/>
           <a:lstStyle/>
           <a:p>
-            <a:pPr indent="0" marL="0">
+            <a:pPr marL="0" indent="0">
               <a:buNone/>
             </a:pPr>
             <a:r>
@@ -3953,7 +3578,7 @@
             <a:prstDash val="solid"/>
           </a:ln>
           <a:effectLst>
-            <a:outerShdw sx="100000" sy="100000" kx="0" ky="0" algn="bl" rotWithShape="0" blurRad="101600" dist="38100" dir="8100000">
+            <a:outerShdw blurRad="101600" dist="38100" dir="8100000" algn="bl" rotWithShape="0">
               <a:srgbClr val="000000">
                 <a:alpha val="15000"/>
               </a:srgbClr>
@@ -4007,7 +3632,7 @@
           <a:bodyPr wrap="square" rtlCol="0" anchor="ctr"/>
           <a:lstStyle/>
           <a:p>
-            <a:pPr algn="ctr" indent="0" marL="0">
+            <a:pPr marL="0" indent="0" algn="ctr">
               <a:buNone/>
             </a:pPr>
             <a:r>
@@ -4046,7 +3671,7 @@
           <a:bodyPr wrap="square" rtlCol="0" anchor="ctr"/>
           <a:lstStyle/>
           <a:p>
-            <a:pPr indent="0" marL="0">
+            <a:pPr marL="0" indent="0">
               <a:buNone/>
             </a:pPr>
             <a:r>
@@ -4085,7 +3710,7 @@
           <a:bodyPr wrap="square" rtlCol="0" anchor="ctr"/>
           <a:lstStyle/>
           <a:p>
-            <a:pPr indent="0" marL="0">
+            <a:pPr marL="0" indent="0">
               <a:buNone/>
             </a:pPr>
             <a:r>
@@ -4127,7 +3752,7 @@
             <a:prstDash val="solid"/>
           </a:ln>
           <a:effectLst>
-            <a:outerShdw sx="100000" sy="100000" kx="0" ky="0" algn="bl" rotWithShape="0" blurRad="101600" dist="38100" dir="8100000">
+            <a:outerShdw blurRad="101600" dist="38100" dir="8100000" algn="bl" rotWithShape="0">
               <a:srgbClr val="000000">
                 <a:alpha val="15000"/>
               </a:srgbClr>
@@ -4181,7 +3806,7 @@
           <a:bodyPr wrap="square" rtlCol="0" anchor="ctr"/>
           <a:lstStyle/>
           <a:p>
-            <a:pPr algn="ctr" indent="0" marL="0">
+            <a:pPr marL="0" indent="0" algn="ctr">
               <a:buNone/>
             </a:pPr>
             <a:r>
@@ -4220,7 +3845,7 @@
           <a:bodyPr wrap="square" rtlCol="0" anchor="ctr"/>
           <a:lstStyle/>
           <a:p>
-            <a:pPr indent="0" marL="0">
+            <a:pPr marL="0" indent="0">
               <a:buNone/>
             </a:pPr>
             <a:r>
@@ -4259,7 +3884,7 @@
           <a:bodyPr wrap="square" rtlCol="0" anchor="ctr"/>
           <a:lstStyle/>
           <a:p>
-            <a:pPr indent="0" marL="0">
+            <a:pPr marL="0" indent="0">
               <a:buNone/>
             </a:pPr>
             <a:r>
@@ -4293,6 +3918,7 @@
         <a:solidFill>
           <a:srgbClr val="F1F5F9"/>
         </a:solidFill>
+        <a:effectLst/>
       </p:bgPr>
     </p:bg>
     <p:spTree>
@@ -4330,7 +3956,7 @@
           <a:bodyPr wrap="square" rtlCol="0" anchor="ctr"/>
           <a:lstStyle/>
           <a:p>
-            <a:pPr indent="0" marL="0">
+            <a:pPr marL="0" indent="0">
               <a:buNone/>
             </a:pPr>
             <a:r>
@@ -4372,7 +3998,7 @@
             <a:prstDash val="solid"/>
           </a:ln>
           <a:effectLst>
-            <a:outerShdw sx="100000" sy="100000" kx="0" ky="0" algn="bl" rotWithShape="0" blurRad="101600" dist="38100" dir="8100000">
+            <a:outerShdw blurRad="101600" dist="38100" dir="8100000" algn="bl" rotWithShape="0">
               <a:srgbClr val="000000">
                 <a:alpha val="15000"/>
               </a:srgbClr>
@@ -4407,14 +4033,14 @@
       </p:sp>
       <p:pic>
         <p:nvPicPr>
-          <p:cNvPr id="5" name="Image 0" descr="preencoded.png">    </p:cNvPr>
+          <p:cNvPr id="5" name="Image 0" descr="preencoded.png"/>
           <p:cNvPicPr>
             <a:picLocks noChangeAspect="1"/>
           </p:cNvPicPr>
           <p:nvPr/>
         </p:nvPicPr>
         <p:blipFill>
-          <a:blip r:embed="rId1"/>
+          <a:blip r:embed="rId3"/>
           <a:stretch>
             <a:fillRect/>
           </a:stretch>
@@ -4450,7 +4076,7 @@
           <a:bodyPr wrap="square" rtlCol="0" anchor="ctr"/>
           <a:lstStyle/>
           <a:p>
-            <a:pPr indent="0" marL="0">
+            <a:pPr marL="0" indent="0">
               <a:buNone/>
             </a:pPr>
             <a:r>
@@ -4619,7 +4245,7 @@
             <a:prstDash val="solid"/>
           </a:ln>
           <a:effectLst>
-            <a:outerShdw sx="100000" sy="100000" kx="0" ky="0" algn="bl" rotWithShape="0" blurRad="101600" dist="38100" dir="8100000">
+            <a:outerShdw blurRad="101600" dist="38100" dir="8100000" algn="bl" rotWithShape="0">
               <a:srgbClr val="000000">
                 <a:alpha val="15000"/>
               </a:srgbClr>
@@ -4654,14 +4280,14 @@
       </p:sp>
       <p:pic>
         <p:nvPicPr>
-          <p:cNvPr id="10" name="Image 1" descr="preencoded.png">    </p:cNvPr>
+          <p:cNvPr id="10" name="Image 1" descr="preencoded.png"/>
           <p:cNvPicPr>
             <a:picLocks noChangeAspect="1"/>
           </p:cNvPicPr>
           <p:nvPr/>
         </p:nvPicPr>
         <p:blipFill>
-          <a:blip r:embed="rId2"/>
+          <a:blip r:embed="rId4"/>
           <a:stretch>
             <a:fillRect/>
           </a:stretch>
@@ -4697,7 +4323,7 @@
           <a:bodyPr wrap="square" rtlCol="0" anchor="ctr"/>
           <a:lstStyle/>
           <a:p>
-            <a:pPr indent="0" marL="0">
+            <a:pPr marL="0" indent="0">
               <a:buNone/>
             </a:pPr>
             <a:r>
@@ -4761,7 +4387,7 @@
           <a:bodyPr wrap="square" rtlCol="0" anchor="ctr"/>
           <a:lstStyle/>
           <a:p>
-            <a:pPr algn="ctr" indent="0" marL="0">
+            <a:pPr marL="0" indent="0" algn="ctr">
               <a:buNone/>
             </a:pPr>
             <a:r>
@@ -4825,7 +4451,7 @@
           <a:bodyPr wrap="square" rtlCol="0" anchor="ctr"/>
           <a:lstStyle/>
           <a:p>
-            <a:pPr algn="ctr" indent="0" marL="0">
+            <a:pPr marL="0" indent="0" algn="ctr">
               <a:buNone/>
             </a:pPr>
             <a:r>
@@ -4842,7 +4468,7 @@
             <a:endParaRPr lang="en-US" sz="950" dirty="0"/>
           </a:p>
           <a:p>
-            <a:pPr algn="ctr" indent="0" marL="0">
+            <a:pPr marL="0" indent="0" algn="ctr">
               <a:buNone/>
             </a:pPr>
             <a:r>
@@ -4906,7 +4532,7 @@
           <a:bodyPr wrap="square" rtlCol="0" anchor="ctr"/>
           <a:lstStyle/>
           <a:p>
-            <a:pPr algn="ctr" indent="0" marL="0">
+            <a:pPr marL="0" indent="0" algn="ctr">
               <a:buNone/>
             </a:pPr>
             <a:r>
@@ -4970,7 +4596,7 @@
           <a:bodyPr wrap="square" rtlCol="0" anchor="ctr"/>
           <a:lstStyle/>
           <a:p>
-            <a:pPr algn="l" indent="0" marL="0">
+            <a:pPr marL="0" indent="0" algn="l">
               <a:buNone/>
             </a:pPr>
             <a:r>
@@ -5034,7 +4660,7 @@
           <a:bodyPr wrap="square" rtlCol="0" anchor="ctr"/>
           <a:lstStyle/>
           <a:p>
-            <a:pPr algn="ctr" indent="0" marL="0">
+            <a:pPr marL="0" indent="0" algn="ctr">
               <a:buNone/>
             </a:pPr>
             <a:r>
@@ -5098,7 +4724,7 @@
           <a:bodyPr wrap="square" rtlCol="0" anchor="ctr"/>
           <a:lstStyle/>
           <a:p>
-            <a:pPr algn="ctr" indent="0" marL="0">
+            <a:pPr marL="0" indent="0" algn="ctr">
               <a:buNone/>
             </a:pPr>
             <a:r>
@@ -5162,7 +4788,7 @@
           <a:bodyPr wrap="square" rtlCol="0" anchor="ctr"/>
           <a:lstStyle/>
           <a:p>
-            <a:pPr algn="l" indent="0" marL="0">
+            <a:pPr marL="0" indent="0" algn="l">
               <a:buNone/>
             </a:pPr>
             <a:r>
@@ -5226,7 +4852,7 @@
           <a:bodyPr wrap="square" rtlCol="0" anchor="ctr"/>
           <a:lstStyle/>
           <a:p>
-            <a:pPr algn="ctr" indent="0" marL="0">
+            <a:pPr marL="0" indent="0" algn="ctr">
               <a:buNone/>
             </a:pPr>
             <a:r>
@@ -5290,7 +4916,7 @@
           <a:bodyPr wrap="square" rtlCol="0" anchor="ctr"/>
           <a:lstStyle/>
           <a:p>
-            <a:pPr algn="ctr" indent="0" marL="0">
+            <a:pPr marL="0" indent="0" algn="ctr">
               <a:buNone/>
             </a:pPr>
             <a:r>
@@ -5354,7 +4980,7 @@
           <a:bodyPr wrap="square" rtlCol="0" anchor="ctr"/>
           <a:lstStyle/>
           <a:p>
-            <a:pPr algn="l" indent="0" marL="0">
+            <a:pPr marL="0" indent="0" algn="l">
               <a:buNone/>
             </a:pPr>
             <a:r>
@@ -5418,7 +5044,7 @@
           <a:bodyPr wrap="square" rtlCol="0" anchor="ctr"/>
           <a:lstStyle/>
           <a:p>
-            <a:pPr algn="ctr" indent="0" marL="0">
+            <a:pPr marL="0" indent="0" algn="ctr">
               <a:buNone/>
             </a:pPr>
             <a:r>
@@ -5482,7 +5108,7 @@
           <a:bodyPr wrap="square" rtlCol="0" anchor="ctr"/>
           <a:lstStyle/>
           <a:p>
-            <a:pPr algn="ctr" indent="0" marL="0">
+            <a:pPr marL="0" indent="0" algn="ctr">
               <a:buNone/>
             </a:pPr>
             <a:r>
@@ -5546,7 +5172,7 @@
           <a:bodyPr wrap="square" rtlCol="0" anchor="ctr"/>
           <a:lstStyle/>
           <a:p>
-            <a:pPr algn="l" indent="0" marL="0">
+            <a:pPr marL="0" indent="0" algn="l">
               <a:buNone/>
             </a:pPr>
             <a:r>
@@ -5610,7 +5236,7 @@
           <a:bodyPr wrap="square" rtlCol="0" anchor="ctr"/>
           <a:lstStyle/>
           <a:p>
-            <a:pPr algn="ctr" indent="0" marL="0">
+            <a:pPr marL="0" indent="0" algn="ctr">
               <a:buNone/>
             </a:pPr>
             <a:r>
@@ -5674,7 +5300,7 @@
           <a:bodyPr wrap="square" rtlCol="0" anchor="ctr"/>
           <a:lstStyle/>
           <a:p>
-            <a:pPr algn="ctr" indent="0" marL="0">
+            <a:pPr marL="0" indent="0" algn="ctr">
               <a:buNone/>
             </a:pPr>
             <a:r>
@@ -5738,7 +5364,7 @@
           <a:bodyPr wrap="square" rtlCol="0" anchor="ctr"/>
           <a:lstStyle/>
           <a:p>
-            <a:pPr algn="l" indent="0" marL="0">
+            <a:pPr marL="0" indent="0" algn="l">
               <a:buNone/>
             </a:pPr>
             <a:r>
@@ -5802,7 +5428,7 @@
           <a:bodyPr wrap="square" rtlCol="0" anchor="ctr"/>
           <a:lstStyle/>
           <a:p>
-            <a:pPr algn="ctr" indent="0" marL="0">
+            <a:pPr marL="0" indent="0" algn="ctr">
               <a:buNone/>
             </a:pPr>
             <a:r>
@@ -5866,7 +5492,7 @@
           <a:bodyPr wrap="square" rtlCol="0" anchor="ctr"/>
           <a:lstStyle/>
           <a:p>
-            <a:pPr algn="ctr" indent="0" marL="0">
+            <a:pPr marL="0" indent="0" algn="ctr">
               <a:buNone/>
             </a:pPr>
             <a:r>
@@ -5900,6 +5526,7 @@
         <a:solidFill>
           <a:srgbClr val="F1F5F9"/>
         </a:solidFill>
+        <a:effectLst/>
       </p:bgPr>
     </p:bg>
     <p:spTree>
@@ -5937,7 +5564,7 @@
           <a:bodyPr wrap="square" rtlCol="0" anchor="ctr"/>
           <a:lstStyle/>
           <a:p>
-            <a:pPr indent="0" marL="0">
+            <a:pPr marL="0" indent="0">
               <a:buNone/>
             </a:pPr>
             <a:r>
@@ -5979,7 +5606,7 @@
             <a:prstDash val="solid"/>
           </a:ln>
           <a:effectLst>
-            <a:outerShdw sx="100000" sy="100000" kx="0" ky="0" algn="bl" rotWithShape="0" blurRad="101600" dist="38100" dir="8100000">
+            <a:outerShdw blurRad="101600" dist="38100" dir="8100000" algn="bl" rotWithShape="0">
               <a:srgbClr val="000000">
                 <a:alpha val="15000"/>
               </a:srgbClr>
@@ -6033,7 +5660,7 @@
           <a:bodyPr wrap="square" rtlCol="0" anchor="ctr"/>
           <a:lstStyle/>
           <a:p>
-            <a:pPr algn="ctr" indent="0" marL="0">
+            <a:pPr marL="0" indent="0" algn="ctr">
               <a:buNone/>
             </a:pPr>
             <a:r>
@@ -6072,7 +5699,7 @@
           <a:bodyPr wrap="square" rtlCol="0" anchor="ctr"/>
           <a:lstStyle/>
           <a:p>
-            <a:pPr algn="ctr" indent="0" marL="0">
+            <a:pPr marL="0" indent="0" algn="ctr">
               <a:buNone/>
             </a:pPr>
             <a:r>
@@ -6111,7 +5738,7 @@
           <a:bodyPr wrap="square" rtlCol="0" anchor="ctr"/>
           <a:lstStyle/>
           <a:p>
-            <a:pPr algn="ctr" indent="0" marL="0">
+            <a:pPr marL="0" indent="0" algn="ctr">
               <a:buNone/>
             </a:pPr>
             <a:r>
@@ -6150,7 +5777,7 @@
           <a:bodyPr wrap="square" rtlCol="0" anchor="ctr"/>
           <a:lstStyle/>
           <a:p>
-            <a:pPr algn="ctr" indent="0" marL="0">
+            <a:pPr marL="0" indent="0" algn="ctr">
               <a:buNone/>
             </a:pPr>
             <a:r>
@@ -6192,7 +5819,7 @@
             <a:prstDash val="solid"/>
           </a:ln>
           <a:effectLst>
-            <a:outerShdw sx="100000" sy="100000" kx="0" ky="0" algn="bl" rotWithShape="0" blurRad="101600" dist="38100" dir="8100000">
+            <a:outerShdw blurRad="101600" dist="38100" dir="8100000" algn="bl" rotWithShape="0">
               <a:srgbClr val="000000">
                 <a:alpha val="15000"/>
               </a:srgbClr>
@@ -6246,7 +5873,7 @@
           <a:bodyPr wrap="square" rtlCol="0" anchor="ctr"/>
           <a:lstStyle/>
           <a:p>
-            <a:pPr algn="ctr" indent="0" marL="0">
+            <a:pPr marL="0" indent="0" algn="ctr">
               <a:buNone/>
             </a:pPr>
             <a:r>
@@ -6285,7 +5912,7 @@
           <a:bodyPr wrap="square" rtlCol="0" anchor="ctr"/>
           <a:lstStyle/>
           <a:p>
-            <a:pPr algn="ctr" indent="0" marL="0">
+            <a:pPr marL="0" indent="0" algn="ctr">
               <a:buNone/>
             </a:pPr>
             <a:r>
@@ -6324,7 +5951,7 @@
           <a:bodyPr wrap="square" rtlCol="0" anchor="ctr"/>
           <a:lstStyle/>
           <a:p>
-            <a:pPr algn="ctr" indent="0" marL="0">
+            <a:pPr marL="0" indent="0" algn="ctr">
               <a:buNone/>
             </a:pPr>
             <a:r>
@@ -6363,7 +5990,7 @@
           <a:bodyPr wrap="square" rtlCol="0" anchor="ctr"/>
           <a:lstStyle/>
           <a:p>
-            <a:pPr algn="ctr" indent="0" marL="0">
+            <a:pPr marL="0" indent="0" algn="ctr">
               <a:buNone/>
             </a:pPr>
             <a:r>
@@ -6405,7 +6032,7 @@
             <a:prstDash val="solid"/>
           </a:ln>
           <a:effectLst>
-            <a:outerShdw sx="100000" sy="100000" kx="0" ky="0" algn="bl" rotWithShape="0" blurRad="101600" dist="38100" dir="8100000">
+            <a:outerShdw blurRad="101600" dist="38100" dir="8100000" algn="bl" rotWithShape="0">
               <a:srgbClr val="000000">
                 <a:alpha val="15000"/>
               </a:srgbClr>
@@ -6459,7 +6086,7 @@
           <a:bodyPr wrap="square" rtlCol="0" anchor="ctr"/>
           <a:lstStyle/>
           <a:p>
-            <a:pPr algn="ctr" indent="0" marL="0">
+            <a:pPr marL="0" indent="0" algn="ctr">
               <a:buNone/>
             </a:pPr>
             <a:r>
@@ -6498,7 +6125,7 @@
           <a:bodyPr wrap="square" rtlCol="0" anchor="ctr"/>
           <a:lstStyle/>
           <a:p>
-            <a:pPr algn="ctr" indent="0" marL="0">
+            <a:pPr marL="0" indent="0" algn="ctr">
               <a:buNone/>
             </a:pPr>
             <a:r>
@@ -6537,7 +6164,7 @@
           <a:bodyPr wrap="square" rtlCol="0" anchor="ctr"/>
           <a:lstStyle/>
           <a:p>
-            <a:pPr algn="ctr" indent="0" marL="0">
+            <a:pPr marL="0" indent="0" algn="ctr">
               <a:buNone/>
             </a:pPr>
             <a:r>
@@ -6576,7 +6203,7 @@
           <a:bodyPr wrap="square" rtlCol="0" anchor="ctr"/>
           <a:lstStyle/>
           <a:p>
-            <a:pPr algn="ctr" indent="0" marL="0">
+            <a:pPr marL="0" indent="0" algn="ctr">
               <a:buNone/>
             </a:pPr>
             <a:r>
@@ -6618,7 +6245,7 @@
             <a:prstDash val="solid"/>
           </a:ln>
           <a:effectLst>
-            <a:outerShdw sx="100000" sy="100000" kx="0" ky="0" algn="bl" rotWithShape="0" blurRad="101600" dist="38100" dir="8100000">
+            <a:outerShdw blurRad="101600" dist="38100" dir="8100000" algn="bl" rotWithShape="0">
               <a:srgbClr val="000000">
                 <a:alpha val="15000"/>
               </a:srgbClr>
@@ -6672,7 +6299,7 @@
           <a:bodyPr wrap="square" rtlCol="0" anchor="ctr"/>
           <a:lstStyle/>
           <a:p>
-            <a:pPr algn="ctr" indent="0" marL="0">
+            <a:pPr marL="0" indent="0" algn="ctr">
               <a:buNone/>
             </a:pPr>
             <a:r>
@@ -6711,7 +6338,7 @@
           <a:bodyPr wrap="square" rtlCol="0" anchor="ctr"/>
           <a:lstStyle/>
           <a:p>
-            <a:pPr algn="ctr" indent="0" marL="0">
+            <a:pPr marL="0" indent="0" algn="ctr">
               <a:buNone/>
             </a:pPr>
             <a:r>
@@ -6750,7 +6377,7 @@
           <a:bodyPr wrap="square" rtlCol="0" anchor="ctr"/>
           <a:lstStyle/>
           <a:p>
-            <a:pPr algn="ctr" indent="0" marL="0">
+            <a:pPr marL="0" indent="0" algn="ctr">
               <a:buNone/>
             </a:pPr>
             <a:r>
@@ -6789,7 +6416,7 @@
           <a:bodyPr wrap="square" rtlCol="0" anchor="ctr"/>
           <a:lstStyle/>
           <a:p>
-            <a:pPr algn="ctr" indent="0" marL="0">
+            <a:pPr marL="0" indent="0" algn="ctr">
               <a:buNone/>
             </a:pPr>
             <a:r>
@@ -6831,7 +6458,7 @@
             <a:prstDash val="solid"/>
           </a:ln>
           <a:effectLst>
-            <a:outerShdw sx="100000" sy="100000" kx="0" ky="0" algn="bl" rotWithShape="0" blurRad="101600" dist="38100" dir="8100000">
+            <a:outerShdw blurRad="101600" dist="38100" dir="8100000" algn="bl" rotWithShape="0">
               <a:srgbClr val="000000">
                 <a:alpha val="15000"/>
               </a:srgbClr>
@@ -6885,7 +6512,7 @@
           <a:bodyPr wrap="square" rtlCol="0" anchor="ctr"/>
           <a:lstStyle/>
           <a:p>
-            <a:pPr algn="ctr" indent="0" marL="0">
+            <a:pPr marL="0" indent="0" algn="ctr">
               <a:buNone/>
             </a:pPr>
             <a:r>
@@ -6924,7 +6551,7 @@
           <a:bodyPr wrap="square" rtlCol="0" anchor="ctr"/>
           <a:lstStyle/>
           <a:p>
-            <a:pPr algn="ctr" indent="0" marL="0">
+            <a:pPr marL="0" indent="0" algn="ctr">
               <a:buNone/>
             </a:pPr>
             <a:r>
@@ -6963,7 +6590,7 @@
           <a:bodyPr wrap="square" rtlCol="0" anchor="ctr"/>
           <a:lstStyle/>
           <a:p>
-            <a:pPr algn="ctr" indent="0" marL="0">
+            <a:pPr marL="0" indent="0" algn="ctr">
               <a:buNone/>
             </a:pPr>
             <a:r>
@@ -7002,7 +6629,7 @@
           <a:bodyPr wrap="square" rtlCol="0" anchor="ctr"/>
           <a:lstStyle/>
           <a:p>
-            <a:pPr algn="ctr" indent="0" marL="0">
+            <a:pPr marL="0" indent="0" algn="ctr">
               <a:buNone/>
             </a:pPr>
             <a:r>
@@ -7044,7 +6671,7 @@
             <a:prstDash val="solid"/>
           </a:ln>
           <a:effectLst>
-            <a:outerShdw sx="100000" sy="100000" kx="0" ky="0" algn="bl" rotWithShape="0" blurRad="101600" dist="38100" dir="8100000">
+            <a:outerShdw blurRad="101600" dist="38100" dir="8100000" algn="bl" rotWithShape="0">
               <a:srgbClr val="000000">
                 <a:alpha val="15000"/>
               </a:srgbClr>
@@ -7079,14 +6706,14 @@
       </p:sp>
       <p:pic>
         <p:nvPicPr>
-          <p:cNvPr id="35" name="Image 0" descr="preencoded.png">    </p:cNvPr>
+          <p:cNvPr id="35" name="Image 0" descr="preencoded.png"/>
           <p:cNvPicPr>
             <a:picLocks noChangeAspect="1"/>
           </p:cNvPicPr>
           <p:nvPr/>
         </p:nvPicPr>
         <p:blipFill>
-          <a:blip r:embed="rId1"/>
+          <a:blip r:embed="rId3"/>
           <a:stretch>
             <a:fillRect/>
           </a:stretch>
@@ -7122,7 +6749,7 @@
           <a:bodyPr wrap="square" rtlCol="0" anchor="ctr"/>
           <a:lstStyle/>
           <a:p>
-            <a:pPr indent="0" marL="0">
+            <a:pPr marL="0" indent="0">
               <a:buNone/>
             </a:pPr>
             <a:r>
@@ -7161,7 +6788,7 @@
           <a:bodyPr wrap="square" rtlCol="0" anchor="ctr"/>
           <a:lstStyle/>
           <a:p>
-            <a:pPr indent="0" marL="0">
+            <a:pPr marL="0" indent="0">
               <a:buNone/>
             </a:pPr>
             <a:r>
@@ -7178,7 +6805,7 @@
             <a:endParaRPr lang="en-US" sz="900" dirty="0"/>
           </a:p>
           <a:p>
-            <a:pPr indent="0" marL="0">
+            <a:pPr marL="0" indent="0">
               <a:buNone/>
             </a:pPr>
             <a:r>
@@ -7195,7 +6822,7 @@
             <a:endParaRPr lang="en-US" sz="900" dirty="0"/>
           </a:p>
           <a:p>
-            <a:pPr indent="0" marL="0">
+            <a:pPr marL="0" indent="0">
               <a:buNone/>
             </a:pPr>
             <a:r>
@@ -7212,7 +6839,7 @@
             <a:endParaRPr lang="en-US" sz="900" dirty="0"/>
           </a:p>
           <a:p>
-            <a:pPr indent="0" marL="0">
+            <a:pPr marL="0" indent="0">
               <a:buNone/>
             </a:pPr>
             <a:r>
@@ -7229,7 +6856,7 @@
             <a:endParaRPr lang="en-US" sz="900" dirty="0"/>
           </a:p>
           <a:p>
-            <a:pPr indent="0" marL="0">
+            <a:pPr marL="0" indent="0">
               <a:buNone/>
             </a:pPr>
             <a:r>
@@ -7246,7 +6873,7 @@
             <a:endParaRPr lang="en-US" sz="900" dirty="0"/>
           </a:p>
           <a:p>
-            <a:pPr indent="0" marL="0">
+            <a:pPr marL="0" indent="0">
               <a:buNone/>
             </a:pPr>
             <a:r>
@@ -7263,7 +6890,7 @@
             <a:endParaRPr lang="en-US" sz="900" dirty="0"/>
           </a:p>
           <a:p>
-            <a:pPr indent="0" marL="0">
+            <a:pPr marL="0" indent="0">
               <a:buNone/>
             </a:pPr>
             <a:r>
@@ -7280,7 +6907,7 @@
             <a:endParaRPr lang="en-US" sz="900" dirty="0"/>
           </a:p>
           <a:p>
-            <a:pPr indent="0" marL="0">
+            <a:pPr marL="0" indent="0">
               <a:buNone/>
             </a:pPr>
             <a:r>
@@ -7297,7 +6924,7 @@
             <a:endParaRPr lang="en-US" sz="900" dirty="0"/>
           </a:p>
           <a:p>
-            <a:pPr indent="0" marL="0">
+            <a:pPr marL="0" indent="0">
               <a:buNone/>
             </a:pPr>
             <a:r>
@@ -7314,7 +6941,7 @@
             <a:endParaRPr lang="en-US" sz="900" dirty="0"/>
           </a:p>
           <a:p>
-            <a:pPr indent="0" marL="0">
+            <a:pPr marL="0" indent="0">
               <a:buNone/>
             </a:pPr>
             <a:r>
@@ -7331,7 +6958,7 @@
             <a:endParaRPr lang="en-US" sz="900" dirty="0"/>
           </a:p>
           <a:p>
-            <a:pPr indent="0" marL="0">
+            <a:pPr marL="0" indent="0">
               <a:buNone/>
             </a:pPr>
             <a:r>
@@ -7348,7 +6975,7 @@
             <a:endParaRPr lang="en-US" sz="900" dirty="0"/>
           </a:p>
           <a:p>
-            <a:pPr indent="0" marL="0">
+            <a:pPr marL="0" indent="0">
               <a:buNone/>
             </a:pPr>
             <a:r>
@@ -7365,7 +6992,7 @@
             <a:endParaRPr lang="en-US" sz="900" dirty="0"/>
           </a:p>
           <a:p>
-            <a:pPr indent="0" marL="0">
+            <a:pPr marL="0" indent="0">
               <a:buNone/>
             </a:pPr>
             <a:r>
@@ -7407,7 +7034,7 @@
             <a:prstDash val="solid"/>
           </a:ln>
           <a:effectLst>
-            <a:outerShdw sx="100000" sy="100000" kx="0" ky="0" algn="bl" rotWithShape="0" blurRad="101600" dist="38100" dir="8100000">
+            <a:outerShdw blurRad="101600" dist="38100" dir="8100000" algn="bl" rotWithShape="0">
               <a:srgbClr val="000000">
                 <a:alpha val="15000"/>
               </a:srgbClr>
@@ -7442,14 +7069,14 @@
       </p:sp>
       <p:pic>
         <p:nvPicPr>
-          <p:cNvPr id="40" name="Image 1" descr="preencoded.png">    </p:cNvPr>
+          <p:cNvPr id="40" name="Image 1" descr="preencoded.png"/>
           <p:cNvPicPr>
             <a:picLocks noChangeAspect="1"/>
           </p:cNvPicPr>
           <p:nvPr/>
         </p:nvPicPr>
         <p:blipFill>
-          <a:blip r:embed="rId2"/>
+          <a:blip r:embed="rId4"/>
           <a:stretch>
             <a:fillRect/>
           </a:stretch>
@@ -7485,7 +7112,7 @@
           <a:bodyPr wrap="square" rtlCol="0" anchor="ctr"/>
           <a:lstStyle/>
           <a:p>
-            <a:pPr indent="0" marL="0">
+            <a:pPr marL="0" indent="0">
               <a:buNone/>
             </a:pPr>
             <a:r>
@@ -7549,7 +7176,7 @@
           <a:bodyPr wrap="square" rtlCol="0" anchor="ctr"/>
           <a:lstStyle/>
           <a:p>
-            <a:pPr algn="ctr" indent="0" marL="0">
+            <a:pPr marL="0" indent="0" algn="ctr">
               <a:buNone/>
             </a:pPr>
             <a:r>
@@ -7588,7 +7215,7 @@
           <a:bodyPr wrap="square" rtlCol="0" anchor="ctr"/>
           <a:lstStyle/>
           <a:p>
-            <a:pPr indent="0" marL="0">
+            <a:pPr marL="0" indent="0">
               <a:buNone/>
             </a:pPr>
             <a:r>
@@ -7627,7 +7254,7 @@
           <a:bodyPr wrap="square" rtlCol="0" anchor="ctr"/>
           <a:lstStyle/>
           <a:p>
-            <a:pPr indent="0" marL="0">
+            <a:pPr marL="0" indent="0">
               <a:buNone/>
             </a:pPr>
             <a:r>
@@ -7644,7 +7271,7 @@
             <a:endParaRPr lang="en-US" sz="1000" dirty="0"/>
           </a:p>
           <a:p>
-            <a:pPr indent="0" marL="0">
+            <a:pPr marL="0" indent="0">
               <a:buNone/>
             </a:pPr>
             <a:r>
@@ -7708,7 +7335,7 @@
           <a:bodyPr wrap="square" rtlCol="0" anchor="ctr"/>
           <a:lstStyle/>
           <a:p>
-            <a:pPr algn="ctr" indent="0" marL="0">
+            <a:pPr marL="0" indent="0" algn="ctr">
               <a:buNone/>
             </a:pPr>
             <a:r>
@@ -7747,7 +7374,7 @@
           <a:bodyPr wrap="square" rtlCol="0" anchor="ctr"/>
           <a:lstStyle/>
           <a:p>
-            <a:pPr indent="0" marL="0">
+            <a:pPr marL="0" indent="0">
               <a:buNone/>
             </a:pPr>
             <a:r>
@@ -7786,7 +7413,7 @@
           <a:bodyPr wrap="square" rtlCol="0" anchor="ctr"/>
           <a:lstStyle/>
           <a:p>
-            <a:pPr indent="0" marL="0">
+            <a:pPr marL="0" indent="0">
               <a:buNone/>
             </a:pPr>
             <a:r>
@@ -7803,7 +7430,7 @@
             <a:endParaRPr lang="en-US" sz="1000" dirty="0"/>
           </a:p>
           <a:p>
-            <a:pPr indent="0" marL="0">
+            <a:pPr marL="0" indent="0">
               <a:buNone/>
             </a:pPr>
             <a:r>
@@ -7867,7 +7494,7 @@
           <a:bodyPr wrap="square" rtlCol="0" anchor="ctr"/>
           <a:lstStyle/>
           <a:p>
-            <a:pPr algn="ctr" indent="0" marL="0">
+            <a:pPr marL="0" indent="0" algn="ctr">
               <a:buNone/>
             </a:pPr>
             <a:r>
@@ -7906,7 +7533,7 @@
           <a:bodyPr wrap="square" rtlCol="0" anchor="ctr"/>
           <a:lstStyle/>
           <a:p>
-            <a:pPr indent="0" marL="0">
+            <a:pPr marL="0" indent="0">
               <a:buNone/>
             </a:pPr>
             <a:r>
@@ -7945,7 +7572,7 @@
           <a:bodyPr wrap="square" rtlCol="0" anchor="ctr"/>
           <a:lstStyle/>
           <a:p>
-            <a:pPr indent="0" marL="0">
+            <a:pPr marL="0" indent="0">
               <a:buNone/>
             </a:pPr>
             <a:r>
@@ -7962,7 +7589,7 @@
             <a:endParaRPr lang="en-US" sz="1000" dirty="0"/>
           </a:p>
           <a:p>
-            <a:pPr indent="0" marL="0">
+            <a:pPr marL="0" indent="0">
               <a:buNone/>
             </a:pPr>
             <a:r>
@@ -7996,6 +7623,7 @@
         <a:solidFill>
           <a:srgbClr val="F1F5F9"/>
         </a:solidFill>
+        <a:effectLst/>
       </p:bgPr>
     </p:bg>
     <p:spTree>
@@ -8033,7 +7661,7 @@
           <a:bodyPr wrap="square" rtlCol="0" anchor="ctr"/>
           <a:lstStyle/>
           <a:p>
-            <a:pPr indent="0" marL="0">
+            <a:pPr marL="0" indent="0">
               <a:buNone/>
             </a:pPr>
             <a:r>
@@ -8072,7 +7700,7 @@
           <a:bodyPr wrap="square" rtlCol="0" anchor="ctr"/>
           <a:lstStyle/>
           <a:p>
-            <a:pPr indent="0" marL="0">
+            <a:pPr marL="0" indent="0">
               <a:buNone/>
             </a:pPr>
             <a:r>
@@ -8114,7 +7742,7 @@
             <a:prstDash val="solid"/>
           </a:ln>
           <a:effectLst>
-            <a:outerShdw sx="100000" sy="100000" kx="0" ky="0" algn="bl" rotWithShape="0" blurRad="101600" dist="38100" dir="8100000">
+            <a:outerShdw blurRad="101600" dist="38100" dir="8100000" algn="bl" rotWithShape="0">
               <a:srgbClr val="000000">
                 <a:alpha val="15000"/>
               </a:srgbClr>
@@ -8143,7 +7771,7 @@
           <a:bodyPr wrap="square" rtlCol="0" anchor="ctr"/>
           <a:lstStyle/>
           <a:p>
-            <a:pPr algn="ctr" indent="0" marL="0">
+            <a:pPr marL="0" indent="0" algn="ctr">
               <a:buNone/>
             </a:pPr>
             <a:r>
@@ -8160,7 +7788,7 @@
             <a:endParaRPr lang="en-US" sz="950" dirty="0"/>
           </a:p>
           <a:p>
-            <a:pPr algn="ctr" indent="0" marL="0">
+            <a:pPr marL="0" indent="0" algn="ctr">
               <a:buNone/>
             </a:pPr>
             <a:r>
@@ -8177,7 +7805,7 @@
             <a:endParaRPr lang="en-US" sz="950" dirty="0"/>
           </a:p>
           <a:p>
-            <a:pPr algn="ctr" indent="0" marL="0">
+            <a:pPr marL="0" indent="0" algn="ctr">
               <a:buNone/>
             </a:pPr>
             <a:r>
@@ -8197,14 +7825,14 @@
       </p:sp>
       <p:pic>
         <p:nvPicPr>
-          <p:cNvPr id="6" name="Image 0" descr="preencoded.png">    </p:cNvPr>
+          <p:cNvPr id="6" name="Image 0" descr="preencoded.png"/>
           <p:cNvPicPr>
             <a:picLocks noChangeAspect="1"/>
           </p:cNvPicPr>
           <p:nvPr/>
         </p:nvPicPr>
         <p:blipFill>
-          <a:blip r:embed="rId1"/>
+          <a:blip r:embed="rId3"/>
           <a:stretch>
             <a:fillRect/>
           </a:stretch>
@@ -8243,7 +7871,7 @@
             <a:prstDash val="solid"/>
           </a:ln>
           <a:effectLst>
-            <a:outerShdw sx="100000" sy="100000" kx="0" ky="0" algn="bl" rotWithShape="0" blurRad="101600" dist="38100" dir="8100000">
+            <a:outerShdw blurRad="101600" dist="38100" dir="8100000" algn="bl" rotWithShape="0">
               <a:srgbClr val="000000">
                 <a:alpha val="15000"/>
               </a:srgbClr>
@@ -8272,7 +7900,7 @@
           <a:bodyPr wrap="square" rtlCol="0" anchor="ctr"/>
           <a:lstStyle/>
           <a:p>
-            <a:pPr algn="ctr" indent="0" marL="0">
+            <a:pPr marL="0" indent="0" algn="ctr">
               <a:buNone/>
             </a:pPr>
             <a:r>
@@ -8289,7 +7917,7 @@
             <a:endParaRPr lang="en-US" sz="950" dirty="0"/>
           </a:p>
           <a:p>
-            <a:pPr algn="ctr" indent="0" marL="0">
+            <a:pPr marL="0" indent="0" algn="ctr">
               <a:buNone/>
             </a:pPr>
             <a:r>
@@ -8306,7 +7934,7 @@
             <a:endParaRPr lang="en-US" sz="950" dirty="0"/>
           </a:p>
           <a:p>
-            <a:pPr algn="ctr" indent="0" marL="0">
+            <a:pPr marL="0" indent="0" algn="ctr">
               <a:buNone/>
             </a:pPr>
             <a:r>
@@ -8323,7 +7951,7 @@
             <a:endParaRPr lang="en-US" sz="950" dirty="0"/>
           </a:p>
           <a:p>
-            <a:pPr algn="ctr" indent="0" marL="0">
+            <a:pPr marL="0" indent="0" algn="ctr">
               <a:buNone/>
             </a:pPr>
             <a:r>
@@ -8343,14 +7971,14 @@
       </p:sp>
       <p:pic>
         <p:nvPicPr>
-          <p:cNvPr id="9" name="Image 1" descr="preencoded.png">    </p:cNvPr>
+          <p:cNvPr id="9" name="Image 1" descr="preencoded.png"/>
           <p:cNvPicPr>
             <a:picLocks noChangeAspect="1"/>
           </p:cNvPicPr>
           <p:nvPr/>
         </p:nvPicPr>
         <p:blipFill>
-          <a:blip r:embed="rId2"/>
+          <a:blip r:embed="rId3"/>
           <a:stretch>
             <a:fillRect/>
           </a:stretch>
@@ -8389,7 +8017,7 @@
             <a:prstDash val="solid"/>
           </a:ln>
           <a:effectLst>
-            <a:outerShdw sx="100000" sy="100000" kx="0" ky="0" algn="bl" rotWithShape="0" blurRad="101600" dist="38100" dir="8100000">
+            <a:outerShdw blurRad="101600" dist="38100" dir="8100000" algn="bl" rotWithShape="0">
               <a:srgbClr val="000000">
                 <a:alpha val="15000"/>
               </a:srgbClr>
@@ -8418,7 +8046,7 @@
           <a:bodyPr wrap="square" rtlCol="0" anchor="ctr"/>
           <a:lstStyle/>
           <a:p>
-            <a:pPr algn="ctr" indent="0" marL="0">
+            <a:pPr marL="0" indent="0" algn="ctr">
               <a:buNone/>
             </a:pPr>
             <a:r>
@@ -8435,7 +8063,7 @@
             <a:endParaRPr lang="en-US" sz="950" dirty="0"/>
           </a:p>
           <a:p>
-            <a:pPr algn="ctr" indent="0" marL="0">
+            <a:pPr marL="0" indent="0" algn="ctr">
               <a:buNone/>
             </a:pPr>
             <a:r>
@@ -8452,7 +8080,7 @@
             <a:endParaRPr lang="en-US" sz="950" dirty="0"/>
           </a:p>
           <a:p>
-            <a:pPr algn="ctr" indent="0" marL="0">
+            <a:pPr marL="0" indent="0" algn="ctr">
               <a:buNone/>
             </a:pPr>
             <a:r>
@@ -8469,7 +8097,7 @@
             <a:endParaRPr lang="en-US" sz="950" dirty="0"/>
           </a:p>
           <a:p>
-            <a:pPr algn="ctr" indent="0" marL="0">
+            <a:pPr marL="0" indent="0" algn="ctr">
               <a:buNone/>
             </a:pPr>
             <a:r>
@@ -8489,7 +8117,7 @@
       </p:sp>
       <p:pic>
         <p:nvPicPr>
-          <p:cNvPr id="12" name="Image 2" descr="preencoded.png">    </p:cNvPr>
+          <p:cNvPr id="12" name="Image 2" descr="preencoded.png"/>
           <p:cNvPicPr>
             <a:picLocks noChangeAspect="1"/>
           </p:cNvPicPr>
@@ -8535,7 +8163,7 @@
             <a:prstDash val="solid"/>
           </a:ln>
           <a:effectLst>
-            <a:outerShdw sx="100000" sy="100000" kx="0" ky="0" algn="bl" rotWithShape="0" blurRad="101600" dist="38100" dir="8100000">
+            <a:outerShdw blurRad="101600" dist="38100" dir="8100000" algn="bl" rotWithShape="0">
               <a:srgbClr val="000000">
                 <a:alpha val="15000"/>
               </a:srgbClr>
@@ -8564,7 +8192,7 @@
           <a:bodyPr wrap="square" rtlCol="0" anchor="ctr"/>
           <a:lstStyle/>
           <a:p>
-            <a:pPr algn="ctr" indent="0" marL="0">
+            <a:pPr marL="0" indent="0" algn="ctr">
               <a:buNone/>
             </a:pPr>
             <a:r>
@@ -8581,7 +8209,7 @@
             <a:endParaRPr lang="en-US" sz="950" dirty="0"/>
           </a:p>
           <a:p>
-            <a:pPr algn="ctr" indent="0" marL="0">
+            <a:pPr marL="0" indent="0" algn="ctr">
               <a:buNone/>
             </a:pPr>
             <a:r>
@@ -8601,14 +8229,14 @@
       </p:sp>
       <p:pic>
         <p:nvPicPr>
-          <p:cNvPr id="15" name="Image 3" descr="preencoded.png">    </p:cNvPr>
+          <p:cNvPr id="15" name="Image 3" descr="preencoded.png"/>
           <p:cNvPicPr>
             <a:picLocks noChangeAspect="1"/>
           </p:cNvPicPr>
           <p:nvPr/>
         </p:nvPicPr>
         <p:blipFill>
-          <a:blip r:embed="rId4"/>
+          <a:blip r:embed="rId3"/>
           <a:stretch>
             <a:fillRect/>
           </a:stretch>
@@ -8647,7 +8275,7 @@
             <a:prstDash val="solid"/>
           </a:ln>
           <a:effectLst>
-            <a:outerShdw sx="100000" sy="100000" kx="0" ky="0" algn="bl" rotWithShape="0" blurRad="101600" dist="38100" dir="8100000">
+            <a:outerShdw blurRad="101600" dist="38100" dir="8100000" algn="bl" rotWithShape="0">
               <a:srgbClr val="000000">
                 <a:alpha val="15000"/>
               </a:srgbClr>
@@ -8676,7 +8304,7 @@
           <a:bodyPr wrap="square" rtlCol="0" anchor="ctr"/>
           <a:lstStyle/>
           <a:p>
-            <a:pPr algn="ctr" indent="0" marL="0">
+            <a:pPr marL="0" indent="0" algn="ctr">
               <a:buNone/>
             </a:pPr>
             <a:r>
@@ -8693,7 +8321,7 @@
             <a:endParaRPr lang="en-US" sz="950" dirty="0"/>
           </a:p>
           <a:p>
-            <a:pPr algn="ctr" indent="0" marL="0">
+            <a:pPr marL="0" indent="0" algn="ctr">
               <a:buNone/>
             </a:pPr>
             <a:r>
@@ -8710,7 +8338,7 @@
             <a:endParaRPr lang="en-US" sz="950" dirty="0"/>
           </a:p>
           <a:p>
-            <a:pPr algn="ctr" indent="0" marL="0">
+            <a:pPr marL="0" indent="0" algn="ctr">
               <a:buNone/>
             </a:pPr>
             <a:r>
@@ -8730,14 +8358,14 @@
       </p:sp>
       <p:pic>
         <p:nvPicPr>
-          <p:cNvPr id="18" name="Image 4" descr="preencoded.png">    </p:cNvPr>
+          <p:cNvPr id="18" name="Image 4" descr="preencoded.png"/>
           <p:cNvPicPr>
             <a:picLocks noChangeAspect="1"/>
           </p:cNvPicPr>
           <p:nvPr/>
         </p:nvPicPr>
         <p:blipFill>
-          <a:blip r:embed="rId5"/>
+          <a:blip r:embed="rId3"/>
           <a:stretch>
             <a:fillRect/>
           </a:stretch>
@@ -8776,7 +8404,7 @@
             <a:prstDash val="solid"/>
           </a:ln>
           <a:effectLst>
-            <a:outerShdw sx="100000" sy="100000" kx="0" ky="0" algn="bl" rotWithShape="0" blurRad="101600" dist="38100" dir="8100000">
+            <a:outerShdw blurRad="101600" dist="38100" dir="8100000" algn="bl" rotWithShape="0">
               <a:srgbClr val="000000">
                 <a:alpha val="15000"/>
               </a:srgbClr>
@@ -8805,7 +8433,7 @@
           <a:bodyPr wrap="square" rtlCol="0" anchor="ctr"/>
           <a:lstStyle/>
           <a:p>
-            <a:pPr algn="ctr" indent="0" marL="0">
+            <a:pPr marL="0" indent="0" algn="ctr">
               <a:buNone/>
             </a:pPr>
             <a:r>
@@ -8822,7 +8450,7 @@
             <a:endParaRPr lang="en-US" sz="950" dirty="0"/>
           </a:p>
           <a:p>
-            <a:pPr algn="ctr" indent="0" marL="0">
+            <a:pPr marL="0" indent="0" algn="ctr">
               <a:buNone/>
             </a:pPr>
             <a:r>
@@ -8861,7 +8489,7 @@
           <a:bodyPr wrap="square" rtlCol="0" anchor="ctr"/>
           <a:lstStyle/>
           <a:p>
-            <a:pPr indent="0" marL="0">
+            <a:pPr marL="0" indent="0">
               <a:buNone/>
             </a:pPr>
             <a:r>
@@ -8925,7 +8553,7 @@
           <a:bodyPr wrap="square" rtlCol="0" anchor="ctr"/>
           <a:lstStyle/>
           <a:p>
-            <a:pPr indent="0" marL="0">
+            <a:pPr marL="0" indent="0">
               <a:buNone/>
             </a:pPr>
             <a:r>
@@ -8989,7 +8617,7 @@
           <a:bodyPr wrap="square" rtlCol="0" anchor="ctr"/>
           <a:lstStyle/>
           <a:p>
-            <a:pPr indent="0" marL="0">
+            <a:pPr marL="0" indent="0">
               <a:buNone/>
             </a:pPr>
             <a:r>
@@ -9053,7 +8681,7 @@
           <a:bodyPr wrap="square" rtlCol="0" anchor="ctr"/>
           <a:lstStyle/>
           <a:p>
-            <a:pPr indent="0" marL="0">
+            <a:pPr marL="0" indent="0">
               <a:buNone/>
             </a:pPr>
             <a:r>
@@ -9117,7 +8745,7 @@
           <a:bodyPr wrap="square" rtlCol="0" anchor="ctr"/>
           <a:lstStyle/>
           <a:p>
-            <a:pPr indent="0" marL="0">
+            <a:pPr marL="0" indent="0">
               <a:buNone/>
             </a:pPr>
             <a:r>
@@ -9181,7 +8809,7 @@
           <a:bodyPr wrap="square" rtlCol="0" anchor="ctr"/>
           <a:lstStyle/>
           <a:p>
-            <a:pPr indent="0" marL="0">
+            <a:pPr marL="0" indent="0">
               <a:buNone/>
             </a:pPr>
             <a:r>
@@ -9245,7 +8873,7 @@
           <a:bodyPr wrap="square" rtlCol="0" anchor="ctr"/>
           <a:lstStyle/>
           <a:p>
-            <a:pPr indent="0" marL="0">
+            <a:pPr marL="0" indent="0">
               <a:buNone/>
             </a:pPr>
             <a:r>
@@ -9309,7 +8937,7 @@
           <a:bodyPr wrap="square" rtlCol="0" anchor="ctr"/>
           <a:lstStyle/>
           <a:p>
-            <a:pPr indent="0" marL="0">
+            <a:pPr marL="0" indent="0">
               <a:buNone/>
             </a:pPr>
             <a:r>
@@ -9373,7 +9001,7 @@
           <a:bodyPr wrap="square" rtlCol="0" anchor="ctr"/>
           <a:lstStyle/>
           <a:p>
-            <a:pPr indent="0" marL="0">
+            <a:pPr marL="0" indent="0">
               <a:buNone/>
             </a:pPr>
             <a:r>
@@ -9437,7 +9065,7 @@
           <a:bodyPr wrap="square" rtlCol="0" anchor="ctr"/>
           <a:lstStyle/>
           <a:p>
-            <a:pPr indent="0" marL="0">
+            <a:pPr marL="0" indent="0">
               <a:buNone/>
             </a:pPr>
             <a:r>
@@ -9501,7 +9129,7 @@
           <a:bodyPr wrap="square" rtlCol="0" anchor="ctr"/>
           <a:lstStyle/>
           <a:p>
-            <a:pPr indent="0" marL="0">
+            <a:pPr marL="0" indent="0">
               <a:buNone/>
             </a:pPr>
             <a:r>
@@ -9565,7 +9193,7 @@
           <a:bodyPr wrap="square" rtlCol="0" anchor="ctr"/>
           <a:lstStyle/>
           <a:p>
-            <a:pPr indent="0" marL="0">
+            <a:pPr marL="0" indent="0">
               <a:buNone/>
             </a:pPr>
             <a:r>
@@ -9629,7 +9257,7 @@
           <a:bodyPr wrap="square" rtlCol="0" anchor="ctr"/>
           <a:lstStyle/>
           <a:p>
-            <a:pPr indent="0" marL="0">
+            <a:pPr marL="0" indent="0">
               <a:buNone/>
             </a:pPr>
             <a:r>
@@ -9693,7 +9321,7 @@
           <a:bodyPr wrap="square" rtlCol="0" anchor="ctr"/>
           <a:lstStyle/>
           <a:p>
-            <a:pPr indent="0" marL="0">
+            <a:pPr marL="0" indent="0">
               <a:buNone/>
             </a:pPr>
             <a:r>
@@ -9757,7 +9385,7 @@
           <a:bodyPr wrap="square" rtlCol="0" anchor="ctr"/>
           <a:lstStyle/>
           <a:p>
-            <a:pPr indent="0" marL="0">
+            <a:pPr marL="0" indent="0">
               <a:buNone/>
             </a:pPr>
             <a:r>
@@ -9821,7 +9449,7 @@
           <a:bodyPr wrap="square" rtlCol="0" anchor="ctr"/>
           <a:lstStyle/>
           <a:p>
-            <a:pPr indent="0" marL="0">
+            <a:pPr marL="0" indent="0">
               <a:buNone/>
             </a:pPr>
             <a:r>
@@ -9855,6 +9483,7 @@
         <a:solidFill>
           <a:srgbClr val="1B2A4A"/>
         </a:solidFill>
+        <a:effectLst/>
       </p:bgPr>
     </p:bg>
     <p:spTree>
@@ -9892,7 +9521,7 @@
           <a:bodyPr wrap="square" rtlCol="0" anchor="ctr"/>
           <a:lstStyle/>
           <a:p>
-            <a:pPr indent="0" marL="0">
+            <a:pPr marL="0" indent="0">
               <a:buNone/>
             </a:pPr>
             <a:r>
@@ -9934,7 +9563,7 @@
             <a:prstDash val="solid"/>
           </a:ln>
           <a:effectLst>
-            <a:outerShdw sx="100000" sy="100000" kx="0" ky="0" algn="bl" rotWithShape="0" blurRad="101600" dist="38100" dir="8100000">
+            <a:outerShdw blurRad="101600" dist="38100" dir="8100000" algn="bl" rotWithShape="0">
               <a:srgbClr val="000000">
                 <a:alpha val="15000"/>
               </a:srgbClr>
@@ -9951,7 +9580,7 @@
         <p:spPr>
           <a:xfrm>
             <a:off x="365760" y="841248"/>
-            <a:ext cx="3886200" cy="1737360"/>
+            <a:ext cx="3886200" cy="1938528"/>
           </a:xfrm>
           <a:prstGeom prst="rect">
             <a:avLst/>
@@ -9975,8 +9604,8 @@
         </p:nvSpPr>
         <p:spPr>
           <a:xfrm>
-            <a:off x="365760" y="2578608"/>
-            <a:ext cx="3886200" cy="1828800"/>
+            <a:off x="365760" y="2779776"/>
+            <a:ext cx="3886200" cy="1627632"/>
           </a:xfrm>
           <a:prstGeom prst="rect">
             <a:avLst/>
@@ -10013,7 +9642,7 @@
           <a:bodyPr wrap="square" rtlCol="0" anchor="ctr"/>
           <a:lstStyle/>
           <a:p>
-            <a:pPr indent="0" marL="0">
+            <a:pPr marL="0" indent="0">
               <a:buNone/>
             </a:pPr>
             <a:r>
@@ -10052,7 +9681,7 @@
           <a:bodyPr wrap="square" rtlCol="0" anchor="ctr"/>
           <a:lstStyle/>
           <a:p>
-            <a:pPr indent="0" marL="0">
+            <a:pPr marL="0" indent="0">
               <a:buNone/>
             </a:pPr>
             <a:r>
@@ -10091,11 +9720,11 @@
           <a:bodyPr wrap="square" rtlCol="0" anchor="ctr"/>
           <a:lstStyle/>
           <a:p>
-            <a:pPr algn="ctr" indent="0" marL="0">
-              <a:buNone/>
-            </a:pPr>
-            <a:r>
-              <a:rPr lang="en-US" sz="7200" b="1" dirty="0">
+            <a:pPr marL="0" indent="0" algn="ctr">
+              <a:buNone/>
+            </a:pPr>
+            <a:r>
+              <a:rPr lang="en-US" sz="6400" b="1" dirty="0">
                 <a:solidFill>
                   <a:srgbClr val="F87171"/>
                 </a:solidFill>
@@ -10105,7 +9734,7 @@
               </a:rPr>
               <a:t>~20%</a:t>
             </a:r>
-            <a:endParaRPr lang="en-US" sz="7200" dirty="0"/>
+            <a:endParaRPr lang="en-US" sz="6400" dirty="0"/>
           </a:p>
         </p:txBody>
       </p:sp>
@@ -10130,7 +9759,7 @@
           <a:bodyPr wrap="square" rtlCol="0" anchor="ctr"/>
           <a:lstStyle/>
           <a:p>
-            <a:pPr algn="ctr" indent="0" marL="0">
+            <a:pPr marL="0" indent="0" algn="ctr">
               <a:buNone/>
             </a:pPr>
             <a:r>
@@ -10169,7 +9798,7 @@
           <a:bodyPr wrap="square" rtlCol="0" anchor="ctr"/>
           <a:lstStyle/>
           <a:p>
-            <a:pPr algn="ctr" indent="0" marL="0">
+            <a:pPr marL="0" indent="0" algn="ctr">
               <a:buNone/>
             </a:pPr>
             <a:r>
@@ -10208,7 +9837,7 @@
           <a:bodyPr wrap="square" rtlCol="0" anchor="ctr"/>
           <a:lstStyle/>
           <a:p>
-            <a:pPr algn="ctr" indent="0" marL="0">
+            <a:pPr marL="0" indent="0" algn="ctr">
               <a:buNone/>
             </a:pPr>
             <a:r>
@@ -10247,7 +9876,7 @@
           <a:bodyPr wrap="square" rtlCol="0" anchor="ctr"/>
           <a:lstStyle/>
           <a:p>
-            <a:pPr algn="ctr" indent="0" marL="0">
+            <a:pPr marL="0" indent="0" algn="ctr">
               <a:buNone/>
             </a:pPr>
             <a:r>
@@ -10264,7 +9893,7 @@
             <a:endParaRPr lang="en-US" sz="800" dirty="0"/>
           </a:p>
           <a:p>
-            <a:pPr algn="ctr" indent="0" marL="0">
+            <a:pPr marL="0" indent="0" algn="ctr">
               <a:buNone/>
             </a:pPr>
             <a:r>
@@ -10291,7 +9920,7 @@
         <p:spPr>
           <a:xfrm>
             <a:off x="4892040" y="841248"/>
-            <a:ext cx="3886200" cy="1737360"/>
+            <a:ext cx="3886200" cy="1938528"/>
           </a:xfrm>
           <a:prstGeom prst="rect">
             <a:avLst/>
@@ -10315,8 +9944,8 @@
         </p:nvSpPr>
         <p:spPr>
           <a:xfrm>
-            <a:off x="4892040" y="2578608"/>
-            <a:ext cx="3886200" cy="1828800"/>
+            <a:off x="4892040" y="2779776"/>
+            <a:ext cx="3886200" cy="1627632"/>
           </a:xfrm>
           <a:prstGeom prst="rect">
             <a:avLst/>
@@ -10353,7 +9982,7 @@
           <a:bodyPr wrap="square" rtlCol="0" anchor="ctr"/>
           <a:lstStyle/>
           <a:p>
-            <a:pPr indent="0" marL="0">
+            <a:pPr marL="0" indent="0">
               <a:buNone/>
             </a:pPr>
             <a:r>
@@ -10392,7 +10021,7 @@
           <a:bodyPr wrap="square" rtlCol="0" anchor="ctr"/>
           <a:lstStyle/>
           <a:p>
-            <a:pPr indent="0" marL="0">
+            <a:pPr marL="0" indent="0">
               <a:buNone/>
             </a:pPr>
             <a:r>
@@ -10431,7 +10060,7 @@
           <a:bodyPr wrap="square" rtlCol="0" anchor="ctr"/>
           <a:lstStyle/>
           <a:p>
-            <a:pPr algn="ctr" indent="0" marL="0">
+            <a:pPr marL="0" indent="0" algn="ctr">
               <a:buNone/>
             </a:pPr>
             <a:r>
@@ -10470,7 +10099,7 @@
           <a:bodyPr wrap="square" rtlCol="0" anchor="ctr"/>
           <a:lstStyle/>
           <a:p>
-            <a:pPr algn="ctr" indent="0" marL="0">
+            <a:pPr marL="0" indent="0" algn="ctr">
               <a:buNone/>
             </a:pPr>
             <a:r>
@@ -10509,7 +10138,7 @@
           <a:bodyPr wrap="square" rtlCol="0" anchor="ctr"/>
           <a:lstStyle/>
           <a:p>
-            <a:pPr algn="ctr" indent="0" marL="0">
+            <a:pPr marL="0" indent="0" algn="ctr">
               <a:buNone/>
             </a:pPr>
             <a:r>
@@ -10575,7 +10204,7 @@
           <a:bodyPr wrap="square" rtlCol="0" anchor="ctr"/>
           <a:lstStyle/>
           <a:p>
-            <a:pPr algn="ctr" indent="0" marL="0">
+            <a:pPr marL="0" indent="0" algn="ctr">
               <a:buNone/>
             </a:pPr>
             <a:r>
@@ -10609,6 +10238,7 @@
         <a:solidFill>
           <a:srgbClr val="F1F5F9"/>
         </a:solidFill>
+        <a:effectLst/>
       </p:bgPr>
     </p:bg>
     <p:spTree>
@@ -10646,7 +10276,7 @@
           <a:bodyPr wrap="square" rtlCol="0" anchor="ctr"/>
           <a:lstStyle/>
           <a:p>
-            <a:pPr indent="0" marL="0">
+            <a:pPr marL="0" indent="0">
               <a:buNone/>
             </a:pPr>
             <a:r>
@@ -10666,7 +10296,7 @@
       </p:sp>
       <p:graphicFrame>
         <p:nvGraphicFramePr>
-          <p:cNvPr id="3" name="Chart 0" descr=""/>
+          <p:cNvPr id="3" name="Chart 0"/>
           <p:cNvGraphicFramePr/>
           <p:nvPr/>
         </p:nvGraphicFramePr>
@@ -10674,15 +10304,15 @@
           <a:off x="365760" y="804672"/>
           <a:ext cx="4023360" cy="3200400"/>
         </p:xfrm>
-        <a:graphic xmlns:a="http://schemas.openxmlformats.org/drawingml/2006/main">
+        <a:graphic>
           <a:graphicData uri="http://schemas.openxmlformats.org/drawingml/2006/chart">
-            <c:chart xmlns:c="http://schemas.openxmlformats.org/drawingml/2006/chart" r:id="rId1"/>
+            <c:chart xmlns:c="http://schemas.openxmlformats.org/drawingml/2006/chart" xmlns:r="http://schemas.openxmlformats.org/officeDocument/2006/relationships" r:id="rId3"/>
           </a:graphicData>
         </a:graphic>
       </p:graphicFrame>
       <p:graphicFrame>
         <p:nvGraphicFramePr>
-          <p:cNvPr id="4" name="Chart 1" descr=""/>
+          <p:cNvPr id="4" name="Chart 1"/>
           <p:cNvGraphicFramePr/>
           <p:nvPr/>
         </p:nvGraphicFramePr>
@@ -10690,9 +10320,9 @@
           <a:off x="4663440" y="804672"/>
           <a:ext cx="4023360" cy="3200400"/>
         </p:xfrm>
-        <a:graphic xmlns:a="http://schemas.openxmlformats.org/drawingml/2006/main">
+        <a:graphic>
           <a:graphicData uri="http://schemas.openxmlformats.org/drawingml/2006/chart">
-            <c:chart xmlns:c="http://schemas.openxmlformats.org/drawingml/2006/chart" r:id="rId2"/>
+            <c:chart xmlns:c="http://schemas.openxmlformats.org/drawingml/2006/chart" xmlns:r="http://schemas.openxmlformats.org/officeDocument/2006/relationships" r:id="rId4"/>
           </a:graphicData>
         </a:graphic>
       </p:graphicFrame>
@@ -10720,7 +10350,7 @@
             <a:prstDash val="solid"/>
           </a:ln>
           <a:effectLst>
-            <a:outerShdw sx="100000" sy="100000" kx="0" ky="0" algn="bl" rotWithShape="0" blurRad="101600" dist="38100" dir="8100000">
+            <a:outerShdw blurRad="101600" dist="38100" dir="8100000" algn="bl" rotWithShape="0">
               <a:srgbClr val="000000">
                 <a:alpha val="15000"/>
               </a:srgbClr>
@@ -10749,7 +10379,7 @@
           <a:bodyPr wrap="square" rtlCol="0" anchor="ctr"/>
           <a:lstStyle/>
           <a:p>
-            <a:pPr indent="0" marL="0">
+            <a:pPr marL="0" indent="0">
               <a:buNone/>
             </a:pPr>
             <a:r>
@@ -10868,6 +10498,7 @@
         <a:solidFill>
           <a:srgbClr val="F1F5F9"/>
         </a:solidFill>
+        <a:effectLst/>
       </p:bgPr>
     </p:bg>
     <p:spTree>
@@ -10905,7 +10536,7 @@
           <a:bodyPr wrap="square" rtlCol="0" anchor="ctr"/>
           <a:lstStyle/>
           <a:p>
-            <a:pPr indent="0" marL="0">
+            <a:pPr marL="0" indent="0">
               <a:buNone/>
             </a:pPr>
             <a:r>
@@ -10944,7 +10575,7 @@
           <a:bodyPr wrap="square" rtlCol="0" anchor="ctr"/>
           <a:lstStyle/>
           <a:p>
-            <a:pPr algn="r" indent="0" marL="0">
+            <a:pPr marL="0" indent="0" algn="r">
               <a:buNone/>
             </a:pPr>
             <a:r>
@@ -10983,7 +10614,7 @@
           <a:bodyPr wrap="square" rtlCol="0" anchor="ctr"/>
           <a:lstStyle/>
           <a:p>
-            <a:pPr algn="r" indent="0" marL="0">
+            <a:pPr marL="0" indent="0" algn="r">
               <a:buNone/>
             </a:pPr>
             <a:r>
@@ -11022,7 +10653,7 @@
           <a:bodyPr wrap="square" rtlCol="0" anchor="ctr"/>
           <a:lstStyle/>
           <a:p>
-            <a:pPr algn="r" indent="0" marL="0">
+            <a:pPr marL="0" indent="0" algn="r">
               <a:buNone/>
             </a:pPr>
             <a:r>
@@ -11061,7 +10692,7 @@
           <a:bodyPr wrap="square" rtlCol="0" anchor="ctr"/>
           <a:lstStyle/>
           <a:p>
-            <a:pPr algn="r" indent="0" marL="0">
+            <a:pPr marL="0" indent="0" algn="r">
               <a:buNone/>
             </a:pPr>
             <a:r>
@@ -11100,7 +10731,7 @@
           <a:bodyPr wrap="square" rtlCol="0" anchor="ctr"/>
           <a:lstStyle/>
           <a:p>
-            <a:pPr algn="r" indent="0" marL="0">
+            <a:pPr marL="0" indent="0" algn="r">
               <a:buNone/>
             </a:pPr>
             <a:r>
@@ -11139,7 +10770,7 @@
           <a:bodyPr wrap="square" rtlCol="0" anchor="ctr"/>
           <a:lstStyle/>
           <a:p>
-            <a:pPr algn="ctr" indent="0" marL="0">
+            <a:pPr marL="0" indent="0" algn="ctr">
               <a:buNone/>
             </a:pPr>
             <a:r>
@@ -11178,7 +10809,7 @@
           <a:bodyPr wrap="square" rtlCol="0" anchor="ctr"/>
           <a:lstStyle/>
           <a:p>
-            <a:pPr algn="ctr" indent="0" marL="0">
+            <a:pPr marL="0" indent="0" algn="ctr">
               <a:buNone/>
             </a:pPr>
             <a:r>
@@ -11217,7 +10848,7 @@
           <a:bodyPr wrap="square" rtlCol="0" anchor="ctr"/>
           <a:lstStyle/>
           <a:p>
-            <a:pPr algn="ctr" indent="0" marL="0">
+            <a:pPr marL="0" indent="0" algn="ctr">
               <a:buNone/>
             </a:pPr>
             <a:r>
@@ -11256,7 +10887,7 @@
           <a:bodyPr wrap="square" rtlCol="0" anchor="ctr"/>
           <a:lstStyle/>
           <a:p>
-            <a:pPr algn="ctr" indent="0" marL="0">
+            <a:pPr marL="0" indent="0" algn="ctr">
               <a:buNone/>
             </a:pPr>
             <a:r>
@@ -11295,7 +10926,7 @@
           <a:bodyPr wrap="square" rtlCol="0" anchor="ctr"/>
           <a:lstStyle/>
           <a:p>
-            <a:pPr algn="ctr" indent="0" marL="0">
+            <a:pPr marL="0" indent="0" algn="ctr">
               <a:buNone/>
             </a:pPr>
             <a:r>
@@ -11359,7 +10990,7 @@
           <a:bodyPr wrap="square" rtlCol="0" anchor="ctr"/>
           <a:lstStyle/>
           <a:p>
-            <a:pPr algn="ctr" indent="0" marL="0">
+            <a:pPr marL="0" indent="0" algn="ctr">
               <a:buNone/>
             </a:pPr>
             <a:r>
@@ -11423,7 +11054,7 @@
           <a:bodyPr wrap="square" rtlCol="0" anchor="ctr"/>
           <a:lstStyle/>
           <a:p>
-            <a:pPr algn="ctr" indent="0" marL="0">
+            <a:pPr marL="0" indent="0" algn="ctr">
               <a:buNone/>
             </a:pPr>
             <a:r>
@@ -11487,7 +11118,7 @@
           <a:bodyPr wrap="square" rtlCol="0" anchor="ctr"/>
           <a:lstStyle/>
           <a:p>
-            <a:pPr algn="ctr" indent="0" marL="0">
+            <a:pPr marL="0" indent="0" algn="ctr">
               <a:buNone/>
             </a:pPr>
             <a:r>
@@ -11551,7 +11182,7 @@
           <a:bodyPr wrap="square" rtlCol="0" anchor="ctr"/>
           <a:lstStyle/>
           <a:p>
-            <a:pPr algn="ctr" indent="0" marL="0">
+            <a:pPr marL="0" indent="0" algn="ctr">
               <a:buNone/>
             </a:pPr>
             <a:r>
@@ -11615,7 +11246,7 @@
           <a:bodyPr wrap="square" rtlCol="0" anchor="ctr"/>
           <a:lstStyle/>
           <a:p>
-            <a:pPr algn="ctr" indent="0" marL="0">
+            <a:pPr marL="0" indent="0" algn="ctr">
               <a:buNone/>
             </a:pPr>
             <a:r>
@@ -11679,7 +11310,7 @@
           <a:bodyPr wrap="square" rtlCol="0" anchor="ctr"/>
           <a:lstStyle/>
           <a:p>
-            <a:pPr algn="ctr" indent="0" marL="0">
+            <a:pPr marL="0" indent="0" algn="ctr">
               <a:buNone/>
             </a:pPr>
             <a:r>
@@ -11743,7 +11374,7 @@
           <a:bodyPr wrap="square" rtlCol="0" anchor="ctr"/>
           <a:lstStyle/>
           <a:p>
-            <a:pPr algn="ctr" indent="0" marL="0">
+            <a:pPr marL="0" indent="0" algn="ctr">
               <a:buNone/>
             </a:pPr>
             <a:r>
@@ -11807,7 +11438,7 @@
           <a:bodyPr wrap="square" rtlCol="0" anchor="ctr"/>
           <a:lstStyle/>
           <a:p>
-            <a:pPr algn="ctr" indent="0" marL="0">
+            <a:pPr marL="0" indent="0" algn="ctr">
               <a:buNone/>
             </a:pPr>
             <a:r>
@@ -11871,7 +11502,7 @@
           <a:bodyPr wrap="square" rtlCol="0" anchor="ctr"/>
           <a:lstStyle/>
           <a:p>
-            <a:pPr algn="ctr" indent="0" marL="0">
+            <a:pPr marL="0" indent="0" algn="ctr">
               <a:buNone/>
             </a:pPr>
             <a:r>
@@ -11935,7 +11566,7 @@
           <a:bodyPr wrap="square" rtlCol="0" anchor="ctr"/>
           <a:lstStyle/>
           <a:p>
-            <a:pPr algn="ctr" indent="0" marL="0">
+            <a:pPr marL="0" indent="0" algn="ctr">
               <a:buNone/>
             </a:pPr>
             <a:r>
@@ -11999,7 +11630,7 @@
           <a:bodyPr wrap="square" rtlCol="0" anchor="ctr"/>
           <a:lstStyle/>
           <a:p>
-            <a:pPr algn="ctr" indent="0" marL="0">
+            <a:pPr marL="0" indent="0" algn="ctr">
               <a:buNone/>
             </a:pPr>
             <a:r>
@@ -12063,7 +11694,7 @@
           <a:bodyPr wrap="square" rtlCol="0" anchor="ctr"/>
           <a:lstStyle/>
           <a:p>
-            <a:pPr algn="ctr" indent="0" marL="0">
+            <a:pPr marL="0" indent="0" algn="ctr">
               <a:buNone/>
             </a:pPr>
             <a:r>
@@ -12127,7 +11758,7 @@
           <a:bodyPr wrap="square" rtlCol="0" anchor="ctr"/>
           <a:lstStyle/>
           <a:p>
-            <a:pPr algn="ctr" indent="0" marL="0">
+            <a:pPr marL="0" indent="0" algn="ctr">
               <a:buNone/>
             </a:pPr>
             <a:r>
@@ -12191,7 +11822,7 @@
           <a:bodyPr wrap="square" rtlCol="0" anchor="ctr"/>
           <a:lstStyle/>
           <a:p>
-            <a:pPr algn="ctr" indent="0" marL="0">
+            <a:pPr marL="0" indent="0" algn="ctr">
               <a:buNone/>
             </a:pPr>
             <a:r>
@@ -12255,7 +11886,7 @@
           <a:bodyPr wrap="square" rtlCol="0" anchor="ctr"/>
           <a:lstStyle/>
           <a:p>
-            <a:pPr algn="ctr" indent="0" marL="0">
+            <a:pPr marL="0" indent="0" algn="ctr">
               <a:buNone/>
             </a:pPr>
             <a:r>
@@ -12319,7 +11950,7 @@
           <a:bodyPr wrap="square" rtlCol="0" anchor="ctr"/>
           <a:lstStyle/>
           <a:p>
-            <a:pPr algn="ctr" indent="0" marL="0">
+            <a:pPr marL="0" indent="0" algn="ctr">
               <a:buNone/>
             </a:pPr>
             <a:r>
@@ -12383,7 +12014,7 @@
           <a:bodyPr wrap="square" rtlCol="0" anchor="ctr"/>
           <a:lstStyle/>
           <a:p>
-            <a:pPr algn="ctr" indent="0" marL="0">
+            <a:pPr marL="0" indent="0" algn="ctr">
               <a:buNone/>
             </a:pPr>
             <a:r>
@@ -12447,7 +12078,7 @@
           <a:bodyPr wrap="square" rtlCol="0" anchor="ctr"/>
           <a:lstStyle/>
           <a:p>
-            <a:pPr algn="ctr" indent="0" marL="0">
+            <a:pPr marL="0" indent="0" algn="ctr">
               <a:buNone/>
             </a:pPr>
             <a:r>
@@ -12511,7 +12142,7 @@
           <a:bodyPr wrap="square" rtlCol="0" anchor="ctr"/>
           <a:lstStyle/>
           <a:p>
-            <a:pPr algn="ctr" indent="0" marL="0">
+            <a:pPr marL="0" indent="0" algn="ctr">
               <a:buNone/>
             </a:pPr>
             <a:r>
@@ -12575,7 +12206,7 @@
           <a:bodyPr wrap="square" rtlCol="0" anchor="ctr"/>
           <a:lstStyle/>
           <a:p>
-            <a:pPr algn="ctr" indent="0" marL="0">
+            <a:pPr marL="0" indent="0" algn="ctr">
               <a:buNone/>
             </a:pPr>
             <a:r>
@@ -12639,7 +12270,7 @@
           <a:bodyPr wrap="square" rtlCol="0" anchor="ctr"/>
           <a:lstStyle/>
           <a:p>
-            <a:pPr algn="ctr" indent="0" marL="0">
+            <a:pPr marL="0" indent="0" algn="ctr">
               <a:buNone/>
             </a:pPr>
             <a:r>
@@ -12703,7 +12334,7 @@
           <a:bodyPr wrap="square" rtlCol="0" anchor="ctr"/>
           <a:lstStyle/>
           <a:p>
-            <a:pPr algn="ctr" indent="0" marL="0">
+            <a:pPr marL="0" indent="0" algn="ctr">
               <a:buNone/>
             </a:pPr>
             <a:r>
@@ -12767,7 +12398,7 @@
           <a:bodyPr wrap="square" rtlCol="0" anchor="ctr"/>
           <a:lstStyle/>
           <a:p>
-            <a:pPr algn="ctr" indent="0" marL="0">
+            <a:pPr marL="0" indent="0" algn="ctr">
               <a:buNone/>
             </a:pPr>
             <a:r>
@@ -12831,7 +12462,7 @@
           <a:bodyPr wrap="square" rtlCol="0" anchor="ctr"/>
           <a:lstStyle/>
           <a:p>
-            <a:pPr algn="ctr" indent="0" marL="0">
+            <a:pPr marL="0" indent="0" algn="ctr">
               <a:buNone/>
             </a:pPr>
             <a:r>
@@ -12895,7 +12526,7 @@
           <a:bodyPr wrap="square" rtlCol="0" anchor="ctr"/>
           <a:lstStyle/>
           <a:p>
-            <a:pPr algn="ctr" indent="0" marL="0">
+            <a:pPr marL="0" indent="0" algn="ctr">
               <a:buNone/>
             </a:pPr>
             <a:r>
@@ -12934,7 +12565,7 @@
           <a:bodyPr wrap="square" rtlCol="0" anchor="ctr"/>
           <a:lstStyle/>
           <a:p>
-            <a:pPr algn="ctr" indent="0" marL="0">
+            <a:pPr marL="0" indent="0" algn="ctr">
               <a:buNone/>
             </a:pPr>
             <a:r>
@@ -12973,7 +12604,7 @@
           <a:bodyPr wrap="square" rtlCol="0" anchor="ctr"/>
           <a:lstStyle/>
           <a:p>
-            <a:pPr algn="ctr" indent="0" marL="0">
+            <a:pPr marL="0" indent="0" algn="ctr">
               <a:buNone/>
             </a:pPr>
             <a:r>
@@ -13015,7 +12646,7 @@
             <a:prstDash val="solid"/>
           </a:ln>
           <a:effectLst>
-            <a:outerShdw sx="100000" sy="100000" kx="0" ky="0" algn="bl" rotWithShape="0" blurRad="101600" dist="38100" dir="8100000">
+            <a:outerShdw blurRad="101600" dist="38100" dir="8100000" algn="bl" rotWithShape="0">
               <a:srgbClr val="000000">
                 <a:alpha val="15000"/>
               </a:srgbClr>
@@ -13069,7 +12700,7 @@
           <a:bodyPr wrap="square" rtlCol="0" anchor="ctr"/>
           <a:lstStyle/>
           <a:p>
-            <a:pPr algn="ctr" indent="0" marL="0">
+            <a:pPr marL="0" indent="0" algn="ctr">
               <a:buNone/>
             </a:pPr>
             <a:r>
@@ -13133,7 +12764,7 @@
           <a:bodyPr wrap="square" rtlCol="0" anchor="ctr"/>
           <a:lstStyle/>
           <a:p>
-            <a:pPr algn="ctr" indent="0" marL="0">
+            <a:pPr marL="0" indent="0" algn="ctr">
               <a:buNone/>
             </a:pPr>
             <a:r>
@@ -13150,7 +12781,7 @@
             <a:endParaRPr lang="en-US" sz="1000" dirty="0"/>
           </a:p>
           <a:p>
-            <a:pPr algn="ctr" indent="0" marL="0">
+            <a:pPr marL="0" indent="0" algn="ctr">
               <a:buNone/>
             </a:pPr>
             <a:r>
@@ -13189,7 +12820,7 @@
           <a:bodyPr wrap="square" rtlCol="0" anchor="ctr"/>
           <a:lstStyle/>
           <a:p>
-            <a:pPr algn="ctr" indent="0" marL="0">
+            <a:pPr marL="0" indent="0" algn="ctr">
               <a:buNone/>
             </a:pPr>
             <a:r>
@@ -13206,7 +12837,7 @@
             <a:endParaRPr lang="en-US" sz="900" dirty="0"/>
           </a:p>
           <a:p>
-            <a:pPr algn="ctr" indent="0" marL="0">
+            <a:pPr marL="0" indent="0" algn="ctr">
               <a:buNone/>
             </a:pPr>
             <a:r>
@@ -13270,7 +12901,7 @@
           <a:bodyPr wrap="square" rtlCol="0" anchor="ctr"/>
           <a:lstStyle/>
           <a:p>
-            <a:pPr algn="ctr" indent="0" marL="0">
+            <a:pPr marL="0" indent="0" algn="ctr">
               <a:buNone/>
             </a:pPr>
             <a:r>
@@ -13287,7 +12918,7 @@
             <a:endParaRPr lang="en-US" sz="1000" dirty="0"/>
           </a:p>
           <a:p>
-            <a:pPr algn="ctr" indent="0" marL="0">
+            <a:pPr marL="0" indent="0" algn="ctr">
               <a:buNone/>
             </a:pPr>
             <a:r>
@@ -13326,7 +12957,7 @@
           <a:bodyPr wrap="square" rtlCol="0" anchor="ctr"/>
           <a:lstStyle/>
           <a:p>
-            <a:pPr algn="ctr" indent="0" marL="0">
+            <a:pPr marL="0" indent="0" algn="ctr">
               <a:buNone/>
             </a:pPr>
             <a:r>
@@ -13343,7 +12974,7 @@
             <a:endParaRPr lang="en-US" sz="900" dirty="0"/>
           </a:p>
           <a:p>
-            <a:pPr algn="ctr" indent="0" marL="0">
+            <a:pPr marL="0" indent="0" algn="ctr">
               <a:buNone/>
             </a:pPr>
             <a:r>
@@ -13407,7 +13038,7 @@
           <a:bodyPr wrap="square" rtlCol="0" anchor="ctr"/>
           <a:lstStyle/>
           <a:p>
-            <a:pPr algn="ctr" indent="0" marL="0">
+            <a:pPr marL="0" indent="0" algn="ctr">
               <a:buNone/>
             </a:pPr>
             <a:r>
@@ -13446,7 +13077,7 @@
           <a:bodyPr wrap="square" rtlCol="0" anchor="ctr"/>
           <a:lstStyle/>
           <a:p>
-            <a:pPr algn="ctr" indent="0" marL="0">
+            <a:pPr marL="0" indent="0" algn="ctr">
               <a:buNone/>
             </a:pPr>
             <a:r>
@@ -13463,7 +13094,7 @@
             <a:endParaRPr lang="en-US" sz="900" dirty="0"/>
           </a:p>
           <a:p>
-            <a:pPr algn="ctr" indent="0" marL="0">
+            <a:pPr marL="0" indent="0" algn="ctr">
               <a:buNone/>
             </a:pPr>
             <a:r>
@@ -13505,7 +13136,7 @@
             <a:prstDash val="solid"/>
           </a:ln>
           <a:effectLst>
-            <a:outerShdw sx="100000" sy="100000" kx="0" ky="0" algn="bl" rotWithShape="0" blurRad="101600" dist="38100" dir="8100000">
+            <a:outerShdw blurRad="101600" dist="38100" dir="8100000" algn="bl" rotWithShape="0">
               <a:srgbClr val="000000">
                 <a:alpha val="15000"/>
               </a:srgbClr>
@@ -13534,7 +13165,7 @@
           <a:bodyPr wrap="square" rtlCol="0" anchor="ctr"/>
           <a:lstStyle/>
           <a:p>
-            <a:pPr algn="ctr" indent="0" marL="0">
+            <a:pPr marL="0" indent="0" algn="ctr">
               <a:buNone/>
             </a:pPr>
             <a:r>
@@ -13568,6 +13199,7 @@
         <a:solidFill>
           <a:srgbClr val="F1F5F9"/>
         </a:solidFill>
+        <a:effectLst/>
       </p:bgPr>
     </p:bg>
     <p:spTree>
@@ -13605,7 +13237,7 @@
           <a:bodyPr wrap="square" rtlCol="0" anchor="ctr"/>
           <a:lstStyle/>
           <a:p>
-            <a:pPr indent="0" marL="0">
+            <a:pPr marL="0" indent="0">
               <a:buNone/>
             </a:pPr>
             <a:r>
@@ -13647,7 +13279,7 @@
             <a:prstDash val="solid"/>
           </a:ln>
           <a:effectLst>
-            <a:outerShdw sx="100000" sy="100000" kx="0" ky="0" algn="bl" rotWithShape="0" blurRad="101600" dist="38100" dir="8100000">
+            <a:outerShdw blurRad="101600" dist="38100" dir="8100000" algn="bl" rotWithShape="0">
               <a:srgbClr val="000000">
                 <a:alpha val="15000"/>
               </a:srgbClr>
@@ -13682,14 +13314,14 @@
       </p:sp>
       <p:pic>
         <p:nvPicPr>
-          <p:cNvPr id="5" name="Image 0" descr="preencoded.png">    </p:cNvPr>
+          <p:cNvPr id="5" name="Image 0" descr="preencoded.png"/>
           <p:cNvPicPr>
             <a:picLocks noChangeAspect="1"/>
           </p:cNvPicPr>
           <p:nvPr/>
         </p:nvPicPr>
         <p:blipFill>
-          <a:blip r:embed="rId1"/>
+          <a:blip r:embed="rId3"/>
           <a:stretch>
             <a:fillRect/>
           </a:stretch>
@@ -13725,7 +13357,7 @@
           <a:bodyPr wrap="square" rtlCol="0" anchor="ctr"/>
           <a:lstStyle/>
           <a:p>
-            <a:pPr indent="0" marL="0">
+            <a:pPr marL="0" indent="0">
               <a:buNone/>
             </a:pPr>
             <a:r>
@@ -13852,7 +13484,7 @@
             <a:prstDash val="solid"/>
           </a:ln>
           <a:effectLst>
-            <a:outerShdw sx="100000" sy="100000" kx="0" ky="0" algn="bl" rotWithShape="0" blurRad="101600" dist="38100" dir="8100000">
+            <a:outerShdw blurRad="101600" dist="38100" dir="8100000" algn="bl" rotWithShape="0">
               <a:srgbClr val="000000">
                 <a:alpha val="15000"/>
               </a:srgbClr>
@@ -13887,14 +13519,14 @@
       </p:sp>
       <p:pic>
         <p:nvPicPr>
-          <p:cNvPr id="10" name="Image 1" descr="preencoded.png">    </p:cNvPr>
+          <p:cNvPr id="10" name="Image 1" descr="preencoded.png"/>
           <p:cNvPicPr>
             <a:picLocks noChangeAspect="1"/>
           </p:cNvPicPr>
           <p:nvPr/>
         </p:nvPicPr>
         <p:blipFill>
-          <a:blip r:embed="rId2"/>
+          <a:blip r:embed="rId4"/>
           <a:stretch>
             <a:fillRect/>
           </a:stretch>
@@ -13930,7 +13562,7 @@
           <a:bodyPr wrap="square" rtlCol="0" anchor="ctr"/>
           <a:lstStyle/>
           <a:p>
-            <a:pPr indent="0" marL="0">
+            <a:pPr marL="0" indent="0">
               <a:buNone/>
             </a:pPr>
             <a:r>
@@ -14057,7 +13689,7 @@
             <a:prstDash val="solid"/>
           </a:ln>
           <a:effectLst>
-            <a:outerShdw sx="100000" sy="100000" kx="0" ky="0" algn="bl" rotWithShape="0" blurRad="101600" dist="38100" dir="8100000">
+            <a:outerShdw blurRad="101600" dist="38100" dir="8100000" algn="bl" rotWithShape="0">
               <a:srgbClr val="000000">
                 <a:alpha val="15000"/>
               </a:srgbClr>
@@ -14092,14 +13724,14 @@
       </p:sp>
       <p:pic>
         <p:nvPicPr>
-          <p:cNvPr id="15" name="Image 2" descr="preencoded.png">    </p:cNvPr>
+          <p:cNvPr id="15" name="Image 2" descr="preencoded.png"/>
           <p:cNvPicPr>
             <a:picLocks noChangeAspect="1"/>
           </p:cNvPicPr>
           <p:nvPr/>
         </p:nvPicPr>
         <p:blipFill>
-          <a:blip r:embed="rId3"/>
+          <a:blip r:embed="rId5"/>
           <a:stretch>
             <a:fillRect/>
           </a:stretch>
@@ -14135,7 +13767,7 @@
           <a:bodyPr wrap="square" rtlCol="0" anchor="ctr"/>
           <a:lstStyle/>
           <a:p>
-            <a:pPr indent="0" marL="0">
+            <a:pPr marL="0" indent="0">
               <a:buNone/>
             </a:pPr>
             <a:r>
@@ -14262,7 +13894,7 @@
             <a:prstDash val="solid"/>
           </a:ln>
           <a:effectLst>
-            <a:outerShdw sx="100000" sy="100000" kx="0" ky="0" algn="bl" rotWithShape="0" blurRad="101600" dist="38100" dir="8100000">
+            <a:outerShdw blurRad="101600" dist="38100" dir="8100000" algn="bl" rotWithShape="0">
               <a:srgbClr val="000000">
                 <a:alpha val="15000"/>
               </a:srgbClr>
@@ -14272,14 +13904,14 @@
       </p:sp>
       <p:pic>
         <p:nvPicPr>
-          <p:cNvPr id="19" name="Image 3" descr="preencoded.png">    </p:cNvPr>
+          <p:cNvPr id="19" name="Image 3" descr="preencoded.png"/>
           <p:cNvPicPr>
             <a:picLocks noChangeAspect="1"/>
           </p:cNvPicPr>
           <p:nvPr/>
         </p:nvPicPr>
         <p:blipFill>
-          <a:blip r:embed="rId4"/>
+          <a:blip r:embed="rId6"/>
           <a:stretch>
             <a:fillRect/>
           </a:stretch>
@@ -14315,7 +13947,7 @@
           <a:bodyPr wrap="square" rtlCol="0" anchor="ctr"/>
           <a:lstStyle/>
           <a:p>
-            <a:pPr indent="0" marL="0">
+            <a:pPr marL="0" indent="0">
               <a:buNone/>
             </a:pPr>
             <a:r>
@@ -14354,7 +13986,7 @@
           <a:bodyPr wrap="square" rtlCol="0" anchor="ctr"/>
           <a:lstStyle/>
           <a:p>
-            <a:pPr indent="0" marL="0">
+            <a:pPr marL="0" indent="0">
               <a:buNone/>
             </a:pPr>
             <a:r>
@@ -14673,4 +14305,265 @@
     </a:ext>
   </a:extLst>
 </a:theme>
+</file>
+
+<file path=ppt/theme/theme2.xml><?xml version="1.0" encoding="utf-8"?>
+<a:theme xmlns:a="http://schemas.openxmlformats.org/drawingml/2006/main" name="Office 테마">
+  <a:themeElements>
+    <a:clrScheme name="Office">
+      <a:dk1>
+        <a:sysClr val="windowText" lastClr="000000"/>
+      </a:dk1>
+      <a:lt1>
+        <a:sysClr val="window" lastClr="FFFFFF"/>
+      </a:lt1>
+      <a:dk2>
+        <a:srgbClr val="44546A"/>
+      </a:dk2>
+      <a:lt2>
+        <a:srgbClr val="E7E6E6"/>
+      </a:lt2>
+      <a:accent1>
+        <a:srgbClr val="5B9BD5"/>
+      </a:accent1>
+      <a:accent2>
+        <a:srgbClr val="ED7D31"/>
+      </a:accent2>
+      <a:accent3>
+        <a:srgbClr val="A5A5A5"/>
+      </a:accent3>
+      <a:accent4>
+        <a:srgbClr val="FFC000"/>
+      </a:accent4>
+      <a:accent5>
+        <a:srgbClr val="4472C4"/>
+      </a:accent5>
+      <a:accent6>
+        <a:srgbClr val="70AD47"/>
+      </a:accent6>
+      <a:hlink>
+        <a:srgbClr val="0563C1"/>
+      </a:hlink>
+      <a:folHlink>
+        <a:srgbClr val="954F72"/>
+      </a:folHlink>
+    </a:clrScheme>
+    <a:fontScheme name="Office">
+      <a:majorFont>
+        <a:latin typeface="맑은 고딕" panose="020F0302020204030204"/>
+        <a:ea typeface=""/>
+        <a:cs typeface=""/>
+        <a:font script="Jpan" typeface="游ゴシック Light"/>
+        <a:font script="Hang" typeface="맑은 고딕"/>
+        <a:font script="Hans" typeface="等线 Light"/>
+        <a:font script="Hant" typeface="新細明體"/>
+        <a:font script="Arab" typeface="Times New Roman"/>
+        <a:font script="Hebr" typeface="Times New Roman"/>
+        <a:font script="Thai" typeface="Angsana New"/>
+        <a:font script="Ethi" typeface="Nyala"/>
+        <a:font script="Beng" typeface="Vrinda"/>
+        <a:font script="Gujr" typeface="Shruti"/>
+        <a:font script="Khmr" typeface="MoolBoran"/>
+        <a:font script="Knda" typeface="Tunga"/>
+        <a:font script="Guru" typeface="Raavi"/>
+        <a:font script="Cans" typeface="Euphemia"/>
+        <a:font script="Cher" typeface="Plantagenet Cherokee"/>
+        <a:font script="Yiii" typeface="Microsoft Yi Baiti"/>
+        <a:font script="Tibt" typeface="Microsoft Himalaya"/>
+        <a:font script="Thaa" typeface="MV Boli"/>
+        <a:font script="Deva" typeface="Mangal"/>
+        <a:font script="Telu" typeface="Gautami"/>
+        <a:font script="Taml" typeface="Latha"/>
+        <a:font script="Syrc" typeface="Estrangelo Edessa"/>
+        <a:font script="Orya" typeface="Kalinga"/>
+        <a:font script="Mlym" typeface="Kartika"/>
+        <a:font script="Laoo" typeface="DokChampa"/>
+        <a:font script="Sinh" typeface="Iskoola Pota"/>
+        <a:font script="Mong" typeface="Mongolian Baiti"/>
+        <a:font script="Viet" typeface="Times New Roman"/>
+        <a:font script="Uigh" typeface="Microsoft Uighur"/>
+        <a:font script="Geor" typeface="Sylfaen"/>
+      </a:majorFont>
+      <a:minorFont>
+        <a:latin typeface="맑은 고딕" panose="020F0502020204030204"/>
+        <a:ea typeface=""/>
+        <a:cs typeface=""/>
+        <a:font script="Jpan" typeface="游ゴシック"/>
+        <a:font script="Hang" typeface="맑은 고딕"/>
+        <a:font script="Hans" typeface="等线"/>
+        <a:font script="Hant" typeface="新細明體"/>
+        <a:font script="Arab" typeface="Arial"/>
+        <a:font script="Hebr" typeface="Arial"/>
+        <a:font script="Thai" typeface="Cordia New"/>
+        <a:font script="Ethi" typeface="Nyala"/>
+        <a:font script="Beng" typeface="Vrinda"/>
+        <a:font script="Gujr" typeface="Shruti"/>
+        <a:font script="Khmr" typeface="DaunPenh"/>
+        <a:font script="Knda" typeface="Tunga"/>
+        <a:font script="Guru" typeface="Raavi"/>
+        <a:font script="Cans" typeface="Euphemia"/>
+        <a:font script="Cher" typeface="Plantagenet Cherokee"/>
+        <a:font script="Yiii" typeface="Microsoft Yi Baiti"/>
+        <a:font script="Tibt" typeface="Microsoft Himalaya"/>
+        <a:font script="Thaa" typeface="MV Boli"/>
+        <a:font script="Deva" typeface="Mangal"/>
+        <a:font script="Telu" typeface="Gautami"/>
+        <a:font script="Taml" typeface="Latha"/>
+        <a:font script="Syrc" typeface="Estrangelo Edessa"/>
+        <a:font script="Orya" typeface="Kalinga"/>
+        <a:font script="Mlym" typeface="Kartika"/>
+        <a:font script="Laoo" typeface="DokChampa"/>
+        <a:font script="Sinh" typeface="Iskoola Pota"/>
+        <a:font script="Mong" typeface="Mongolian Baiti"/>
+        <a:font script="Viet" typeface="Arial"/>
+        <a:font script="Uigh" typeface="Microsoft Uighur"/>
+        <a:font script="Geor" typeface="Sylfaen"/>
+      </a:minorFont>
+    </a:fontScheme>
+    <a:fmtScheme name="Office">
+      <a:fillStyleLst>
+        <a:solidFill>
+          <a:schemeClr val="phClr"/>
+        </a:solidFill>
+        <a:gradFill rotWithShape="1">
+          <a:gsLst>
+            <a:gs pos="0">
+              <a:schemeClr val="phClr">
+                <a:lumMod val="110000"/>
+                <a:satMod val="105000"/>
+                <a:tint val="67000"/>
+              </a:schemeClr>
+            </a:gs>
+            <a:gs pos="50000">
+              <a:schemeClr val="phClr">
+                <a:lumMod val="105000"/>
+                <a:satMod val="103000"/>
+                <a:tint val="73000"/>
+              </a:schemeClr>
+            </a:gs>
+            <a:gs pos="100000">
+              <a:schemeClr val="phClr">
+                <a:lumMod val="105000"/>
+                <a:satMod val="109000"/>
+                <a:tint val="81000"/>
+              </a:schemeClr>
+            </a:gs>
+          </a:gsLst>
+          <a:lin ang="5400000" scaled="0"/>
+        </a:gradFill>
+        <a:gradFill rotWithShape="1">
+          <a:gsLst>
+            <a:gs pos="0">
+              <a:schemeClr val="phClr">
+                <a:satMod val="103000"/>
+                <a:lumMod val="102000"/>
+                <a:tint val="94000"/>
+              </a:schemeClr>
+            </a:gs>
+            <a:gs pos="50000">
+              <a:schemeClr val="phClr">
+                <a:satMod val="110000"/>
+                <a:lumMod val="100000"/>
+                <a:shade val="100000"/>
+              </a:schemeClr>
+            </a:gs>
+            <a:gs pos="100000">
+              <a:schemeClr val="phClr">
+                <a:lumMod val="99000"/>
+                <a:satMod val="120000"/>
+                <a:shade val="78000"/>
+              </a:schemeClr>
+            </a:gs>
+          </a:gsLst>
+          <a:lin ang="5400000" scaled="0"/>
+        </a:gradFill>
+      </a:fillStyleLst>
+      <a:lnStyleLst>
+        <a:ln w="6350" cap="flat" cmpd="sng" algn="ctr">
+          <a:solidFill>
+            <a:schemeClr val="phClr"/>
+          </a:solidFill>
+          <a:prstDash val="solid"/>
+          <a:miter lim="800000"/>
+        </a:ln>
+        <a:ln w="12700" cap="flat" cmpd="sng" algn="ctr">
+          <a:solidFill>
+            <a:schemeClr val="phClr"/>
+          </a:solidFill>
+          <a:prstDash val="solid"/>
+          <a:miter lim="800000"/>
+        </a:ln>
+        <a:ln w="19050" cap="flat" cmpd="sng" algn="ctr">
+          <a:solidFill>
+            <a:schemeClr val="phClr"/>
+          </a:solidFill>
+          <a:prstDash val="solid"/>
+          <a:miter lim="800000"/>
+        </a:ln>
+      </a:lnStyleLst>
+      <a:effectStyleLst>
+        <a:effectStyle>
+          <a:effectLst/>
+        </a:effectStyle>
+        <a:effectStyle>
+          <a:effectLst/>
+        </a:effectStyle>
+        <a:effectStyle>
+          <a:effectLst>
+            <a:outerShdw blurRad="57150" dist="19050" dir="5400000" algn="ctr" rotWithShape="0">
+              <a:srgbClr val="000000">
+                <a:alpha val="63000"/>
+              </a:srgbClr>
+            </a:outerShdw>
+          </a:effectLst>
+        </a:effectStyle>
+      </a:effectStyleLst>
+      <a:bgFillStyleLst>
+        <a:solidFill>
+          <a:schemeClr val="phClr"/>
+        </a:solidFill>
+        <a:solidFill>
+          <a:schemeClr val="phClr">
+            <a:tint val="95000"/>
+            <a:satMod val="170000"/>
+          </a:schemeClr>
+        </a:solidFill>
+        <a:gradFill rotWithShape="1">
+          <a:gsLst>
+            <a:gs pos="0">
+              <a:schemeClr val="phClr">
+                <a:tint val="93000"/>
+                <a:satMod val="150000"/>
+                <a:shade val="98000"/>
+                <a:lumMod val="102000"/>
+              </a:schemeClr>
+            </a:gs>
+            <a:gs pos="50000">
+              <a:schemeClr val="phClr">
+                <a:tint val="98000"/>
+                <a:satMod val="130000"/>
+                <a:shade val="90000"/>
+                <a:lumMod val="103000"/>
+              </a:schemeClr>
+            </a:gs>
+            <a:gs pos="100000">
+              <a:schemeClr val="phClr">
+                <a:shade val="63000"/>
+                <a:satMod val="120000"/>
+              </a:schemeClr>
+            </a:gs>
+          </a:gsLst>
+          <a:lin ang="5400000" scaled="0"/>
+        </a:gradFill>
+      </a:bgFillStyleLst>
+    </a:fmtScheme>
+  </a:themeElements>
+  <a:objectDefaults/>
+  <a:extraClrSchemeLst/>
+  <a:extLst>
+    <a:ext uri="{05A4C25C-085E-4340-85A3-A5531E510DB2}">
+      <thm15:themeFamily xmlns:thm15="http://schemas.microsoft.com/office/thememl/2012/main" name="Office Theme" id="{62F939B6-93AF-4DB8-9C6B-D6C7DFDC589F}" vid="{4A3C46E8-61CC-4603-A589-7422A47A8E4A}"/>
+    </a:ext>
+  </a:extLst>
+</a:theme>
 </file>
--- a/project/doc/음식분류_CNN_발표.pptx
+++ b/project/doc/음식분류_CNN_발표.pptx
@@ -4,6 +4,9 @@
   <p:sldMasterIdLst>
     <p:sldMasterId id="2147483648" r:id="rId1"/>
   </p:sldMasterIdLst>
+  <p:notesMasterIdLst>
+    <p:notesMasterId r:id="rId12"/>
+  </p:notesMasterIdLst>
   <p:sldIdLst>
     <p:sldId id="256" r:id="rId2"/>
     <p:sldId id="257" r:id="rId3"/>
@@ -16,10 +19,7 @@
     <p:sldId id="264" r:id="rId10"/>
     <p:sldId id="265" r:id="rId11"/>
   </p:sldIdLst>
-  <p:notesMasterIdLst>
-    <p:notesMasterId r:id="rId12"/>
-  </p:notesMasterIdLst>
-  <p:sldSz cx="9144000" cy="5143500"/>
+  <p:sldSz cx="9144000" cy="5143500" type="screen16x9"/>
   <p:notesSz cx="5143500" cy="9144000"/>
   <p:defaultTextStyle>
     <a:lvl1pPr marL="0" algn="l" defTabSz="914400" rtl="0" eaLnBrk="1" latinLnBrk="0" hangingPunct="1">
@@ -113,13 +113,20 @@
       </a:defRPr>
     </a:lvl9pPr>
   </p:defaultTextStyle>
+  <p:extLst>
+    <p:ext uri="{EFAFB233-063F-42B5-8137-9DF3F51BA10A}">
+      <p15:sldGuideLst xmlns:p15="http://schemas.microsoft.com/office/powerpoint/2012/main"/>
+    </p:ext>
+  </p:extLst>
 </p:presentation>
 </file>
 
 <file path=ppt/charts/chart1.xml><?xml version="1.0" encoding="utf-8"?>
-<c:chartSpace xmlns:c="http://schemas.openxmlformats.org/drawingml/2006/chart" xmlns:a="http://schemas.openxmlformats.org/drawingml/2006/main" xmlns:r="http://schemas.openxmlformats.org/officeDocument/2006/relationships">
+<c:chartSpace xmlns:c="http://schemas.openxmlformats.org/drawingml/2006/chart" xmlns:a="http://schemas.openxmlformats.org/drawingml/2006/main" xmlns:r="http://schemas.openxmlformats.org/officeDocument/2006/relationships" xmlns:c16r2="http://schemas.microsoft.com/office/drawing/2015/06/chart">
   <c:date1904 val="0"/>
+  <c:lang val="ko-KR"/>
   <c:roundedCorners val="1"/>
+  <c:style val="2"/>
   <c:chart>
     <c:title>
       <c:tx>
@@ -136,13 +143,31 @@
               </a:defRPr>
             </a:pPr>
             <a:r>
-              <a:rPr sz="1300" b="0" i="0" u="none" strike="noStrike">
+              <a:rPr lang="ko-KR" altLang="en-US" sz="1300" b="0" i="0" u="none" strike="noStrike">
                 <a:solidFill>
                   <a:srgbClr val="1B2A4A"/>
                 </a:solidFill>
                 <a:latin typeface="Arial"/>
               </a:rPr>
-              <a:t>에폭별 손실(Loss)</a:t>
+              <a:t>에폭별 손실</a:t>
+            </a:r>
+            <a:r>
+              <a:rPr lang="en-US" altLang="ko-KR" sz="1300" b="0" i="0" u="none" strike="noStrike">
+                <a:solidFill>
+                  <a:srgbClr val="1B2A4A"/>
+                </a:solidFill>
+                <a:latin typeface="Arial"/>
+              </a:rPr>
+              <a:t>(</a:t>
+            </a:r>
+            <a:r>
+              <a:rPr lang="en-US" sz="1300" b="0" i="0" u="none" strike="noStrike">
+                <a:solidFill>
+                  <a:srgbClr val="1B2A4A"/>
+                </a:solidFill>
+                <a:latin typeface="Arial"/>
+              </a:rPr>
+              <a:t>Loss)</a:t>
             </a:r>
           </a:p>
         </c:rich>
@@ -154,6 +179,7 @@
     <c:plotArea>
       <c:layout/>
       <c:lineChart>
+        <c:grouping val="standard"/>
         <c:varyColors val="0"/>
         <c:ser>
           <c:idx val="0"/>
@@ -170,9 +196,6 @@
             </c:strRef>
           </c:tx>
           <c:spPr>
-            <a:solidFill>
-              <a:srgbClr val="F87171"/>
-            </a:solidFill>
             <a:ln w="31750" cap="flat">
               <a:solidFill>
                 <a:srgbClr val="F87171"/>
@@ -182,31 +205,6 @@
             </a:ln>
             <a:effectLst/>
           </c:spPr>
-          <c:invertIfNegative val="0"/>
-          <c:dLbls>
-            <c:numFmt formatCode="#,##0" sourceLinked="0"/>
-            <c:txPr>
-              <a:bodyPr/>
-              <a:lstStyle/>
-              <a:p>
-                <a:pPr>
-                  <a:defRPr b="0" i="0" strike="noStrike" sz="1200" u="none">
-                    <a:solidFill>
-                      <a:srgbClr val="000000"/>
-                    </a:solidFill>
-                    <a:latin typeface="Arial"/>
-                  </a:defRPr>
-                </a:pPr>
-              </a:p>
-            </c:txPr>
-            <c:showLegendKey val="0"/>
-            <c:showVal val="0"/>
-            <c:showCatName val="0"/>
-            <c:showSerName val="0"/>
-            <c:showPercent val="0"/>
-            <c:showBubbleSize val="0"/>
-            <c:showLeaderLines val="0"/>
-          </c:dLbls>
           <c:marker>
             <c:symbol val="circle"/>
             <c:size val="6"/>
@@ -225,29 +223,27 @@
             </c:spPr>
           </c:marker>
           <c:cat>
-            <c:multiLvlStrRef>
+            <c:strRef>
               <c:f>Sheet1!$A$2:$A$6</c:f>
-              <c:multiLvlStrCache>
+              <c:strCache>
                 <c:ptCount val="5"/>
-                <c:lvl>
-                  <c:pt idx="0">
-                    <c:v>1</c:v>
-                  </c:pt>
-                  <c:pt idx="1">
-                    <c:v>2</c:v>
-                  </c:pt>
-                  <c:pt idx="2">
-                    <c:v>3</c:v>
-                  </c:pt>
-                  <c:pt idx="3">
-                    <c:v>4</c:v>
-                  </c:pt>
-                  <c:pt idx="4">
-                    <c:v>5</c:v>
-                  </c:pt>
-                </c:lvl>
-              </c:multiLvlStrCache>
-            </c:multiLvlStrRef>
+                <c:pt idx="0">
+                  <c:v>1</c:v>
+                </c:pt>
+                <c:pt idx="1">
+                  <c:v>2</c:v>
+                </c:pt>
+                <c:pt idx="2">
+                  <c:v>3</c:v>
+                </c:pt>
+                <c:pt idx="3">
+                  <c:v>4</c:v>
+                </c:pt>
+                <c:pt idx="4">
+                  <c:v>5</c:v>
+                </c:pt>
+              </c:strCache>
+            </c:strRef>
           </c:cat>
           <c:val>
             <c:numRef>
@@ -262,7 +258,7 @@
                   <c:v>1.28</c:v>
                 </c:pt>
                 <c:pt idx="2">
-                  <c:v>1.1</c:v>
+                  <c:v>1.1000000000000001</c:v>
                 </c:pt>
                 <c:pt idx="3">
                   <c:v>0.96</c:v>
@@ -274,6 +270,11 @@
             </c:numRef>
           </c:val>
           <c:smooth val="1"/>
+          <c:extLst>
+            <c:ext xmlns:c16="http://schemas.microsoft.com/office/drawing/2014/chart" uri="{C3380CC4-5D6E-409C-BE32-E72D297353CC}">
+              <c16:uniqueId val="{00000000-5092-4E5D-835F-3CAA2B3090D5}"/>
+            </c:ext>
+          </c:extLst>
         </c:ser>
         <c:ser>
           <c:idx val="1"/>
@@ -290,9 +291,6 @@
             </c:strRef>
           </c:tx>
           <c:spPr>
-            <a:solidFill>
-              <a:srgbClr val="FB923C"/>
-            </a:solidFill>
             <a:ln w="31750" cap="flat">
               <a:solidFill>
                 <a:srgbClr val="FB923C"/>
@@ -302,31 +300,6 @@
             </a:ln>
             <a:effectLst/>
           </c:spPr>
-          <c:invertIfNegative val="0"/>
-          <c:dLbls>
-            <c:numFmt formatCode="#,##0" sourceLinked="0"/>
-            <c:txPr>
-              <a:bodyPr/>
-              <a:lstStyle/>
-              <a:p>
-                <a:pPr>
-                  <a:defRPr b="0" i="0" strike="noStrike" sz="1200" u="none">
-                    <a:solidFill>
-                      <a:srgbClr val="000000"/>
-                    </a:solidFill>
-                    <a:latin typeface="Arial"/>
-                  </a:defRPr>
-                </a:pPr>
-              </a:p>
-            </c:txPr>
-            <c:showLegendKey val="0"/>
-            <c:showVal val="0"/>
-            <c:showCatName val="0"/>
-            <c:showSerName val="0"/>
-            <c:showPercent val="0"/>
-            <c:showBubbleSize val="0"/>
-            <c:showLeaderLines val="0"/>
-          </c:dLbls>
           <c:marker>
             <c:symbol val="circle"/>
             <c:size val="6"/>
@@ -345,29 +318,27 @@
             </c:spPr>
           </c:marker>
           <c:cat>
-            <c:multiLvlStrRef>
+            <c:strRef>
               <c:f>Sheet1!$A$2:$A$6</c:f>
-              <c:multiLvlStrCache>
+              <c:strCache>
                 <c:ptCount val="5"/>
-                <c:lvl>
-                  <c:pt idx="0">
-                    <c:v>1</c:v>
-                  </c:pt>
-                  <c:pt idx="1">
-                    <c:v>2</c:v>
-                  </c:pt>
-                  <c:pt idx="2">
-                    <c:v>3</c:v>
-                  </c:pt>
-                  <c:pt idx="3">
-                    <c:v>4</c:v>
-                  </c:pt>
-                  <c:pt idx="4">
-                    <c:v>5</c:v>
-                  </c:pt>
-                </c:lvl>
-              </c:multiLvlStrCache>
-            </c:multiLvlStrRef>
+                <c:pt idx="0">
+                  <c:v>1</c:v>
+                </c:pt>
+                <c:pt idx="1">
+                  <c:v>2</c:v>
+                </c:pt>
+                <c:pt idx="2">
+                  <c:v>3</c:v>
+                </c:pt>
+                <c:pt idx="3">
+                  <c:v>4</c:v>
+                </c:pt>
+                <c:pt idx="4">
+                  <c:v>5</c:v>
+                </c:pt>
+              </c:strCache>
+            </c:strRef>
           </c:cat>
           <c:val>
             <c:numRef>
@@ -394,35 +365,24 @@
             </c:numRef>
           </c:val>
           <c:smooth val="1"/>
+          <c:extLst>
+            <c:ext xmlns:c16="http://schemas.microsoft.com/office/drawing/2014/chart" uri="{C3380CC4-5D6E-409C-BE32-E72D297353CC}">
+              <c16:uniqueId val="{00000001-5092-4E5D-835F-3CAA2B3090D5}"/>
+            </c:ext>
+          </c:extLst>
         </c:ser>
         <c:dLbls>
-          <c:numFmt formatCode="#,##0" sourceLinked="0"/>
-          <c:txPr>
-            <a:bodyPr/>
-            <a:lstStyle/>
-            <a:p>
-              <a:pPr>
-                <a:defRPr b="0" i="0" strike="noStrike" sz="1200" u="none">
-                  <a:solidFill>
-                    <a:srgbClr val="000000"/>
-                  </a:solidFill>
-                  <a:latin typeface="Arial"/>
-                </a:defRPr>
-              </a:pPr>
-            </a:p>
-          </c:txPr>
           <c:showLegendKey val="0"/>
           <c:showVal val="0"/>
           <c:showCatName val="0"/>
           <c:showSerName val="0"/>
           <c:showPercent val="0"/>
           <c:showBubbleSize val="0"/>
-          <c:showLeaderLines val="0"/>
         </c:dLbls>
         <c:marker val="1"/>
+        <c:smooth val="0"/>
         <c:axId val="2094734554"/>
         <c:axId val="2094734552"/>
-        <c:axId val="2094734556"/>
       </c:lineChart>
       <c:catAx>
         <c:axId val="2094734554"/>
@@ -456,13 +416,14 @@
                 <a:latin typeface="Arial"/>
               </a:defRPr>
             </a:pPr>
-            <a:endParaRPr lang="en-US"/>
+            <a:endParaRPr lang="ko-KR"/>
           </a:p>
         </c:txPr>
         <c:crossAx val="2094734552"/>
         <c:crosses val="autoZero"/>
         <c:auto val="1"/>
         <c:lblAlgn val="ctr"/>
+        <c:lblOffset val="100"/>
         <c:noMultiLvlLbl val="1"/>
       </c:catAx>
       <c:valAx>
@@ -508,7 +469,7 @@
                 <a:latin typeface="Arial"/>
               </a:defRPr>
             </a:pPr>
-            <a:endParaRPr lang="en-US"/>
+            <a:endParaRPr lang="ko-KR"/>
           </a:p>
         </c:txPr>
         <c:crossAx val="2094734554"/>
@@ -525,20 +486,22 @@
     </c:plotArea>
     <c:legend>
       <c:legendPos val="b"/>
+      <c:layout/>
       <c:overlay val="0"/>
       <c:txPr>
         <a:bodyPr/>
         <a:lstStyle/>
         <a:p>
           <a:pPr>
-            <a:defRPr sz="1000">      </a:defRPr>
+            <a:defRPr sz="1000"/>
           </a:pPr>
-          <a:endParaRPr lang="en-US"/>
+          <a:endParaRPr lang="ko-KR"/>
         </a:p>
       </c:txPr>
     </c:legend>
     <c:plotVisOnly val="1"/>
     <c:dispBlanksAs val="span"/>
+    <c:showDLblsOverMax val="1"/>
   </c:chart>
   <c:spPr>
     <a:solidFill>
@@ -556,9 +519,11 @@
 </file>
 
 <file path=ppt/charts/chart2.xml><?xml version="1.0" encoding="utf-8"?>
-<c:chartSpace xmlns:c="http://schemas.openxmlformats.org/drawingml/2006/chart" xmlns:a="http://schemas.openxmlformats.org/drawingml/2006/main" xmlns:r="http://schemas.openxmlformats.org/officeDocument/2006/relationships">
+<c:chartSpace xmlns:c="http://schemas.openxmlformats.org/drawingml/2006/chart" xmlns:a="http://schemas.openxmlformats.org/drawingml/2006/main" xmlns:r="http://schemas.openxmlformats.org/officeDocument/2006/relationships" xmlns:c16r2="http://schemas.microsoft.com/office/drawing/2015/06/chart">
   <c:date1904 val="0"/>
+  <c:lang val="ko-KR"/>
   <c:roundedCorners val="1"/>
+  <c:style val="2"/>
   <c:chart>
     <c:title>
       <c:tx>
@@ -575,13 +540,22 @@
               </a:defRPr>
             </a:pPr>
             <a:r>
-              <a:rPr sz="1300" b="0" i="0" u="none" strike="noStrike">
+              <a:rPr lang="ko-KR" altLang="en-US" sz="1300" b="0" i="0" u="none" strike="noStrike">
                 <a:solidFill>
                   <a:srgbClr val="1B2A4A"/>
                 </a:solidFill>
                 <a:latin typeface="Arial"/>
               </a:rPr>
-              <a:t>에폭별 정확도(%)</a:t>
+              <a:t>에폭별 정확도</a:t>
+            </a:r>
+            <a:r>
+              <a:rPr lang="en-US" altLang="ko-KR" sz="1300" b="0" i="0" u="none" strike="noStrike">
+                <a:solidFill>
+                  <a:srgbClr val="1B2A4A"/>
+                </a:solidFill>
+                <a:latin typeface="Arial"/>
+              </a:rPr>
+              <a:t>(%)</a:t>
             </a:r>
           </a:p>
         </c:rich>
@@ -593,6 +567,7 @@
     <c:plotArea>
       <c:layout/>
       <c:lineChart>
+        <c:grouping val="standard"/>
         <c:varyColors val="0"/>
         <c:ser>
           <c:idx val="0"/>
@@ -609,9 +584,6 @@
             </c:strRef>
           </c:tx>
           <c:spPr>
-            <a:solidFill>
-              <a:srgbClr val="F87171"/>
-            </a:solidFill>
             <a:ln w="31750" cap="flat">
               <a:solidFill>
                 <a:srgbClr val="F87171"/>
@@ -621,31 +593,6 @@
             </a:ln>
             <a:effectLst/>
           </c:spPr>
-          <c:invertIfNegative val="0"/>
-          <c:dLbls>
-            <c:numFmt formatCode="#,##0" sourceLinked="0"/>
-            <c:txPr>
-              <a:bodyPr/>
-              <a:lstStyle/>
-              <a:p>
-                <a:pPr>
-                  <a:defRPr b="0" i="0" strike="noStrike" sz="1200" u="none">
-                    <a:solidFill>
-                      <a:srgbClr val="000000"/>
-                    </a:solidFill>
-                    <a:latin typeface="Arial"/>
-                  </a:defRPr>
-                </a:pPr>
-              </a:p>
-            </c:txPr>
-            <c:showLegendKey val="0"/>
-            <c:showVal val="0"/>
-            <c:showCatName val="0"/>
-            <c:showSerName val="0"/>
-            <c:showPercent val="0"/>
-            <c:showBubbleSize val="0"/>
-            <c:showLeaderLines val="0"/>
-          </c:dLbls>
           <c:marker>
             <c:symbol val="circle"/>
             <c:size val="6"/>
@@ -664,29 +611,27 @@
             </c:spPr>
           </c:marker>
           <c:cat>
-            <c:multiLvlStrRef>
+            <c:strRef>
               <c:f>Sheet1!$A$2:$A$6</c:f>
-              <c:multiLvlStrCache>
+              <c:strCache>
                 <c:ptCount val="5"/>
-                <c:lvl>
-                  <c:pt idx="0">
-                    <c:v>1</c:v>
-                  </c:pt>
-                  <c:pt idx="1">
-                    <c:v>2</c:v>
-                  </c:pt>
-                  <c:pt idx="2">
-                    <c:v>3</c:v>
-                  </c:pt>
-                  <c:pt idx="3">
-                    <c:v>4</c:v>
-                  </c:pt>
-                  <c:pt idx="4">
-                    <c:v>5</c:v>
-                  </c:pt>
-                </c:lvl>
-              </c:multiLvlStrCache>
-            </c:multiLvlStrRef>
+                <c:pt idx="0">
+                  <c:v>1</c:v>
+                </c:pt>
+                <c:pt idx="1">
+                  <c:v>2</c:v>
+                </c:pt>
+                <c:pt idx="2">
+                  <c:v>3</c:v>
+                </c:pt>
+                <c:pt idx="3">
+                  <c:v>4</c:v>
+                </c:pt>
+                <c:pt idx="4">
+                  <c:v>5</c:v>
+                </c:pt>
+              </c:strCache>
+            </c:strRef>
           </c:cat>
           <c:val>
             <c:numRef>
@@ -713,6 +658,11 @@
             </c:numRef>
           </c:val>
           <c:smooth val="1"/>
+          <c:extLst>
+            <c:ext xmlns:c16="http://schemas.microsoft.com/office/drawing/2014/chart" uri="{C3380CC4-5D6E-409C-BE32-E72D297353CC}">
+              <c16:uniqueId val="{00000000-2CE9-4F99-B412-8209554D1479}"/>
+            </c:ext>
+          </c:extLst>
         </c:ser>
         <c:ser>
           <c:idx val="1"/>
@@ -729,9 +679,6 @@
             </c:strRef>
           </c:tx>
           <c:spPr>
-            <a:solidFill>
-              <a:srgbClr val="FB923C"/>
-            </a:solidFill>
             <a:ln w="31750" cap="flat">
               <a:solidFill>
                 <a:srgbClr val="FB923C"/>
@@ -741,31 +688,6 @@
             </a:ln>
             <a:effectLst/>
           </c:spPr>
-          <c:invertIfNegative val="0"/>
-          <c:dLbls>
-            <c:numFmt formatCode="#,##0" sourceLinked="0"/>
-            <c:txPr>
-              <a:bodyPr/>
-              <a:lstStyle/>
-              <a:p>
-                <a:pPr>
-                  <a:defRPr b="0" i="0" strike="noStrike" sz="1200" u="none">
-                    <a:solidFill>
-                      <a:srgbClr val="000000"/>
-                    </a:solidFill>
-                    <a:latin typeface="Arial"/>
-                  </a:defRPr>
-                </a:pPr>
-              </a:p>
-            </c:txPr>
-            <c:showLegendKey val="0"/>
-            <c:showVal val="0"/>
-            <c:showCatName val="0"/>
-            <c:showSerName val="0"/>
-            <c:showPercent val="0"/>
-            <c:showBubbleSize val="0"/>
-            <c:showLeaderLines val="0"/>
-          </c:dLbls>
           <c:marker>
             <c:symbol val="circle"/>
             <c:size val="6"/>
@@ -784,29 +706,27 @@
             </c:spPr>
           </c:marker>
           <c:cat>
-            <c:multiLvlStrRef>
+            <c:strRef>
               <c:f>Sheet1!$A$2:$A$6</c:f>
-              <c:multiLvlStrCache>
+              <c:strCache>
                 <c:ptCount val="5"/>
-                <c:lvl>
-                  <c:pt idx="0">
-                    <c:v>1</c:v>
-                  </c:pt>
-                  <c:pt idx="1">
-                    <c:v>2</c:v>
-                  </c:pt>
-                  <c:pt idx="2">
-                    <c:v>3</c:v>
-                  </c:pt>
-                  <c:pt idx="3">
-                    <c:v>4</c:v>
-                  </c:pt>
-                  <c:pt idx="4">
-                    <c:v>5</c:v>
-                  </c:pt>
-                </c:lvl>
-              </c:multiLvlStrCache>
-            </c:multiLvlStrRef>
+                <c:pt idx="0">
+                  <c:v>1</c:v>
+                </c:pt>
+                <c:pt idx="1">
+                  <c:v>2</c:v>
+                </c:pt>
+                <c:pt idx="2">
+                  <c:v>3</c:v>
+                </c:pt>
+                <c:pt idx="3">
+                  <c:v>4</c:v>
+                </c:pt>
+                <c:pt idx="4">
+                  <c:v>5</c:v>
+                </c:pt>
+              </c:strCache>
+            </c:strRef>
           </c:cat>
           <c:val>
             <c:numRef>
@@ -833,35 +753,24 @@
             </c:numRef>
           </c:val>
           <c:smooth val="1"/>
+          <c:extLst>
+            <c:ext xmlns:c16="http://schemas.microsoft.com/office/drawing/2014/chart" uri="{C3380CC4-5D6E-409C-BE32-E72D297353CC}">
+              <c16:uniqueId val="{00000001-2CE9-4F99-B412-8209554D1479}"/>
+            </c:ext>
+          </c:extLst>
         </c:ser>
         <c:dLbls>
-          <c:numFmt formatCode="#,##0" sourceLinked="0"/>
-          <c:txPr>
-            <a:bodyPr/>
-            <a:lstStyle/>
-            <a:p>
-              <a:pPr>
-                <a:defRPr b="0" i="0" strike="noStrike" sz="1200" u="none">
-                  <a:solidFill>
-                    <a:srgbClr val="000000"/>
-                  </a:solidFill>
-                  <a:latin typeface="Arial"/>
-                </a:defRPr>
-              </a:pPr>
-            </a:p>
-          </c:txPr>
           <c:showLegendKey val="0"/>
           <c:showVal val="0"/>
           <c:showCatName val="0"/>
           <c:showSerName val="0"/>
           <c:showPercent val="0"/>
           <c:showBubbleSize val="0"/>
-          <c:showLeaderLines val="0"/>
         </c:dLbls>
         <c:marker val="1"/>
+        <c:smooth val="0"/>
         <c:axId val="2094734554"/>
         <c:axId val="2094734552"/>
-        <c:axId val="2094734556"/>
       </c:lineChart>
       <c:catAx>
         <c:axId val="2094734554"/>
@@ -895,13 +804,14 @@
                 <a:latin typeface="Arial"/>
               </a:defRPr>
             </a:pPr>
-            <a:endParaRPr lang="en-US"/>
+            <a:endParaRPr lang="ko-KR"/>
           </a:p>
         </c:txPr>
         <c:crossAx val="2094734552"/>
         <c:crosses val="autoZero"/>
         <c:auto val="1"/>
         <c:lblAlgn val="ctr"/>
+        <c:lblOffset val="100"/>
         <c:noMultiLvlLbl val="1"/>
       </c:catAx>
       <c:valAx>
@@ -947,7 +857,7 @@
                 <a:latin typeface="Arial"/>
               </a:defRPr>
             </a:pPr>
-            <a:endParaRPr lang="en-US"/>
+            <a:endParaRPr lang="ko-KR"/>
           </a:p>
         </c:txPr>
         <c:crossAx val="2094734554"/>
@@ -964,20 +874,22 @@
     </c:plotArea>
     <c:legend>
       <c:legendPos val="b"/>
+      <c:layout/>
       <c:overlay val="0"/>
       <c:txPr>
         <a:bodyPr/>
         <a:lstStyle/>
         <a:p>
           <a:pPr>
-            <a:defRPr sz="1000">      </a:defRPr>
+            <a:defRPr sz="1000"/>
           </a:pPr>
-          <a:endParaRPr lang="en-US"/>
+          <a:endParaRPr lang="ko-KR"/>
         </a:p>
       </c:txPr>
     </c:legend>
     <c:plotVisOnly val="1"/>
     <c:dispBlanksAs val="span"/>
+    <c:showDLblsOverMax val="1"/>
   </c:chart>
   <c:spPr>
     <a:solidFill>
@@ -1016,240 +928,16 @@
           <a:chExt cx="0" cy="0"/>
         </a:xfrm>
       </p:grpSpPr>
-      <p:sp>
-        <p:nvSpPr>
-          <p:cNvPr id="2" name="Header Placeholder 1"/>
-          <p:cNvSpPr>
-            <a:spLocks noGrp="1"/>
-          </p:cNvSpPr>
-          <p:nvPr>
-            <p:ph type="hdr" sz="quarter"/>
-          </p:nvPr>
-        </p:nvSpPr>
-        <p:spPr>
-          <a:xfrm>
-            <a:off x="0" y="0"/>
-            <a:ext cx="2971800" cy="458788"/>
-          </a:xfrm>
-          <a:prstGeom prst="rect">
-            <a:avLst/>
-          </a:prstGeom>
-        </p:spPr>
-        <p:txBody>
-          <a:bodyPr vert="horz" lIns="91440" tIns="45720" rIns="91440" bIns="45720" rtlCol="0"/>
-          <a:lstStyle>
-            <a:lvl1pPr algn="l">
-              <a:defRPr sz="1200"/>
-            </a:lvl1pPr>
-          </a:lstStyle>
-          <a:p>
-            <a:endParaRPr lang="en-US"/>
-          </a:p>
-        </p:txBody>
-      </p:sp>
-      <p:sp>
-        <p:nvSpPr>
-          <p:cNvPr id="3" name="Date Placeholder 2"/>
-          <p:cNvSpPr>
-            <a:spLocks noGrp="1"/>
-          </p:cNvSpPr>
-          <p:nvPr>
-            <p:ph type="dt" idx="1"/>
-          </p:nvPr>
-        </p:nvSpPr>
-        <p:spPr>
-          <a:xfrm>
-            <a:off x="3884613" y="0"/>
-            <a:ext cx="2971800" cy="458788"/>
-          </a:xfrm>
-          <a:prstGeom prst="rect">
-            <a:avLst/>
-          </a:prstGeom>
-        </p:spPr>
-        <p:txBody>
-          <a:bodyPr vert="horz" lIns="91440" tIns="45720" rIns="91440" bIns="45720" rtlCol="0"/>
-          <a:lstStyle>
-            <a:lvl1pPr algn="r">
-              <a:defRPr sz="1200"/>
-            </a:lvl1pPr>
-          </a:lstStyle>
-          <a:p>
-            <a:fld id="{5282F153-3F37-0F45-9E97-73ACFA13230C}" type="datetimeFigureOut">
-              <a:rPr lang="en-US"/>
-              <a:t>7/23/19</a:t>
-            </a:fld>
-            <a:endParaRPr lang="en-US"/>
-          </a:p>
-        </p:txBody>
-      </p:sp>
-      <p:sp>
-        <p:nvSpPr>
-          <p:cNvPr id="4" name="Slide Image Placeholder 3"/>
-          <p:cNvSpPr>
-            <a:spLocks noGrp="1" noRot="1" noChangeAspect="1"/>
-          </p:cNvSpPr>
-          <p:nvPr>
-            <p:ph type="sldImg" idx="2"/>
-          </p:nvPr>
-        </p:nvSpPr>
-        <p:spPr>
-          <a:xfrm>
-            <a:off x="685800" y="1143000"/>
-            <a:ext cx="5486400" cy="3086100"/>
-          </a:xfrm>
-          <a:prstGeom prst="rect">
-            <a:avLst/>
-          </a:prstGeom>
-          <a:noFill/>
-          <a:ln w="12700">
-            <a:solidFill>
-              <a:prstClr val="black"/>
-            </a:solidFill>
-          </a:ln>
-        </p:spPr>
-        <p:txBody>
-          <a:bodyPr vert="horz" lIns="91440" tIns="45720" rIns="91440" bIns="45720" rtlCol="0" anchor="ctr"/>
-          <a:lstStyle/>
-          <a:p>
-            <a:endParaRPr lang="en-US"/>
-          </a:p>
-        </p:txBody>
-      </p:sp>
-      <p:sp>
-        <p:nvSpPr>
-          <p:cNvPr id="5" name="Notes Placeholder 4"/>
-          <p:cNvSpPr>
-            <a:spLocks noGrp="1"/>
-          </p:cNvSpPr>
-          <p:nvPr>
-            <p:ph type="body" sz="quarter" idx="3"/>
-          </p:nvPr>
-        </p:nvSpPr>
-        <p:spPr>
-          <a:xfrm>
-            <a:off x="685800" y="4400550"/>
-            <a:ext cx="5486400" cy="3600450"/>
-          </a:xfrm>
-          <a:prstGeom prst="rect">
-            <a:avLst/>
-          </a:prstGeom>
-        </p:spPr>
-        <p:txBody>
-          <a:bodyPr vert="horz" lIns="91440" tIns="45720" rIns="91440" bIns="45720" rtlCol="0"/>
-          <a:lstStyle/>
-          <a:p>
-            <a:pPr lvl="0"/>
-            <a:r>
-              <a:rPr lang="en-US"/>
-              <a:t>Click to edit Master text styles</a:t>
-            </a:r>
-          </a:p>
-          <a:p>
-            <a:pPr lvl="1"/>
-            <a:r>
-              <a:rPr lang="en-US"/>
-              <a:t>Second level</a:t>
-            </a:r>
-          </a:p>
-          <a:p>
-            <a:pPr lvl="2"/>
-            <a:r>
-              <a:rPr lang="en-US"/>
-              <a:t>Third level</a:t>
-            </a:r>
-          </a:p>
-          <a:p>
-            <a:pPr lvl="3"/>
-            <a:r>
-              <a:rPr lang="en-US"/>
-              <a:t>Fourth level</a:t>
-            </a:r>
-          </a:p>
-          <a:p>
-            <a:pPr lvl="4"/>
-            <a:r>
-              <a:rPr lang="en-US"/>
-              <a:t>Fifth level</a:t>
-            </a:r>
-          </a:p>
-        </p:txBody>
-      </p:sp>
-      <p:sp>
-        <p:nvSpPr>
-          <p:cNvPr id="6" name="Footer Placeholder 5"/>
-          <p:cNvSpPr>
-            <a:spLocks noGrp="1"/>
-          </p:cNvSpPr>
-          <p:nvPr>
-            <p:ph type="ftr" sz="quarter" idx="4"/>
-          </p:nvPr>
-        </p:nvSpPr>
-        <p:spPr>
-          <a:xfrm>
-            <a:off x="0" y="8685213"/>
-            <a:ext cx="2971800" cy="458787"/>
-          </a:xfrm>
-          <a:prstGeom prst="rect">
-            <a:avLst/>
-          </a:prstGeom>
-        </p:spPr>
-        <p:txBody>
-          <a:bodyPr vert="horz" lIns="91440" tIns="45720" rIns="91440" bIns="45720" rtlCol="0" anchor="b"/>
-          <a:lstStyle>
-            <a:lvl1pPr algn="l">
-              <a:defRPr sz="1200"/>
-            </a:lvl1pPr>
-          </a:lstStyle>
-          <a:p>
-            <a:endParaRPr lang="en-US"/>
-          </a:p>
-        </p:txBody>
-      </p:sp>
-      <p:sp>
-        <p:nvSpPr>
-          <p:cNvPr id="7" name="Slide Number Placeholder 6"/>
-          <p:cNvSpPr>
-            <a:spLocks noGrp="1"/>
-          </p:cNvSpPr>
-          <p:nvPr>
-            <p:ph type="sldNum" sz="quarter" idx="5"/>
-          </p:nvPr>
-        </p:nvSpPr>
-        <p:spPr>
-          <a:xfrm>
-            <a:off x="3884613" y="8685213"/>
-            <a:ext cx="2971800" cy="458787"/>
-          </a:xfrm>
-          <a:prstGeom prst="rect">
-            <a:avLst/>
-          </a:prstGeom>
-        </p:spPr>
-        <p:txBody>
-          <a:bodyPr vert="horz" lIns="91440" tIns="45720" rIns="91440" bIns="45720" rtlCol="0" anchor="b"/>
-          <a:lstStyle>
-            <a:lvl1pPr algn="r">
-              <a:defRPr sz="1200"/>
-            </a:lvl1pPr>
-          </a:lstStyle>
-          <a:p>
-            <a:fld id="{CE5E9CC1-C706-0F49-92D6-E571CC5EEA8F}" type="slidenum">
-              <a:rPr lang="en-US"/>
-              <a:t>‹#›</a:t>
-            </a:fld>
-            <a:endParaRPr lang="en-US"/>
-          </a:p>
-        </p:txBody>
-      </p:sp>
     </p:spTree>
     <p:extLst>
       <p:ext uri="{BB962C8B-B14F-4D97-AF65-F5344CB8AC3E}">
-        <p14:creationId xmlns:p14="http://schemas.microsoft.com/office/powerpoint/2010/main" val="1024086991"/>
+        <p14:creationId xmlns:p14="http://schemas.microsoft.com/office/powerpoint/2010/main" val="2174635707"/>
       </p:ext>
     </p:extLst>
   </p:cSld>
   <p:clrMap bg1="lt1" tx1="dk1" bg2="lt2" tx2="dk2" accent1="accent1" accent2="accent2" accent3="accent3" accent4="accent4" accent5="accent5" accent6="accent6" hlink="hlink" folHlink="folHlink"/>
   <p:notesStyle>
-    <a:lvl1pPr marL="0" algn="l" defTabSz="914400" rtl="0" eaLnBrk="1" latinLnBrk="0" hangingPunct="1">
+    <a:lvl1pPr marL="0" algn="l" defTabSz="914400" rtl="0" eaLnBrk="1" latinLnBrk="1" hangingPunct="1">
       <a:defRPr sz="1200" kern="1200">
         <a:solidFill>
           <a:schemeClr val="tx1"/>
@@ -1259,7 +947,7 @@
         <a:cs typeface="+mn-cs"/>
       </a:defRPr>
     </a:lvl1pPr>
-    <a:lvl2pPr marL="457200" algn="l" defTabSz="914400" rtl="0" eaLnBrk="1" latinLnBrk="0" hangingPunct="1">
+    <a:lvl2pPr marL="457200" algn="l" defTabSz="914400" rtl="0" eaLnBrk="1" latinLnBrk="1" hangingPunct="1">
       <a:defRPr sz="1200" kern="1200">
         <a:solidFill>
           <a:schemeClr val="tx1"/>
@@ -1269,7 +957,7 @@
         <a:cs typeface="+mn-cs"/>
       </a:defRPr>
     </a:lvl2pPr>
-    <a:lvl3pPr marL="914400" algn="l" defTabSz="914400" rtl="0" eaLnBrk="1" latinLnBrk="0" hangingPunct="1">
+    <a:lvl3pPr marL="914400" algn="l" defTabSz="914400" rtl="0" eaLnBrk="1" latinLnBrk="1" hangingPunct="1">
       <a:defRPr sz="1200" kern="1200">
         <a:solidFill>
           <a:schemeClr val="tx1"/>
@@ -1279,7 +967,7 @@
         <a:cs typeface="+mn-cs"/>
       </a:defRPr>
     </a:lvl3pPr>
-    <a:lvl4pPr marL="1371600" algn="l" defTabSz="914400" rtl="0" eaLnBrk="1" latinLnBrk="0" hangingPunct="1">
+    <a:lvl4pPr marL="1371600" algn="l" defTabSz="914400" rtl="0" eaLnBrk="1" latinLnBrk="1" hangingPunct="1">
       <a:defRPr sz="1200" kern="1200">
         <a:solidFill>
           <a:schemeClr val="tx1"/>
@@ -1289,7 +977,7 @@
         <a:cs typeface="+mn-cs"/>
       </a:defRPr>
     </a:lvl4pPr>
-    <a:lvl5pPr marL="1828800" algn="l" defTabSz="914400" rtl="0" eaLnBrk="1" latinLnBrk="0" hangingPunct="1">
+    <a:lvl5pPr marL="1828800" algn="l" defTabSz="914400" rtl="0" eaLnBrk="1" latinLnBrk="1" hangingPunct="1">
       <a:defRPr sz="1200" kern="1200">
         <a:solidFill>
           <a:schemeClr val="tx1"/>
@@ -1299,7 +987,7 @@
         <a:cs typeface="+mn-cs"/>
       </a:defRPr>
     </a:lvl5pPr>
-    <a:lvl6pPr marL="2286000" algn="l" defTabSz="914400" rtl="0" eaLnBrk="1" latinLnBrk="0" hangingPunct="1">
+    <a:lvl6pPr marL="2286000" algn="l" defTabSz="914400" rtl="0" eaLnBrk="1" latinLnBrk="1" hangingPunct="1">
       <a:defRPr sz="1200" kern="1200">
         <a:solidFill>
           <a:schemeClr val="tx1"/>
@@ -1309,7 +997,7 @@
         <a:cs typeface="+mn-cs"/>
       </a:defRPr>
     </a:lvl6pPr>
-    <a:lvl7pPr marL="2743200" algn="l" defTabSz="914400" rtl="0" eaLnBrk="1" latinLnBrk="0" hangingPunct="1">
+    <a:lvl7pPr marL="2743200" algn="l" defTabSz="914400" rtl="0" eaLnBrk="1" latinLnBrk="1" hangingPunct="1">
       <a:defRPr sz="1200" kern="1200">
         <a:solidFill>
           <a:schemeClr val="tx1"/>
@@ -1319,7 +1007,7 @@
         <a:cs typeface="+mn-cs"/>
       </a:defRPr>
     </a:lvl7pPr>
-    <a:lvl8pPr marL="3200400" algn="l" defTabSz="914400" rtl="0" eaLnBrk="1" latinLnBrk="0" hangingPunct="1">
+    <a:lvl8pPr marL="3200400" algn="l" defTabSz="914400" rtl="0" eaLnBrk="1" latinLnBrk="1" hangingPunct="1">
       <a:defRPr sz="1200" kern="1200">
         <a:solidFill>
           <a:schemeClr val="tx1"/>
@@ -1329,7 +1017,7 @@
         <a:cs typeface="+mn-cs"/>
       </a:defRPr>
     </a:lvl8pPr>
-    <a:lvl9pPr marL="3657600" algn="l" defTabSz="914400" rtl="0" eaLnBrk="1" latinLnBrk="0" hangingPunct="1">
+    <a:lvl9pPr marL="3657600" algn="l" defTabSz="914400" rtl="0" eaLnBrk="1" latinLnBrk="1" hangingPunct="1">
       <a:defRPr sz="1200" kern="1200">
         <a:solidFill>
           <a:schemeClr val="tx1"/>
@@ -1387,10 +1075,6 @@
           <a:bodyPr/>
           <a:lstStyle/>
           <a:p>
-            <a:r>
-              <a:rPr lang="en-US" dirty="0"/>
-              <a:t/>
-            </a:r>
             <a:endParaRPr lang="en-US" dirty="0"/>
           </a:p>
         </p:txBody>
@@ -1475,10 +1159,6 @@
           <a:bodyPr/>
           <a:lstStyle/>
           <a:p>
-            <a:r>
-              <a:rPr lang="en-US" dirty="0"/>
-              <a:t/>
-            </a:r>
             <a:endParaRPr lang="en-US" dirty="0"/>
           </a:p>
         </p:txBody>
@@ -1563,10 +1243,6 @@
           <a:bodyPr/>
           <a:lstStyle/>
           <a:p>
-            <a:r>
-              <a:rPr lang="en-US" dirty="0"/>
-              <a:t/>
-            </a:r>
             <a:endParaRPr lang="en-US" dirty="0"/>
           </a:p>
         </p:txBody>
@@ -1651,10 +1327,6 @@
           <a:bodyPr/>
           <a:lstStyle/>
           <a:p>
-            <a:r>
-              <a:rPr lang="en-US" dirty="0"/>
-              <a:t/>
-            </a:r>
             <a:endParaRPr lang="en-US" dirty="0"/>
           </a:p>
         </p:txBody>
@@ -1739,10 +1411,6 @@
           <a:bodyPr/>
           <a:lstStyle/>
           <a:p>
-            <a:r>
-              <a:rPr lang="en-US" dirty="0"/>
-              <a:t/>
-            </a:r>
             <a:endParaRPr lang="en-US" dirty="0"/>
           </a:p>
         </p:txBody>
@@ -1827,10 +1495,6 @@
           <a:bodyPr/>
           <a:lstStyle/>
           <a:p>
-            <a:r>
-              <a:rPr lang="en-US" dirty="0"/>
-              <a:t/>
-            </a:r>
             <a:endParaRPr lang="en-US" dirty="0"/>
           </a:p>
         </p:txBody>
@@ -1915,10 +1579,6 @@
           <a:bodyPr/>
           <a:lstStyle/>
           <a:p>
-            <a:r>
-              <a:rPr lang="en-US" dirty="0"/>
-              <a:t/>
-            </a:r>
             <a:endParaRPr lang="en-US" dirty="0"/>
           </a:p>
         </p:txBody>
@@ -2003,10 +1663,6 @@
           <a:bodyPr/>
           <a:lstStyle/>
           <a:p>
-            <a:r>
-              <a:rPr lang="en-US" dirty="0"/>
-              <a:t/>
-            </a:r>
             <a:endParaRPr lang="en-US" dirty="0"/>
           </a:p>
         </p:txBody>
@@ -2091,10 +1747,6 @@
           <a:bodyPr/>
           <a:lstStyle/>
           <a:p>
-            <a:r>
-              <a:rPr lang="en-US" dirty="0"/>
-              <a:t/>
-            </a:r>
             <a:endParaRPr lang="en-US" dirty="0"/>
           </a:p>
         </p:txBody>
@@ -2179,10 +1831,6 @@
           <a:bodyPr/>
           <a:lstStyle/>
           <a:p>
-            <a:r>
-              <a:rPr lang="en-US" dirty="0"/>
-              <a:t/>
-            </a:r>
             <a:endParaRPr lang="en-US" dirty="0"/>
           </a:p>
         </p:txBody>
@@ -2256,6 +1904,11 @@
 <file path=ppt/slideMasters/slideMaster1.xml><?xml version="1.0" encoding="utf-8"?>
 <p:sldMaster xmlns:a="http://schemas.openxmlformats.org/drawingml/2006/main" xmlns:r="http://schemas.openxmlformats.org/officeDocument/2006/relationships" xmlns:p="http://schemas.openxmlformats.org/presentationml/2006/main">
   <p:cSld>
+    <p:bg>
+      <p:bgRef idx="1001">
+        <a:schemeClr val="bg1"/>
+      </p:bgRef>
+    </p:bg>
     <p:spTree>
       <p:nvGrpSpPr>
         <p:cNvPr id="1" name=""/>
@@ -2538,6 +2191,7 @@
         <a:solidFill>
           <a:srgbClr val="1B2A4A"/>
         </a:solidFill>
+        <a:effectLst/>
       </p:bgPr>
     </p:bg>
     <p:spTree>
@@ -2608,14 +2262,14 @@
       </p:sp>
       <p:pic>
         <p:nvPicPr>
-          <p:cNvPr id="4" name="Image 0" descr="preencoded.png">    </p:cNvPr>
+          <p:cNvPr id="4" name="Image 0" descr="preencoded.png"/>
           <p:cNvPicPr>
             <a:picLocks noChangeAspect="1"/>
           </p:cNvPicPr>
           <p:nvPr/>
         </p:nvPicPr>
         <p:blipFill>
-          <a:blip r:embed="rId1"/>
+          <a:blip r:embed="rId3"/>
           <a:stretch>
             <a:fillRect/>
           </a:stretch>
@@ -2651,7 +2305,7 @@
           <a:bodyPr wrap="square" rtlCol="0" anchor="ctr"/>
           <a:lstStyle/>
           <a:p>
-            <a:pPr indent="0" marL="0">
+            <a:pPr marL="0" indent="0">
               <a:buNone/>
             </a:pPr>
             <a:r>
@@ -2690,7 +2344,7 @@
           <a:bodyPr wrap="square" rtlCol="0" anchor="ctr"/>
           <a:lstStyle/>
           <a:p>
-            <a:pPr indent="0" marL="0">
+            <a:pPr marL="0" indent="0">
               <a:buNone/>
             </a:pPr>
             <a:r>
@@ -2729,7 +2383,7 @@
           <a:bodyPr wrap="square" rtlCol="0" anchor="ctr"/>
           <a:lstStyle/>
           <a:p>
-            <a:pPr indent="0" marL="0">
+            <a:pPr marL="0" indent="0">
               <a:buNone/>
             </a:pPr>
             <a:r>
@@ -2795,7 +2449,7 @@
           <a:bodyPr wrap="square" rtlCol="0" anchor="ctr"/>
           <a:lstStyle/>
           <a:p>
-            <a:pPr algn="ctr" indent="0" marL="0">
+            <a:pPr marL="0" indent="0" algn="ctr">
               <a:buNone/>
             </a:pPr>
             <a:r>
@@ -2861,7 +2515,7 @@
           <a:bodyPr wrap="square" rtlCol="0" anchor="ctr"/>
           <a:lstStyle/>
           <a:p>
-            <a:pPr algn="ctr" indent="0" marL="0">
+            <a:pPr marL="0" indent="0" algn="ctr">
               <a:buNone/>
             </a:pPr>
             <a:r>
@@ -2927,7 +2581,7 @@
           <a:bodyPr wrap="square" rtlCol="0" anchor="ctr"/>
           <a:lstStyle/>
           <a:p>
-            <a:pPr algn="ctr" indent="0" marL="0">
+            <a:pPr marL="0" indent="0" algn="ctr">
               <a:buNone/>
             </a:pPr>
             <a:r>
@@ -2966,7 +2620,7 @@
           <a:bodyPr wrap="square" rtlCol="0" anchor="ctr"/>
           <a:lstStyle/>
           <a:p>
-            <a:pPr indent="0" marL="0">
+            <a:pPr marL="0" indent="0">
               <a:buNone/>
             </a:pPr>
             <a:r>
@@ -3005,7 +2659,7 @@
           <a:bodyPr wrap="square" rtlCol="0" anchor="ctr"/>
           <a:lstStyle/>
           <a:p>
-            <a:pPr indent="0" marL="0">
+            <a:pPr marL="0" indent="0">
               <a:buNone/>
             </a:pPr>
             <a:r>
@@ -3039,6 +2693,7 @@
         <a:solidFill>
           <a:srgbClr val="1B2A4A"/>
         </a:solidFill>
+        <a:effectLst/>
       </p:bgPr>
     </p:bg>
     <p:spTree>
@@ -3101,7 +2756,7 @@
           <a:bodyPr wrap="square" rtlCol="0" anchor="ctr"/>
           <a:lstStyle/>
           <a:p>
-            <a:pPr algn="ctr" indent="0" marL="0">
+            <a:pPr marL="0" indent="0" algn="ctr">
               <a:buNone/>
             </a:pPr>
             <a:r>
@@ -3165,7 +2820,7 @@
           <a:bodyPr wrap="square" rtlCol="0" anchor="ctr"/>
           <a:lstStyle/>
           <a:p>
-            <a:pPr algn="ctr" indent="0" marL="0">
+            <a:pPr marL="0" indent="0" algn="ctr">
               <a:buNone/>
             </a:pPr>
             <a:r>
@@ -3204,7 +2859,7 @@
           <a:bodyPr wrap="square" rtlCol="0" anchor="ctr"/>
           <a:lstStyle/>
           <a:p>
-            <a:pPr algn="ctr" indent="0" marL="0">
+            <a:pPr marL="0" indent="0" algn="ctr">
               <a:buNone/>
             </a:pPr>
             <a:r>
@@ -3224,14 +2879,14 @@
       </p:sp>
       <p:pic>
         <p:nvPicPr>
-          <p:cNvPr id="7" name="Image 0" descr="preencoded.png">    </p:cNvPr>
+          <p:cNvPr id="7" name="Image 0" descr="preencoded.png"/>
           <p:cNvPicPr>
             <a:picLocks noChangeAspect="1"/>
           </p:cNvPicPr>
           <p:nvPr/>
         </p:nvPicPr>
         <p:blipFill>
-          <a:blip r:embed="rId1"/>
+          <a:blip r:embed="rId3"/>
           <a:stretch>
             <a:fillRect/>
           </a:stretch>
@@ -3267,7 +2922,7 @@
           <a:bodyPr wrap="square" rtlCol="0" anchor="ctr"/>
           <a:lstStyle/>
           <a:p>
-            <a:pPr algn="ctr" indent="0" marL="0">
+            <a:pPr marL="0" indent="0" algn="ctr">
               <a:buNone/>
             </a:pPr>
             <a:r>
@@ -3301,6 +2956,7 @@
         <a:solidFill>
           <a:srgbClr val="F1F5F9"/>
         </a:solidFill>
+        <a:effectLst/>
       </p:bgPr>
     </p:bg>
     <p:spTree>
@@ -3338,7 +2994,7 @@
           <a:bodyPr wrap="square" rtlCol="0" anchor="ctr"/>
           <a:lstStyle/>
           <a:p>
-            <a:pPr indent="0" marL="0">
+            <a:pPr marL="0" indent="0">
               <a:buNone/>
             </a:pPr>
             <a:r>
@@ -3380,7 +3036,7 @@
             <a:prstDash val="solid"/>
           </a:ln>
           <a:effectLst>
-            <a:outerShdw sx="100000" sy="100000" kx="0" ky="0" algn="bl" rotWithShape="0" blurRad="88900" dist="25400" dir="8100000">
+            <a:outerShdw blurRad="88900" dist="25400" dir="8100000" algn="bl" rotWithShape="0">
               <a:srgbClr val="000000">
                 <a:alpha val="14000"/>
               </a:srgbClr>
@@ -3434,7 +3090,7 @@
           <a:bodyPr wrap="square" rtlCol="0" anchor="ctr"/>
           <a:lstStyle/>
           <a:p>
-            <a:pPr algn="ctr" indent="0" marL="0">
+            <a:pPr marL="0" indent="0" algn="ctr">
               <a:buNone/>
             </a:pPr>
             <a:r>
@@ -3473,7 +3129,7 @@
           <a:bodyPr wrap="square" rtlCol="0" anchor="ctr"/>
           <a:lstStyle/>
           <a:p>
-            <a:pPr indent="0" marL="0">
+            <a:pPr marL="0" indent="0">
               <a:buNone/>
             </a:pPr>
             <a:r>
@@ -3512,7 +3168,7 @@
           <a:bodyPr wrap="square" rtlCol="0" anchor="ctr"/>
           <a:lstStyle/>
           <a:p>
-            <a:pPr indent="0" marL="0">
+            <a:pPr marL="0" indent="0">
               <a:buNone/>
             </a:pPr>
             <a:r>
@@ -3554,7 +3210,7 @@
             <a:prstDash val="solid"/>
           </a:ln>
           <a:effectLst>
-            <a:outerShdw sx="100000" sy="100000" kx="0" ky="0" algn="bl" rotWithShape="0" blurRad="88900" dist="25400" dir="8100000">
+            <a:outerShdw blurRad="88900" dist="25400" dir="8100000" algn="bl" rotWithShape="0">
               <a:srgbClr val="000000">
                 <a:alpha val="14000"/>
               </a:srgbClr>
@@ -3608,7 +3264,7 @@
           <a:bodyPr wrap="square" rtlCol="0" anchor="ctr"/>
           <a:lstStyle/>
           <a:p>
-            <a:pPr algn="ctr" indent="0" marL="0">
+            <a:pPr marL="0" indent="0" algn="ctr">
               <a:buNone/>
             </a:pPr>
             <a:r>
@@ -3647,7 +3303,7 @@
           <a:bodyPr wrap="square" rtlCol="0" anchor="ctr"/>
           <a:lstStyle/>
           <a:p>
-            <a:pPr indent="0" marL="0">
+            <a:pPr marL="0" indent="0">
               <a:buNone/>
             </a:pPr>
             <a:r>
@@ -3686,7 +3342,7 @@
           <a:bodyPr wrap="square" rtlCol="0" anchor="ctr"/>
           <a:lstStyle/>
           <a:p>
-            <a:pPr indent="0" marL="0">
+            <a:pPr marL="0" indent="0">
               <a:buNone/>
             </a:pPr>
             <a:r>
@@ -3728,7 +3384,7 @@
             <a:prstDash val="solid"/>
           </a:ln>
           <a:effectLst>
-            <a:outerShdw sx="100000" sy="100000" kx="0" ky="0" algn="bl" rotWithShape="0" blurRad="88900" dist="25400" dir="8100000">
+            <a:outerShdw blurRad="88900" dist="25400" dir="8100000" algn="bl" rotWithShape="0">
               <a:srgbClr val="000000">
                 <a:alpha val="14000"/>
               </a:srgbClr>
@@ -3782,7 +3438,7 @@
           <a:bodyPr wrap="square" rtlCol="0" anchor="ctr"/>
           <a:lstStyle/>
           <a:p>
-            <a:pPr algn="ctr" indent="0" marL="0">
+            <a:pPr marL="0" indent="0" algn="ctr">
               <a:buNone/>
             </a:pPr>
             <a:r>
@@ -3821,7 +3477,7 @@
           <a:bodyPr wrap="square" rtlCol="0" anchor="ctr"/>
           <a:lstStyle/>
           <a:p>
-            <a:pPr indent="0" marL="0">
+            <a:pPr marL="0" indent="0">
               <a:buNone/>
             </a:pPr>
             <a:r>
@@ -3860,7 +3516,7 @@
           <a:bodyPr wrap="square" rtlCol="0" anchor="ctr"/>
           <a:lstStyle/>
           <a:p>
-            <a:pPr indent="0" marL="0">
+            <a:pPr marL="0" indent="0">
               <a:buNone/>
             </a:pPr>
             <a:r>
@@ -3902,7 +3558,7 @@
             <a:prstDash val="solid"/>
           </a:ln>
           <a:effectLst>
-            <a:outerShdw sx="100000" sy="100000" kx="0" ky="0" algn="bl" rotWithShape="0" blurRad="88900" dist="25400" dir="8100000">
+            <a:outerShdw blurRad="88900" dist="25400" dir="8100000" algn="bl" rotWithShape="0">
               <a:srgbClr val="000000">
                 <a:alpha val="14000"/>
               </a:srgbClr>
@@ -3956,7 +3612,7 @@
           <a:bodyPr wrap="square" rtlCol="0" anchor="ctr"/>
           <a:lstStyle/>
           <a:p>
-            <a:pPr algn="ctr" indent="0" marL="0">
+            <a:pPr marL="0" indent="0" algn="ctr">
               <a:buNone/>
             </a:pPr>
             <a:r>
@@ -3995,7 +3651,7 @@
           <a:bodyPr wrap="square" rtlCol="0" anchor="ctr"/>
           <a:lstStyle/>
           <a:p>
-            <a:pPr indent="0" marL="0">
+            <a:pPr marL="0" indent="0">
               <a:buNone/>
             </a:pPr>
             <a:r>
@@ -4034,7 +3690,7 @@
           <a:bodyPr wrap="square" rtlCol="0" anchor="ctr"/>
           <a:lstStyle/>
           <a:p>
-            <a:pPr indent="0" marL="0">
+            <a:pPr marL="0" indent="0">
               <a:buNone/>
             </a:pPr>
             <a:r>
@@ -4076,7 +3732,7 @@
             <a:prstDash val="solid"/>
           </a:ln>
           <a:effectLst>
-            <a:outerShdw sx="100000" sy="100000" kx="0" ky="0" algn="bl" rotWithShape="0" blurRad="88900" dist="25400" dir="8100000">
+            <a:outerShdw blurRad="88900" dist="25400" dir="8100000" algn="bl" rotWithShape="0">
               <a:srgbClr val="000000">
                 <a:alpha val="14000"/>
               </a:srgbClr>
@@ -4130,7 +3786,7 @@
           <a:bodyPr wrap="square" rtlCol="0" anchor="ctr"/>
           <a:lstStyle/>
           <a:p>
-            <a:pPr algn="ctr" indent="0" marL="0">
+            <a:pPr marL="0" indent="0" algn="ctr">
               <a:buNone/>
             </a:pPr>
             <a:r>
@@ -4169,7 +3825,7 @@
           <a:bodyPr wrap="square" rtlCol="0" anchor="ctr"/>
           <a:lstStyle/>
           <a:p>
-            <a:pPr indent="0" marL="0">
+            <a:pPr marL="0" indent="0">
               <a:buNone/>
             </a:pPr>
             <a:r>
@@ -4208,7 +3864,7 @@
           <a:bodyPr wrap="square" rtlCol="0" anchor="ctr"/>
           <a:lstStyle/>
           <a:p>
-            <a:pPr indent="0" marL="0">
+            <a:pPr marL="0" indent="0">
               <a:buNone/>
             </a:pPr>
             <a:r>
@@ -4250,7 +3906,7 @@
             <a:prstDash val="solid"/>
           </a:ln>
           <a:effectLst>
-            <a:outerShdw sx="100000" sy="100000" kx="0" ky="0" algn="bl" rotWithShape="0" blurRad="88900" dist="25400" dir="8100000">
+            <a:outerShdw blurRad="88900" dist="25400" dir="8100000" algn="bl" rotWithShape="0">
               <a:srgbClr val="000000">
                 <a:alpha val="14000"/>
               </a:srgbClr>
@@ -4304,7 +3960,7 @@
           <a:bodyPr wrap="square" rtlCol="0" anchor="ctr"/>
           <a:lstStyle/>
           <a:p>
-            <a:pPr algn="ctr" indent="0" marL="0">
+            <a:pPr marL="0" indent="0" algn="ctr">
               <a:buNone/>
             </a:pPr>
             <a:r>
@@ -4343,7 +3999,7 @@
           <a:bodyPr wrap="square" rtlCol="0" anchor="ctr"/>
           <a:lstStyle/>
           <a:p>
-            <a:pPr indent="0" marL="0">
+            <a:pPr marL="0" indent="0">
               <a:buNone/>
             </a:pPr>
             <a:r>
@@ -4382,7 +4038,7 @@
           <a:bodyPr wrap="square" rtlCol="0" anchor="ctr"/>
           <a:lstStyle/>
           <a:p>
-            <a:pPr indent="0" marL="0">
+            <a:pPr marL="0" indent="0">
               <a:buNone/>
             </a:pPr>
             <a:r>
@@ -4416,6 +4072,7 @@
         <a:solidFill>
           <a:srgbClr val="F1F5F9"/>
         </a:solidFill>
+        <a:effectLst/>
       </p:bgPr>
     </p:bg>
     <p:spTree>
@@ -4453,7 +4110,7 @@
           <a:bodyPr wrap="square" rtlCol="0" anchor="ctr"/>
           <a:lstStyle/>
           <a:p>
-            <a:pPr indent="0" marL="0">
+            <a:pPr marL="0" indent="0">
               <a:buNone/>
             </a:pPr>
             <a:r>
@@ -4495,7 +4152,7 @@
             <a:prstDash val="solid"/>
           </a:ln>
           <a:effectLst>
-            <a:outerShdw sx="100000" sy="100000" kx="0" ky="0" algn="bl" rotWithShape="0" blurRad="88900" dist="25400" dir="8100000">
+            <a:outerShdw blurRad="88900" dist="25400" dir="8100000" algn="bl" rotWithShape="0">
               <a:srgbClr val="000000">
                 <a:alpha val="14000"/>
               </a:srgbClr>
@@ -4505,14 +4162,14 @@
       </p:sp>
       <p:pic>
         <p:nvPicPr>
-          <p:cNvPr id="4" name="Image 0" descr="preencoded.png">    </p:cNvPr>
+          <p:cNvPr id="4" name="Image 0" descr="preencoded.png"/>
           <p:cNvPicPr>
             <a:picLocks noChangeAspect="1"/>
           </p:cNvPicPr>
           <p:nvPr/>
         </p:nvPicPr>
         <p:blipFill>
-          <a:blip r:embed="rId1"/>
+          <a:blip r:embed="rId3"/>
           <a:stretch>
             <a:fillRect/>
           </a:stretch>
@@ -4548,7 +4205,7 @@
           <a:bodyPr wrap="square" rtlCol="0" anchor="ctr"/>
           <a:lstStyle/>
           <a:p>
-            <a:pPr indent="0" marL="0">
+            <a:pPr marL="0" indent="0">
               <a:buNone/>
             </a:pPr>
             <a:r>
@@ -4587,7 +4244,7 @@
           <a:bodyPr wrap="square" rtlCol="0" anchor="ctr"/>
           <a:lstStyle/>
           <a:p>
-            <a:pPr indent="0" marL="0">
+            <a:pPr marL="0" indent="0">
               <a:buNone/>
             </a:pPr>
             <a:r>
@@ -4607,14 +4264,14 @@
       </p:sp>
       <p:pic>
         <p:nvPicPr>
-          <p:cNvPr id="7" name="Image 1" descr="preencoded.png">    </p:cNvPr>
+          <p:cNvPr id="7" name="Image 1" descr="preencoded.png"/>
           <p:cNvPicPr>
             <a:picLocks noChangeAspect="1"/>
           </p:cNvPicPr>
           <p:nvPr/>
         </p:nvPicPr>
         <p:blipFill>
-          <a:blip r:embed="rId2"/>
+          <a:blip r:embed="rId4"/>
           <a:stretch>
             <a:fillRect/>
           </a:stretch>
@@ -4653,7 +4310,7 @@
             <a:prstDash val="solid"/>
           </a:ln>
           <a:effectLst>
-            <a:outerShdw sx="100000" sy="100000" kx="0" ky="0" algn="bl" rotWithShape="0" blurRad="88900" dist="25400" dir="8100000">
+            <a:outerShdw blurRad="88900" dist="25400" dir="8100000" algn="bl" rotWithShape="0">
               <a:srgbClr val="000000">
                 <a:alpha val="14000"/>
               </a:srgbClr>
@@ -4663,14 +4320,14 @@
       </p:sp>
       <p:pic>
         <p:nvPicPr>
-          <p:cNvPr id="9" name="Image 2" descr="preencoded.png">    </p:cNvPr>
+          <p:cNvPr id="9" name="Image 2" descr="preencoded.png"/>
           <p:cNvPicPr>
             <a:picLocks noChangeAspect="1"/>
           </p:cNvPicPr>
           <p:nvPr/>
         </p:nvPicPr>
         <p:blipFill>
-          <a:blip r:embed="rId3"/>
+          <a:blip r:embed="rId5"/>
           <a:stretch>
             <a:fillRect/>
           </a:stretch>
@@ -4706,7 +4363,7 @@
           <a:bodyPr wrap="square" rtlCol="0" anchor="ctr"/>
           <a:lstStyle/>
           <a:p>
-            <a:pPr indent="0" marL="0">
+            <a:pPr marL="0" indent="0">
               <a:buNone/>
             </a:pPr>
             <a:r>
@@ -4745,7 +4402,7 @@
           <a:bodyPr wrap="square" rtlCol="0" anchor="ctr"/>
           <a:lstStyle/>
           <a:p>
-            <a:pPr indent="0" marL="0">
+            <a:pPr marL="0" indent="0">
               <a:buNone/>
             </a:pPr>
             <a:r>
@@ -4765,7 +4422,7 @@
       </p:sp>
       <p:pic>
         <p:nvPicPr>
-          <p:cNvPr id="12" name="Image 3" descr="preencoded.png">    </p:cNvPr>
+          <p:cNvPr id="12" name="Image 3" descr="preencoded.png"/>
           <p:cNvPicPr>
             <a:picLocks noChangeAspect="1"/>
           </p:cNvPicPr>
@@ -4811,7 +4468,7 @@
             <a:prstDash val="solid"/>
           </a:ln>
           <a:effectLst>
-            <a:outerShdw sx="100000" sy="100000" kx="0" ky="0" algn="bl" rotWithShape="0" blurRad="88900" dist="25400" dir="8100000">
+            <a:outerShdw blurRad="88900" dist="25400" dir="8100000" algn="bl" rotWithShape="0">
               <a:srgbClr val="000000">
                 <a:alpha val="14000"/>
               </a:srgbClr>
@@ -4821,14 +4478,14 @@
       </p:sp>
       <p:pic>
         <p:nvPicPr>
-          <p:cNvPr id="14" name="Image 4" descr="preencoded.png">    </p:cNvPr>
+          <p:cNvPr id="14" name="Image 4" descr="preencoded.png"/>
           <p:cNvPicPr>
             <a:picLocks noChangeAspect="1"/>
           </p:cNvPicPr>
           <p:nvPr/>
         </p:nvPicPr>
         <p:blipFill>
-          <a:blip r:embed="rId5"/>
+          <a:blip r:embed="rId6"/>
           <a:stretch>
             <a:fillRect/>
           </a:stretch>
@@ -4864,7 +4521,7 @@
           <a:bodyPr wrap="square" rtlCol="0" anchor="ctr"/>
           <a:lstStyle/>
           <a:p>
-            <a:pPr indent="0" marL="0">
+            <a:pPr marL="0" indent="0">
               <a:buNone/>
             </a:pPr>
             <a:r>
@@ -4903,7 +4560,7 @@
           <a:bodyPr wrap="square" rtlCol="0" anchor="ctr"/>
           <a:lstStyle/>
           <a:p>
-            <a:pPr indent="0" marL="0">
+            <a:pPr marL="0" indent="0">
               <a:buNone/>
             </a:pPr>
             <a:r>
@@ -4923,14 +4580,14 @@
       </p:sp>
       <p:pic>
         <p:nvPicPr>
-          <p:cNvPr id="17" name="Image 5" descr="preencoded.png">    </p:cNvPr>
+          <p:cNvPr id="17" name="Image 5" descr="preencoded.png"/>
           <p:cNvPicPr>
             <a:picLocks noChangeAspect="1"/>
           </p:cNvPicPr>
           <p:nvPr/>
         </p:nvPicPr>
         <p:blipFill>
-          <a:blip r:embed="rId6"/>
+          <a:blip r:embed="rId4"/>
           <a:stretch>
             <a:fillRect/>
           </a:stretch>
@@ -4969,7 +4626,7 @@
             <a:prstDash val="solid"/>
           </a:ln>
           <a:effectLst>
-            <a:outerShdw sx="100000" sy="100000" kx="0" ky="0" algn="bl" rotWithShape="0" blurRad="88900" dist="25400" dir="8100000">
+            <a:outerShdw blurRad="88900" dist="25400" dir="8100000" algn="bl" rotWithShape="0">
               <a:srgbClr val="000000">
                 <a:alpha val="14000"/>
               </a:srgbClr>
@@ -4979,7 +4636,7 @@
       </p:sp>
       <p:pic>
         <p:nvPicPr>
-          <p:cNvPr id="19" name="Image 6" descr="preencoded.png">    </p:cNvPr>
+          <p:cNvPr id="19" name="Image 6" descr="preencoded.png"/>
           <p:cNvPicPr>
             <a:picLocks noChangeAspect="1"/>
           </p:cNvPicPr>
@@ -5022,7 +4679,7 @@
           <a:bodyPr wrap="square" rtlCol="0" anchor="ctr"/>
           <a:lstStyle/>
           <a:p>
-            <a:pPr indent="0" marL="0">
+            <a:pPr marL="0" indent="0">
               <a:buNone/>
             </a:pPr>
             <a:r>
@@ -5061,7 +4718,7 @@
           <a:bodyPr wrap="square" rtlCol="0" anchor="ctr"/>
           <a:lstStyle/>
           <a:p>
-            <a:pPr indent="0" marL="0">
+            <a:pPr marL="0" indent="0">
               <a:buNone/>
             </a:pPr>
             <a:r>
@@ -5087,8 +4744,8 @@
         </p:nvSpPr>
         <p:spPr>
           <a:xfrm>
-            <a:off x="365760" y="2011680"/>
-            <a:ext cx="3931920" cy="2834640"/>
+            <a:off x="320040" y="2395728"/>
+            <a:ext cx="8458200" cy="2450592"/>
           </a:xfrm>
           <a:prstGeom prst="rect">
             <a:avLst/>
@@ -5103,7 +4760,7 @@
             <a:prstDash val="solid"/>
           </a:ln>
           <a:effectLst>
-            <a:outerShdw sx="100000" sy="100000" kx="0" ky="0" algn="bl" rotWithShape="0" blurRad="88900" dist="25400" dir="8100000">
+            <a:outerShdw blurRad="88900" dist="25400" dir="8100000" algn="bl" rotWithShape="0">
               <a:srgbClr val="000000">
                 <a:alpha val="14000"/>
               </a:srgbClr>
@@ -5119,8 +4776,8 @@
         </p:nvSpPr>
         <p:spPr>
           <a:xfrm>
-            <a:off x="365760" y="2011680"/>
-            <a:ext cx="3931920" cy="384048"/>
+            <a:off x="320040" y="2398372"/>
+            <a:ext cx="8458200" cy="384048"/>
           </a:xfrm>
           <a:prstGeom prst="rect">
             <a:avLst/>
@@ -5138,7 +4795,7 @@
       </p:sp>
       <p:pic>
         <p:nvPicPr>
-          <p:cNvPr id="24" name="Image 7" descr="preencoded.png">    </p:cNvPr>
+          <p:cNvPr id="24" name="Image 7" descr="preencoded.png"/>
           <p:cNvPicPr>
             <a:picLocks noChangeAspect="1"/>
           </p:cNvPicPr>
@@ -5152,7 +4809,7 @@
         </p:blipFill>
         <p:spPr>
           <a:xfrm>
-            <a:off x="475488" y="2066544"/>
+            <a:off x="393192" y="2444092"/>
             <a:ext cx="274320" cy="274320"/>
           </a:xfrm>
           <a:prstGeom prst="rect">
@@ -5168,7 +4825,7 @@
         </p:nvSpPr>
         <p:spPr>
           <a:xfrm>
-            <a:off x="841248" y="2066544"/>
+            <a:off x="740664" y="2453236"/>
             <a:ext cx="3291840" cy="274320"/>
           </a:xfrm>
           <a:prstGeom prst="rect">
@@ -5181,7 +4838,7 @@
           <a:bodyPr wrap="square" rtlCol="0" anchor="ctr"/>
           <a:lstStyle/>
           <a:p>
-            <a:pPr indent="0" marL="0">
+            <a:pPr marL="0" indent="0">
               <a:buNone/>
             </a:pPr>
             <a:r>
@@ -5207,8 +4864,8 @@
         </p:nvSpPr>
         <p:spPr>
           <a:xfrm>
-            <a:off x="548640" y="2505456"/>
-            <a:ext cx="3611880" cy="2194560"/>
+            <a:off x="481987" y="3049372"/>
+            <a:ext cx="7960570" cy="1529995"/>
           </a:xfrm>
           <a:prstGeom prst="rect">
             <a:avLst/>
@@ -5302,1278 +4959,6 @@
               <a:t>경로 자동화로 크롤링→학습 원스텝 실행</a:t>
             </a:r>
             <a:endParaRPr lang="en-US" sz="1100" dirty="0"/>
-          </a:p>
-        </p:txBody>
-      </p:sp>
-      <p:sp>
-        <p:nvSpPr>
-          <p:cNvPr id="27" name="Shape 17"/>
-          <p:cNvSpPr/>
-          <p:nvPr/>
-        </p:nvSpPr>
-        <p:spPr>
-          <a:xfrm>
-            <a:off x="4663440" y="2011680"/>
-            <a:ext cx="4114800" cy="2834640"/>
-          </a:xfrm>
-          <a:prstGeom prst="rect">
-            <a:avLst/>
-          </a:prstGeom>
-          <a:solidFill>
-            <a:srgbClr val="FFFFFF"/>
-          </a:solidFill>
-          <a:ln w="6350">
-            <a:solidFill>
-              <a:srgbClr val="E2E8F0"/>
-            </a:solidFill>
-            <a:prstDash val="solid"/>
-          </a:ln>
-          <a:effectLst>
-            <a:outerShdw sx="100000" sy="100000" kx="0" ky="0" algn="bl" rotWithShape="0" blurRad="88900" dist="25400" dir="8100000">
-              <a:srgbClr val="000000">
-                <a:alpha val="14000"/>
-              </a:srgbClr>
-            </a:outerShdw>
-          </a:effectLst>
-        </p:spPr>
-      </p:sp>
-      <p:sp>
-        <p:nvSpPr>
-          <p:cNvPr id="28" name="Shape 18"/>
-          <p:cNvSpPr/>
-          <p:nvPr/>
-        </p:nvSpPr>
-        <p:spPr>
-          <a:xfrm>
-            <a:off x="4663440" y="2011680"/>
-            <a:ext cx="4114800" cy="384048"/>
-          </a:xfrm>
-          <a:prstGeom prst="rect">
-            <a:avLst/>
-          </a:prstGeom>
-          <a:solidFill>
-            <a:srgbClr val="FB923C"/>
-          </a:solidFill>
-          <a:ln w="12700">
-            <a:solidFill>
-              <a:srgbClr val="FB923C"/>
-            </a:solidFill>
-            <a:prstDash val="solid"/>
-          </a:ln>
-        </p:spPr>
-      </p:sp>
-      <p:pic>
-        <p:nvPicPr>
-          <p:cNvPr id="29" name="Image 8" descr="preencoded.png">    </p:cNvPr>
-          <p:cNvPicPr>
-            <a:picLocks noChangeAspect="1"/>
-          </p:cNvPicPr>
-          <p:nvPr/>
-        </p:nvPicPr>
-        <p:blipFill>
-          <a:blip r:embed="rId9"/>
-          <a:stretch>
-            <a:fillRect/>
-          </a:stretch>
-        </p:blipFill>
-        <p:spPr>
-          <a:xfrm>
-            <a:off x="4773168" y="2066544"/>
-            <a:ext cx="274320" cy="274320"/>
-          </a:xfrm>
-          <a:prstGeom prst="rect">
-            <a:avLst/>
-          </a:prstGeom>
-        </p:spPr>
-      </p:pic>
-      <p:sp>
-        <p:nvSpPr>
-          <p:cNvPr id="30" name="Text 19"/>
-          <p:cNvSpPr/>
-          <p:nvPr/>
-        </p:nvSpPr>
-        <p:spPr>
-          <a:xfrm>
-            <a:off x="5138928" y="2066544"/>
-            <a:ext cx="3474720" cy="274320"/>
-          </a:xfrm>
-          <a:prstGeom prst="rect">
-            <a:avLst/>
-          </a:prstGeom>
-          <a:noFill/>
-          <a:ln/>
-        </p:spPr>
-        <p:txBody>
-          <a:bodyPr wrap="square" rtlCol="0" anchor="ctr"/>
-          <a:lstStyle/>
-          <a:p>
-            <a:pPr indent="0" marL="0">
-              <a:buNone/>
-            </a:pPr>
-            <a:r>
-              <a:rPr lang="en-US" sz="1300" b="1" dirty="0">
-                <a:solidFill>
-                  <a:srgbClr val="FFFFFF"/>
-                </a:solidFill>
-                <a:latin typeface="Calibri" pitchFamily="34" charset="0"/>
-                <a:ea typeface="Calibri" pitchFamily="34" charset="-122"/>
-                <a:cs typeface="Calibri" pitchFamily="34" charset="-120"/>
-              </a:rPr>
-              <a:t>Fashion MNIST와 차이점</a:t>
-            </a:r>
-            <a:endParaRPr lang="en-US" sz="1300" dirty="0"/>
-          </a:p>
-        </p:txBody>
-      </p:sp>
-      <p:sp>
-        <p:nvSpPr>
-          <p:cNvPr id="31" name="Shape 20"/>
-          <p:cNvSpPr/>
-          <p:nvPr/>
-        </p:nvSpPr>
-        <p:spPr>
-          <a:xfrm>
-            <a:off x="4736592" y="2487168"/>
-            <a:ext cx="1115568" cy="347472"/>
-          </a:xfrm>
-          <a:prstGeom prst="rect">
-            <a:avLst/>
-          </a:prstGeom>
-          <a:solidFill>
-            <a:srgbClr val="E2E8F0"/>
-          </a:solidFill>
-          <a:ln w="3810">
-            <a:solidFill>
-              <a:srgbClr val="CBD5E1"/>
-            </a:solidFill>
-            <a:prstDash val="solid"/>
-          </a:ln>
-        </p:spPr>
-      </p:sp>
-      <p:sp>
-        <p:nvSpPr>
-          <p:cNvPr id="32" name="Text 21"/>
-          <p:cNvSpPr/>
-          <p:nvPr/>
-        </p:nvSpPr>
-        <p:spPr>
-          <a:xfrm>
-            <a:off x="4764024" y="2514600"/>
-            <a:ext cx="1060704" cy="292608"/>
-          </a:xfrm>
-          <a:prstGeom prst="rect">
-            <a:avLst/>
-          </a:prstGeom>
-          <a:noFill/>
-          <a:ln/>
-        </p:spPr>
-        <p:txBody>
-          <a:bodyPr wrap="square" rtlCol="0" anchor="ctr"/>
-          <a:lstStyle/>
-          <a:p>
-            <a:pPr algn="ctr" indent="0" marL="0">
-              <a:buNone/>
-            </a:pPr>
-            <a:r>
-              <a:rPr lang="en-US" sz="900" b="1" dirty="0">
-                <a:solidFill>
-                  <a:srgbClr val="1B2A4A"/>
-                </a:solidFill>
-                <a:latin typeface="Calibri" pitchFamily="34" charset="0"/>
-                <a:ea typeface="Calibri" pitchFamily="34" charset="-122"/>
-                <a:cs typeface="Calibri" pitchFamily="34" charset="-120"/>
-              </a:rPr>
-              <a:t>항목</a:t>
-            </a:r>
-            <a:endParaRPr lang="en-US" sz="900" dirty="0"/>
-          </a:p>
-        </p:txBody>
-      </p:sp>
-      <p:sp>
-        <p:nvSpPr>
-          <p:cNvPr id="33" name="Shape 22"/>
-          <p:cNvSpPr/>
-          <p:nvPr/>
-        </p:nvSpPr>
-        <p:spPr>
-          <a:xfrm>
-            <a:off x="5925312" y="2487168"/>
-            <a:ext cx="1243584" cy="347472"/>
-          </a:xfrm>
-          <a:prstGeom prst="rect">
-            <a:avLst/>
-          </a:prstGeom>
-          <a:solidFill>
-            <a:srgbClr val="E2E8F0"/>
-          </a:solidFill>
-          <a:ln w="3810">
-            <a:solidFill>
-              <a:srgbClr val="CBD5E1"/>
-            </a:solidFill>
-            <a:prstDash val="solid"/>
-          </a:ln>
-        </p:spPr>
-      </p:sp>
-      <p:sp>
-        <p:nvSpPr>
-          <p:cNvPr id="34" name="Text 23"/>
-          <p:cNvSpPr/>
-          <p:nvPr/>
-        </p:nvSpPr>
-        <p:spPr>
-          <a:xfrm>
-            <a:off x="5952744" y="2514600"/>
-            <a:ext cx="1188720" cy="292608"/>
-          </a:xfrm>
-          <a:prstGeom prst="rect">
-            <a:avLst/>
-          </a:prstGeom>
-          <a:noFill/>
-          <a:ln/>
-        </p:spPr>
-        <p:txBody>
-          <a:bodyPr wrap="square" rtlCol="0" anchor="ctr"/>
-          <a:lstStyle/>
-          <a:p>
-            <a:pPr algn="ctr" indent="0" marL="0">
-              <a:buNone/>
-            </a:pPr>
-            <a:r>
-              <a:rPr lang="en-US" sz="900" b="1" dirty="0">
-                <a:solidFill>
-                  <a:srgbClr val="1B2A4A"/>
-                </a:solidFill>
-                <a:latin typeface="Calibri" pitchFamily="34" charset="0"/>
-                <a:ea typeface="Calibri" pitchFamily="34" charset="-122"/>
-                <a:cs typeface="Calibri" pitchFamily="34" charset="-120"/>
-              </a:rPr>
-              <a:t>Fashion MNIST</a:t>
-            </a:r>
-            <a:endParaRPr lang="en-US" sz="900" dirty="0"/>
-          </a:p>
-        </p:txBody>
-      </p:sp>
-      <p:sp>
-        <p:nvSpPr>
-          <p:cNvPr id="35" name="Shape 24"/>
-          <p:cNvSpPr/>
-          <p:nvPr/>
-        </p:nvSpPr>
-        <p:spPr>
-          <a:xfrm>
-            <a:off x="7205472" y="2487168"/>
-            <a:ext cx="1517904" cy="347472"/>
-          </a:xfrm>
-          <a:prstGeom prst="rect">
-            <a:avLst/>
-          </a:prstGeom>
-          <a:solidFill>
-            <a:srgbClr val="E2E8F0"/>
-          </a:solidFill>
-          <a:ln w="3810">
-            <a:solidFill>
-              <a:srgbClr val="CBD5E1"/>
-            </a:solidFill>
-            <a:prstDash val="solid"/>
-          </a:ln>
-        </p:spPr>
-      </p:sp>
-      <p:sp>
-        <p:nvSpPr>
-          <p:cNvPr id="36" name="Text 25"/>
-          <p:cNvSpPr/>
-          <p:nvPr/>
-        </p:nvSpPr>
-        <p:spPr>
-          <a:xfrm>
-            <a:off x="7232904" y="2514600"/>
-            <a:ext cx="1463040" cy="292608"/>
-          </a:xfrm>
-          <a:prstGeom prst="rect">
-            <a:avLst/>
-          </a:prstGeom>
-          <a:noFill/>
-          <a:ln/>
-        </p:spPr>
-        <p:txBody>
-          <a:bodyPr wrap="square" rtlCol="0" anchor="ctr"/>
-          <a:lstStyle/>
-          <a:p>
-            <a:pPr algn="ctr" indent="0" marL="0">
-              <a:buNone/>
-            </a:pPr>
-            <a:r>
-              <a:rPr lang="en-US" sz="900" b="1" dirty="0">
-                <a:solidFill>
-                  <a:srgbClr val="1B2A4A"/>
-                </a:solidFill>
-                <a:latin typeface="Calibri" pitchFamily="34" charset="0"/>
-                <a:ea typeface="Calibri" pitchFamily="34" charset="-122"/>
-                <a:cs typeface="Calibri" pitchFamily="34" charset="-120"/>
-              </a:rPr>
-              <a:t>이번 프로젝트</a:t>
-            </a:r>
-            <a:endParaRPr lang="en-US" sz="900" dirty="0"/>
-          </a:p>
-        </p:txBody>
-      </p:sp>
-      <p:sp>
-        <p:nvSpPr>
-          <p:cNvPr id="37" name="Shape 26"/>
-          <p:cNvSpPr/>
-          <p:nvPr/>
-        </p:nvSpPr>
-        <p:spPr>
-          <a:xfrm>
-            <a:off x="4736592" y="2834640"/>
-            <a:ext cx="1115568" cy="420624"/>
-          </a:xfrm>
-          <a:prstGeom prst="rect">
-            <a:avLst/>
-          </a:prstGeom>
-          <a:solidFill>
-            <a:srgbClr val="F8FAFC"/>
-          </a:solidFill>
-          <a:ln w="3810">
-            <a:solidFill>
-              <a:srgbClr val="E2E8F0"/>
-            </a:solidFill>
-            <a:prstDash val="solid"/>
-          </a:ln>
-        </p:spPr>
-      </p:sp>
-      <p:sp>
-        <p:nvSpPr>
-          <p:cNvPr id="38" name="Text 27"/>
-          <p:cNvSpPr/>
-          <p:nvPr/>
-        </p:nvSpPr>
-        <p:spPr>
-          <a:xfrm>
-            <a:off x="4773168" y="2880360"/>
-            <a:ext cx="1042416" cy="329184"/>
-          </a:xfrm>
-          <a:prstGeom prst="rect">
-            <a:avLst/>
-          </a:prstGeom>
-          <a:noFill/>
-          <a:ln/>
-        </p:spPr>
-        <p:txBody>
-          <a:bodyPr wrap="square" rtlCol="0" anchor="ctr"/>
-          <a:lstStyle/>
-          <a:p>
-            <a:pPr algn="l" indent="0" marL="0">
-              <a:buNone/>
-            </a:pPr>
-            <a:r>
-              <a:rPr lang="en-US" sz="950" b="1" dirty="0">
-                <a:solidFill>
-                  <a:srgbClr val="1B2A4A"/>
-                </a:solidFill>
-                <a:latin typeface="Calibri" pitchFamily="34" charset="0"/>
-                <a:ea typeface="Calibri" pitchFamily="34" charset="-122"/>
-                <a:cs typeface="Calibri" pitchFamily="34" charset="-120"/>
-              </a:rPr>
-              <a:t>데이터 수집</a:t>
-            </a:r>
-            <a:endParaRPr lang="en-US" sz="950" dirty="0"/>
-          </a:p>
-        </p:txBody>
-      </p:sp>
-      <p:sp>
-        <p:nvSpPr>
-          <p:cNvPr id="39" name="Shape 28"/>
-          <p:cNvSpPr/>
-          <p:nvPr/>
-        </p:nvSpPr>
-        <p:spPr>
-          <a:xfrm>
-            <a:off x="5925312" y="2834640"/>
-            <a:ext cx="1243584" cy="420624"/>
-          </a:xfrm>
-          <a:prstGeom prst="rect">
-            <a:avLst/>
-          </a:prstGeom>
-          <a:solidFill>
-            <a:srgbClr val="F8FAFC"/>
-          </a:solidFill>
-          <a:ln w="3810">
-            <a:solidFill>
-              <a:srgbClr val="E2E8F0"/>
-            </a:solidFill>
-            <a:prstDash val="solid"/>
-          </a:ln>
-        </p:spPr>
-      </p:sp>
-      <p:sp>
-        <p:nvSpPr>
-          <p:cNvPr id="40" name="Text 29"/>
-          <p:cNvSpPr/>
-          <p:nvPr/>
-        </p:nvSpPr>
-        <p:spPr>
-          <a:xfrm>
-            <a:off x="5961888" y="2880360"/>
-            <a:ext cx="1170432" cy="329184"/>
-          </a:xfrm>
-          <a:prstGeom prst="rect">
-            <a:avLst/>
-          </a:prstGeom>
-          <a:noFill/>
-          <a:ln/>
-        </p:spPr>
-        <p:txBody>
-          <a:bodyPr wrap="square" rtlCol="0" anchor="ctr"/>
-          <a:lstStyle/>
-          <a:p>
-            <a:pPr algn="ctr" indent="0" marL="0">
-              <a:buNone/>
-            </a:pPr>
-            <a:r>
-              <a:rPr lang="en-US" sz="900" dirty="0">
-                <a:solidFill>
-                  <a:srgbClr val="1B2A4A"/>
-                </a:solidFill>
-                <a:latin typeface="Calibri" pitchFamily="34" charset="0"/>
-                <a:ea typeface="Calibri" pitchFamily="34" charset="-122"/>
-                <a:cs typeface="Calibri" pitchFamily="34" charset="-120"/>
-              </a:rPr>
-              <a:t>자동 다운로드</a:t>
-            </a:r>
-            <a:endParaRPr lang="en-US" sz="900" dirty="0"/>
-          </a:p>
-        </p:txBody>
-      </p:sp>
-      <p:sp>
-        <p:nvSpPr>
-          <p:cNvPr id="41" name="Shape 30"/>
-          <p:cNvSpPr/>
-          <p:nvPr/>
-        </p:nvSpPr>
-        <p:spPr>
-          <a:xfrm>
-            <a:off x="7205472" y="2834640"/>
-            <a:ext cx="1517904" cy="420624"/>
-          </a:xfrm>
-          <a:prstGeom prst="rect">
-            <a:avLst/>
-          </a:prstGeom>
-          <a:solidFill>
-            <a:srgbClr val="F8FAFC"/>
-          </a:solidFill>
-          <a:ln w="3810">
-            <a:solidFill>
-              <a:srgbClr val="E2E8F0"/>
-            </a:solidFill>
-            <a:prstDash val="solid"/>
-          </a:ln>
-        </p:spPr>
-      </p:sp>
-      <p:sp>
-        <p:nvSpPr>
-          <p:cNvPr id="42" name="Text 31"/>
-          <p:cNvSpPr/>
-          <p:nvPr/>
-        </p:nvSpPr>
-        <p:spPr>
-          <a:xfrm>
-            <a:off x="7242048" y="2880360"/>
-            <a:ext cx="1444752" cy="329184"/>
-          </a:xfrm>
-          <a:prstGeom prst="rect">
-            <a:avLst/>
-          </a:prstGeom>
-          <a:noFill/>
-          <a:ln/>
-        </p:spPr>
-        <p:txBody>
-          <a:bodyPr wrap="square" rtlCol="0" anchor="ctr"/>
-          <a:lstStyle/>
-          <a:p>
-            <a:pPr algn="ctr" indent="0" marL="0">
-              <a:buNone/>
-            </a:pPr>
-            <a:r>
-              <a:rPr lang="en-US" sz="900" dirty="0">
-                <a:solidFill>
-                  <a:srgbClr val="1B2A4A"/>
-                </a:solidFill>
-                <a:latin typeface="Calibri" pitchFamily="34" charset="0"/>
-                <a:ea typeface="Calibri" pitchFamily="34" charset="-122"/>
-                <a:cs typeface="Calibri" pitchFamily="34" charset="-120"/>
-              </a:rPr>
-              <a:t>Selenium 자동 크롤링</a:t>
-            </a:r>
-            <a:endParaRPr lang="en-US" sz="900" dirty="0"/>
-          </a:p>
-        </p:txBody>
-      </p:sp>
-      <p:sp>
-        <p:nvSpPr>
-          <p:cNvPr id="43" name="Shape 32"/>
-          <p:cNvSpPr/>
-          <p:nvPr/>
-        </p:nvSpPr>
-        <p:spPr>
-          <a:xfrm>
-            <a:off x="4736592" y="3255264"/>
-            <a:ext cx="1115568" cy="420624"/>
-          </a:xfrm>
-          <a:prstGeom prst="rect">
-            <a:avLst/>
-          </a:prstGeom>
-          <a:solidFill>
-            <a:srgbClr val="FFFFFF"/>
-          </a:solidFill>
-          <a:ln w="3810">
-            <a:solidFill>
-              <a:srgbClr val="E2E8F0"/>
-            </a:solidFill>
-            <a:prstDash val="solid"/>
-          </a:ln>
-        </p:spPr>
-      </p:sp>
-      <p:sp>
-        <p:nvSpPr>
-          <p:cNvPr id="44" name="Text 33"/>
-          <p:cNvSpPr/>
-          <p:nvPr/>
-        </p:nvSpPr>
-        <p:spPr>
-          <a:xfrm>
-            <a:off x="4773168" y="3300984"/>
-            <a:ext cx="1042416" cy="329184"/>
-          </a:xfrm>
-          <a:prstGeom prst="rect">
-            <a:avLst/>
-          </a:prstGeom>
-          <a:noFill/>
-          <a:ln/>
-        </p:spPr>
-        <p:txBody>
-          <a:bodyPr wrap="square" rtlCol="0" anchor="ctr"/>
-          <a:lstStyle/>
-          <a:p>
-            <a:pPr algn="l" indent="0" marL="0">
-              <a:buNone/>
-            </a:pPr>
-            <a:r>
-              <a:rPr lang="en-US" sz="950" b="1" dirty="0">
-                <a:solidFill>
-                  <a:srgbClr val="1B2A4A"/>
-                </a:solidFill>
-                <a:latin typeface="Calibri" pitchFamily="34" charset="0"/>
-                <a:ea typeface="Calibri" pitchFamily="34" charset="-122"/>
-                <a:cs typeface="Calibri" pitchFamily="34" charset="-120"/>
-              </a:rPr>
-              <a:t>이미지</a:t>
-            </a:r>
-            <a:endParaRPr lang="en-US" sz="950" dirty="0"/>
-          </a:p>
-        </p:txBody>
-      </p:sp>
-      <p:sp>
-        <p:nvSpPr>
-          <p:cNvPr id="45" name="Shape 34"/>
-          <p:cNvSpPr/>
-          <p:nvPr/>
-        </p:nvSpPr>
-        <p:spPr>
-          <a:xfrm>
-            <a:off x="5925312" y="3255264"/>
-            <a:ext cx="1243584" cy="420624"/>
-          </a:xfrm>
-          <a:prstGeom prst="rect">
-            <a:avLst/>
-          </a:prstGeom>
-          <a:solidFill>
-            <a:srgbClr val="FFFFFF"/>
-          </a:solidFill>
-          <a:ln w="3810">
-            <a:solidFill>
-              <a:srgbClr val="E2E8F0"/>
-            </a:solidFill>
-            <a:prstDash val="solid"/>
-          </a:ln>
-        </p:spPr>
-      </p:sp>
-      <p:sp>
-        <p:nvSpPr>
-          <p:cNvPr id="46" name="Text 35"/>
-          <p:cNvSpPr/>
-          <p:nvPr/>
-        </p:nvSpPr>
-        <p:spPr>
-          <a:xfrm>
-            <a:off x="5961888" y="3300984"/>
-            <a:ext cx="1170432" cy="329184"/>
-          </a:xfrm>
-          <a:prstGeom prst="rect">
-            <a:avLst/>
-          </a:prstGeom>
-          <a:noFill/>
-          <a:ln/>
-        </p:spPr>
-        <p:txBody>
-          <a:bodyPr wrap="square" rtlCol="0" anchor="ctr"/>
-          <a:lstStyle/>
-          <a:p>
-            <a:pPr algn="ctr" indent="0" marL="0">
-              <a:buNone/>
-            </a:pPr>
-            <a:r>
-              <a:rPr lang="en-US" sz="900" dirty="0">
-                <a:solidFill>
-                  <a:srgbClr val="1B2A4A"/>
-                </a:solidFill>
-                <a:latin typeface="Calibri" pitchFamily="34" charset="0"/>
-                <a:ea typeface="Calibri" pitchFamily="34" charset="-122"/>
-                <a:cs typeface="Calibri" pitchFamily="34" charset="-120"/>
-              </a:rPr>
-              <a:t>28×28 흑백</a:t>
-            </a:r>
-            <a:endParaRPr lang="en-US" sz="900" dirty="0"/>
-          </a:p>
-        </p:txBody>
-      </p:sp>
-      <p:sp>
-        <p:nvSpPr>
-          <p:cNvPr id="47" name="Shape 36"/>
-          <p:cNvSpPr/>
-          <p:nvPr/>
-        </p:nvSpPr>
-        <p:spPr>
-          <a:xfrm>
-            <a:off x="7205472" y="3255264"/>
-            <a:ext cx="1517904" cy="420624"/>
-          </a:xfrm>
-          <a:prstGeom prst="rect">
-            <a:avLst/>
-          </a:prstGeom>
-          <a:solidFill>
-            <a:srgbClr val="FFFFFF"/>
-          </a:solidFill>
-          <a:ln w="3810">
-            <a:solidFill>
-              <a:srgbClr val="E2E8F0"/>
-            </a:solidFill>
-            <a:prstDash val="solid"/>
-          </a:ln>
-        </p:spPr>
-      </p:sp>
-      <p:sp>
-        <p:nvSpPr>
-          <p:cNvPr id="48" name="Text 37"/>
-          <p:cNvSpPr/>
-          <p:nvPr/>
-        </p:nvSpPr>
-        <p:spPr>
-          <a:xfrm>
-            <a:off x="7242048" y="3300984"/>
-            <a:ext cx="1444752" cy="329184"/>
-          </a:xfrm>
-          <a:prstGeom prst="rect">
-            <a:avLst/>
-          </a:prstGeom>
-          <a:noFill/>
-          <a:ln/>
-        </p:spPr>
-        <p:txBody>
-          <a:bodyPr wrap="square" rtlCol="0" anchor="ctr"/>
-          <a:lstStyle/>
-          <a:p>
-            <a:pPr algn="ctr" indent="0" marL="0">
-              <a:buNone/>
-            </a:pPr>
-            <a:r>
-              <a:rPr lang="en-US" sz="900" dirty="0">
-                <a:solidFill>
-                  <a:srgbClr val="1B2A4A"/>
-                </a:solidFill>
-                <a:latin typeface="Calibri" pitchFamily="34" charset="0"/>
-                <a:ea typeface="Calibri" pitchFamily="34" charset="-122"/>
-                <a:cs typeface="Calibri" pitchFamily="34" charset="-120"/>
-              </a:rPr>
-              <a:t>64×64 컬러(RGB)</a:t>
-            </a:r>
-            <a:endParaRPr lang="en-US" sz="900" dirty="0"/>
-          </a:p>
-        </p:txBody>
-      </p:sp>
-      <p:sp>
-        <p:nvSpPr>
-          <p:cNvPr id="49" name="Shape 38"/>
-          <p:cNvSpPr/>
-          <p:nvPr/>
-        </p:nvSpPr>
-        <p:spPr>
-          <a:xfrm>
-            <a:off x="4736592" y="3675888"/>
-            <a:ext cx="1115568" cy="420624"/>
-          </a:xfrm>
-          <a:prstGeom prst="rect">
-            <a:avLst/>
-          </a:prstGeom>
-          <a:solidFill>
-            <a:srgbClr val="F8FAFC"/>
-          </a:solidFill>
-          <a:ln w="3810">
-            <a:solidFill>
-              <a:srgbClr val="E2E8F0"/>
-            </a:solidFill>
-            <a:prstDash val="solid"/>
-          </a:ln>
-        </p:spPr>
-      </p:sp>
-      <p:sp>
-        <p:nvSpPr>
-          <p:cNvPr id="50" name="Text 39"/>
-          <p:cNvSpPr/>
-          <p:nvPr/>
-        </p:nvSpPr>
-        <p:spPr>
-          <a:xfrm>
-            <a:off x="4773168" y="3721608"/>
-            <a:ext cx="1042416" cy="329184"/>
-          </a:xfrm>
-          <a:prstGeom prst="rect">
-            <a:avLst/>
-          </a:prstGeom>
-          <a:noFill/>
-          <a:ln/>
-        </p:spPr>
-        <p:txBody>
-          <a:bodyPr wrap="square" rtlCol="0" anchor="ctr"/>
-          <a:lstStyle/>
-          <a:p>
-            <a:pPr algn="l" indent="0" marL="0">
-              <a:buNone/>
-            </a:pPr>
-            <a:r>
-              <a:rPr lang="en-US" sz="950" b="1" dirty="0">
-                <a:solidFill>
-                  <a:srgbClr val="1B2A4A"/>
-                </a:solidFill>
-                <a:latin typeface="Calibri" pitchFamily="34" charset="0"/>
-                <a:ea typeface="Calibri" pitchFamily="34" charset="-122"/>
-                <a:cs typeface="Calibri" pitchFamily="34" charset="-120"/>
-              </a:rPr>
-              <a:t>입력채널</a:t>
-            </a:r>
-            <a:endParaRPr lang="en-US" sz="950" dirty="0"/>
-          </a:p>
-        </p:txBody>
-      </p:sp>
-      <p:sp>
-        <p:nvSpPr>
-          <p:cNvPr id="51" name="Shape 40"/>
-          <p:cNvSpPr/>
-          <p:nvPr/>
-        </p:nvSpPr>
-        <p:spPr>
-          <a:xfrm>
-            <a:off x="5925312" y="3675888"/>
-            <a:ext cx="1243584" cy="420624"/>
-          </a:xfrm>
-          <a:prstGeom prst="rect">
-            <a:avLst/>
-          </a:prstGeom>
-          <a:solidFill>
-            <a:srgbClr val="F8FAFC"/>
-          </a:solidFill>
-          <a:ln w="3810">
-            <a:solidFill>
-              <a:srgbClr val="E2E8F0"/>
-            </a:solidFill>
-            <a:prstDash val="solid"/>
-          </a:ln>
-        </p:spPr>
-      </p:sp>
-      <p:sp>
-        <p:nvSpPr>
-          <p:cNvPr id="52" name="Text 41"/>
-          <p:cNvSpPr/>
-          <p:nvPr/>
-        </p:nvSpPr>
-        <p:spPr>
-          <a:xfrm>
-            <a:off x="5961888" y="3721608"/>
-            <a:ext cx="1170432" cy="329184"/>
-          </a:xfrm>
-          <a:prstGeom prst="rect">
-            <a:avLst/>
-          </a:prstGeom>
-          <a:noFill/>
-          <a:ln/>
-        </p:spPr>
-        <p:txBody>
-          <a:bodyPr wrap="square" rtlCol="0" anchor="ctr"/>
-          <a:lstStyle/>
-          <a:p>
-            <a:pPr algn="ctr" indent="0" marL="0">
-              <a:buNone/>
-            </a:pPr>
-            <a:r>
-              <a:rPr lang="en-US" sz="900" dirty="0">
-                <a:solidFill>
-                  <a:srgbClr val="1B2A4A"/>
-                </a:solidFill>
-                <a:latin typeface="Calibri" pitchFamily="34" charset="0"/>
-                <a:ea typeface="Calibri" pitchFamily="34" charset="-122"/>
-                <a:cs typeface="Calibri" pitchFamily="34" charset="-120"/>
-              </a:rPr>
-              <a:t>1채널</a:t>
-            </a:r>
-            <a:endParaRPr lang="en-US" sz="900" dirty="0"/>
-          </a:p>
-        </p:txBody>
-      </p:sp>
-      <p:sp>
-        <p:nvSpPr>
-          <p:cNvPr id="53" name="Shape 42"/>
-          <p:cNvSpPr/>
-          <p:nvPr/>
-        </p:nvSpPr>
-        <p:spPr>
-          <a:xfrm>
-            <a:off x="7205472" y="3675888"/>
-            <a:ext cx="1517904" cy="420624"/>
-          </a:xfrm>
-          <a:prstGeom prst="rect">
-            <a:avLst/>
-          </a:prstGeom>
-          <a:solidFill>
-            <a:srgbClr val="F8FAFC"/>
-          </a:solidFill>
-          <a:ln w="3810">
-            <a:solidFill>
-              <a:srgbClr val="E2E8F0"/>
-            </a:solidFill>
-            <a:prstDash val="solid"/>
-          </a:ln>
-        </p:spPr>
-      </p:sp>
-      <p:sp>
-        <p:nvSpPr>
-          <p:cNvPr id="54" name="Text 43"/>
-          <p:cNvSpPr/>
-          <p:nvPr/>
-        </p:nvSpPr>
-        <p:spPr>
-          <a:xfrm>
-            <a:off x="7242048" y="3721608"/>
-            <a:ext cx="1444752" cy="329184"/>
-          </a:xfrm>
-          <a:prstGeom prst="rect">
-            <a:avLst/>
-          </a:prstGeom>
-          <a:noFill/>
-          <a:ln/>
-        </p:spPr>
-        <p:txBody>
-          <a:bodyPr wrap="square" rtlCol="0" anchor="ctr"/>
-          <a:lstStyle/>
-          <a:p>
-            <a:pPr algn="ctr" indent="0" marL="0">
-              <a:buNone/>
-            </a:pPr>
-            <a:r>
-              <a:rPr lang="en-US" sz="900" dirty="0">
-                <a:solidFill>
-                  <a:srgbClr val="1B2A4A"/>
-                </a:solidFill>
-                <a:latin typeface="Calibri" pitchFamily="34" charset="0"/>
-                <a:ea typeface="Calibri" pitchFamily="34" charset="-122"/>
-                <a:cs typeface="Calibri" pitchFamily="34" charset="-120"/>
-              </a:rPr>
-              <a:t>3채널 (R·G·B)</a:t>
-            </a:r>
-            <a:endParaRPr lang="en-US" sz="900" dirty="0"/>
-          </a:p>
-        </p:txBody>
-      </p:sp>
-      <p:sp>
-        <p:nvSpPr>
-          <p:cNvPr id="55" name="Shape 44"/>
-          <p:cNvSpPr/>
-          <p:nvPr/>
-        </p:nvSpPr>
-        <p:spPr>
-          <a:xfrm>
-            <a:off x="4736592" y="4096512"/>
-            <a:ext cx="1115568" cy="420624"/>
-          </a:xfrm>
-          <a:prstGeom prst="rect">
-            <a:avLst/>
-          </a:prstGeom>
-          <a:solidFill>
-            <a:srgbClr val="FFFFFF"/>
-          </a:solidFill>
-          <a:ln w="3810">
-            <a:solidFill>
-              <a:srgbClr val="E2E8F0"/>
-            </a:solidFill>
-            <a:prstDash val="solid"/>
-          </a:ln>
-        </p:spPr>
-      </p:sp>
-      <p:sp>
-        <p:nvSpPr>
-          <p:cNvPr id="56" name="Text 45"/>
-          <p:cNvSpPr/>
-          <p:nvPr/>
-        </p:nvSpPr>
-        <p:spPr>
-          <a:xfrm>
-            <a:off x="4773168" y="4142232"/>
-            <a:ext cx="1042416" cy="329184"/>
-          </a:xfrm>
-          <a:prstGeom prst="rect">
-            <a:avLst/>
-          </a:prstGeom>
-          <a:noFill/>
-          <a:ln/>
-        </p:spPr>
-        <p:txBody>
-          <a:bodyPr wrap="square" rtlCol="0" anchor="ctr"/>
-          <a:lstStyle/>
-          <a:p>
-            <a:pPr algn="l" indent="0" marL="0">
-              <a:buNone/>
-            </a:pPr>
-            <a:r>
-              <a:rPr lang="en-US" sz="950" b="1" dirty="0">
-                <a:solidFill>
-                  <a:srgbClr val="1B2A4A"/>
-                </a:solidFill>
-                <a:latin typeface="Calibri" pitchFamily="34" charset="0"/>
-                <a:ea typeface="Calibri" pitchFamily="34" charset="-122"/>
-                <a:cs typeface="Calibri" pitchFamily="34" charset="-120"/>
-              </a:rPr>
-              <a:t>데이터 증강</a:t>
-            </a:r>
-            <a:endParaRPr lang="en-US" sz="950" dirty="0"/>
-          </a:p>
-        </p:txBody>
-      </p:sp>
-      <p:sp>
-        <p:nvSpPr>
-          <p:cNvPr id="57" name="Shape 46"/>
-          <p:cNvSpPr/>
-          <p:nvPr/>
-        </p:nvSpPr>
-        <p:spPr>
-          <a:xfrm>
-            <a:off x="5925312" y="4096512"/>
-            <a:ext cx="1243584" cy="420624"/>
-          </a:xfrm>
-          <a:prstGeom prst="rect">
-            <a:avLst/>
-          </a:prstGeom>
-          <a:solidFill>
-            <a:srgbClr val="FFFFFF"/>
-          </a:solidFill>
-          <a:ln w="3810">
-            <a:solidFill>
-              <a:srgbClr val="E2E8F0"/>
-            </a:solidFill>
-            <a:prstDash val="solid"/>
-          </a:ln>
-        </p:spPr>
-      </p:sp>
-      <p:sp>
-        <p:nvSpPr>
-          <p:cNvPr id="58" name="Text 47"/>
-          <p:cNvSpPr/>
-          <p:nvPr/>
-        </p:nvSpPr>
-        <p:spPr>
-          <a:xfrm>
-            <a:off x="5961888" y="4142232"/>
-            <a:ext cx="1170432" cy="329184"/>
-          </a:xfrm>
-          <a:prstGeom prst="rect">
-            <a:avLst/>
-          </a:prstGeom>
-          <a:noFill/>
-          <a:ln/>
-        </p:spPr>
-        <p:txBody>
-          <a:bodyPr wrap="square" rtlCol="0" anchor="ctr"/>
-          <a:lstStyle/>
-          <a:p>
-            <a:pPr algn="ctr" indent="0" marL="0">
-              <a:buNone/>
-            </a:pPr>
-            <a:r>
-              <a:rPr lang="en-US" sz="900" dirty="0">
-                <a:solidFill>
-                  <a:srgbClr val="1B2A4A"/>
-                </a:solidFill>
-                <a:latin typeface="Calibri" pitchFamily="34" charset="0"/>
-                <a:ea typeface="Calibri" pitchFamily="34" charset="-122"/>
-                <a:cs typeface="Calibri" pitchFamily="34" charset="-120"/>
-              </a:rPr>
-              <a:t>없음</a:t>
-            </a:r>
-            <a:endParaRPr lang="en-US" sz="900" dirty="0"/>
-          </a:p>
-        </p:txBody>
-      </p:sp>
-      <p:sp>
-        <p:nvSpPr>
-          <p:cNvPr id="59" name="Shape 48"/>
-          <p:cNvSpPr/>
-          <p:nvPr/>
-        </p:nvSpPr>
-        <p:spPr>
-          <a:xfrm>
-            <a:off x="7205472" y="4096512"/>
-            <a:ext cx="1517904" cy="420624"/>
-          </a:xfrm>
-          <a:prstGeom prst="rect">
-            <a:avLst/>
-          </a:prstGeom>
-          <a:solidFill>
-            <a:srgbClr val="FFFFFF"/>
-          </a:solidFill>
-          <a:ln w="3810">
-            <a:solidFill>
-              <a:srgbClr val="E2E8F0"/>
-            </a:solidFill>
-            <a:prstDash val="solid"/>
-          </a:ln>
-        </p:spPr>
-      </p:sp>
-      <p:sp>
-        <p:nvSpPr>
-          <p:cNvPr id="60" name="Text 49"/>
-          <p:cNvSpPr/>
-          <p:nvPr/>
-        </p:nvSpPr>
-        <p:spPr>
-          <a:xfrm>
-            <a:off x="7242048" y="4142232"/>
-            <a:ext cx="1444752" cy="329184"/>
-          </a:xfrm>
-          <a:prstGeom prst="rect">
-            <a:avLst/>
-          </a:prstGeom>
-          <a:noFill/>
-          <a:ln/>
-        </p:spPr>
-        <p:txBody>
-          <a:bodyPr wrap="square" rtlCol="0" anchor="ctr"/>
-          <a:lstStyle/>
-          <a:p>
-            <a:pPr algn="ctr" indent="0" marL="0">
-              <a:buNone/>
-            </a:pPr>
-            <a:r>
-              <a:rPr lang="en-US" sz="900" dirty="0">
-                <a:solidFill>
-                  <a:srgbClr val="1B2A4A"/>
-                </a:solidFill>
-                <a:latin typeface="Calibri" pitchFamily="34" charset="0"/>
-                <a:ea typeface="Calibri" pitchFamily="34" charset="-122"/>
-                <a:cs typeface="Calibri" pitchFamily="34" charset="-120"/>
-              </a:rPr>
-              <a:t>회전·반전·색감</a:t>
-            </a:r>
-            <a:endParaRPr lang="en-US" sz="900" dirty="0"/>
-          </a:p>
-        </p:txBody>
-      </p:sp>
-      <p:sp>
-        <p:nvSpPr>
-          <p:cNvPr id="61" name="Shape 50"/>
-          <p:cNvSpPr/>
-          <p:nvPr/>
-        </p:nvSpPr>
-        <p:spPr>
-          <a:xfrm>
-            <a:off x="4736592" y="4517136"/>
-            <a:ext cx="1115568" cy="420624"/>
-          </a:xfrm>
-          <a:prstGeom prst="rect">
-            <a:avLst/>
-          </a:prstGeom>
-          <a:solidFill>
-            <a:srgbClr val="F8FAFC"/>
-          </a:solidFill>
-          <a:ln w="3810">
-            <a:solidFill>
-              <a:srgbClr val="E2E8F0"/>
-            </a:solidFill>
-            <a:prstDash val="solid"/>
-          </a:ln>
-        </p:spPr>
-      </p:sp>
-      <p:sp>
-        <p:nvSpPr>
-          <p:cNvPr id="62" name="Text 51"/>
-          <p:cNvSpPr/>
-          <p:nvPr/>
-        </p:nvSpPr>
-        <p:spPr>
-          <a:xfrm>
-            <a:off x="4773168" y="4562856"/>
-            <a:ext cx="1042416" cy="329184"/>
-          </a:xfrm>
-          <a:prstGeom prst="rect">
-            <a:avLst/>
-          </a:prstGeom>
-          <a:noFill/>
-          <a:ln/>
-        </p:spPr>
-        <p:txBody>
-          <a:bodyPr wrap="square" rtlCol="0" anchor="ctr"/>
-          <a:lstStyle/>
-          <a:p>
-            <a:pPr algn="l" indent="0" marL="0">
-              <a:buNone/>
-            </a:pPr>
-            <a:r>
-              <a:rPr lang="en-US" sz="950" b="1" dirty="0">
-                <a:solidFill>
-                  <a:srgbClr val="1B2A4A"/>
-                </a:solidFill>
-                <a:latin typeface="Calibri" pitchFamily="34" charset="0"/>
-                <a:ea typeface="Calibri" pitchFamily="34" charset="-122"/>
-                <a:cs typeface="Calibri" pitchFamily="34" charset="-120"/>
-              </a:rPr>
-              <a:t>독창성</a:t>
-            </a:r>
-            <a:endParaRPr lang="en-US" sz="950" dirty="0"/>
-          </a:p>
-        </p:txBody>
-      </p:sp>
-      <p:sp>
-        <p:nvSpPr>
-          <p:cNvPr id="63" name="Shape 52"/>
-          <p:cNvSpPr/>
-          <p:nvPr/>
-        </p:nvSpPr>
-        <p:spPr>
-          <a:xfrm>
-            <a:off x="5925312" y="4517136"/>
-            <a:ext cx="1243584" cy="420624"/>
-          </a:xfrm>
-          <a:prstGeom prst="rect">
-            <a:avLst/>
-          </a:prstGeom>
-          <a:solidFill>
-            <a:srgbClr val="F8FAFC"/>
-          </a:solidFill>
-          <a:ln w="3810">
-            <a:solidFill>
-              <a:srgbClr val="E2E8F0"/>
-            </a:solidFill>
-            <a:prstDash val="solid"/>
-          </a:ln>
-        </p:spPr>
-      </p:sp>
-      <p:sp>
-        <p:nvSpPr>
-          <p:cNvPr id="64" name="Text 53"/>
-          <p:cNvSpPr/>
-          <p:nvPr/>
-        </p:nvSpPr>
-        <p:spPr>
-          <a:xfrm>
-            <a:off x="5961888" y="4562856"/>
-            <a:ext cx="1170432" cy="329184"/>
-          </a:xfrm>
-          <a:prstGeom prst="rect">
-            <a:avLst/>
-          </a:prstGeom>
-          <a:noFill/>
-          <a:ln/>
-        </p:spPr>
-        <p:txBody>
-          <a:bodyPr wrap="square" rtlCol="0" anchor="ctr"/>
-          <a:lstStyle/>
-          <a:p>
-            <a:pPr algn="ctr" indent="0" marL="0">
-              <a:buNone/>
-            </a:pPr>
-            <a:r>
-              <a:rPr lang="en-US" sz="900" dirty="0">
-                <a:solidFill>
-                  <a:srgbClr val="1B2A4A"/>
-                </a:solidFill>
-                <a:latin typeface="Calibri" pitchFamily="34" charset="0"/>
-                <a:ea typeface="Calibri" pitchFamily="34" charset="-122"/>
-                <a:cs typeface="Calibri" pitchFamily="34" charset="-120"/>
-              </a:rPr>
-              <a:t>낮음</a:t>
-            </a:r>
-            <a:endParaRPr lang="en-US" sz="900" dirty="0"/>
-          </a:p>
-        </p:txBody>
-      </p:sp>
-      <p:sp>
-        <p:nvSpPr>
-          <p:cNvPr id="65" name="Shape 54"/>
-          <p:cNvSpPr/>
-          <p:nvPr/>
-        </p:nvSpPr>
-        <p:spPr>
-          <a:xfrm>
-            <a:off x="7205472" y="4517136"/>
-            <a:ext cx="1517904" cy="420624"/>
-          </a:xfrm>
-          <a:prstGeom prst="rect">
-            <a:avLst/>
-          </a:prstGeom>
-          <a:solidFill>
-            <a:srgbClr val="F8FAFC"/>
-          </a:solidFill>
-          <a:ln w="3810">
-            <a:solidFill>
-              <a:srgbClr val="E2E8F0"/>
-            </a:solidFill>
-            <a:prstDash val="solid"/>
-          </a:ln>
-        </p:spPr>
-      </p:sp>
-      <p:sp>
-        <p:nvSpPr>
-          <p:cNvPr id="66" name="Text 55"/>
-          <p:cNvSpPr/>
-          <p:nvPr/>
-        </p:nvSpPr>
-        <p:spPr>
-          <a:xfrm>
-            <a:off x="7242048" y="4562856"/>
-            <a:ext cx="1444752" cy="329184"/>
-          </a:xfrm>
-          <a:prstGeom prst="rect">
-            <a:avLst/>
-          </a:prstGeom>
-          <a:noFill/>
-          <a:ln/>
-        </p:spPr>
-        <p:txBody>
-          <a:bodyPr wrap="square" rtlCol="0" anchor="ctr"/>
-          <a:lstStyle/>
-          <a:p>
-            <a:pPr algn="ctr" indent="0" marL="0">
-              <a:buNone/>
-            </a:pPr>
-            <a:r>
-              <a:rPr lang="en-US" sz="900" dirty="0">
-                <a:solidFill>
-                  <a:srgbClr val="0D9488"/>
-                </a:solidFill>
-                <a:latin typeface="Calibri" pitchFamily="34" charset="0"/>
-                <a:ea typeface="Calibri" pitchFamily="34" charset="-122"/>
-                <a:cs typeface="Calibri" pitchFamily="34" charset="-120"/>
-              </a:rPr>
-              <a:t>높음 ★</a:t>
-            </a:r>
-            <a:endParaRPr lang="en-US" sz="900" dirty="0"/>
           </a:p>
         </p:txBody>
       </p:sp>
@@ -6593,6 +4978,7 @@
         <a:solidFill>
           <a:srgbClr val="F1F5F9"/>
         </a:solidFill>
+        <a:effectLst/>
       </p:bgPr>
     </p:bg>
     <p:spTree>
@@ -6630,7 +5016,7 @@
           <a:bodyPr wrap="square" rtlCol="0" anchor="ctr"/>
           <a:lstStyle/>
           <a:p>
-            <a:pPr indent="0" marL="0">
+            <a:pPr marL="0" indent="0">
               <a:buNone/>
             </a:pPr>
             <a:r>
@@ -6656,7 +5042,7 @@
         </p:nvSpPr>
         <p:spPr>
           <a:xfrm>
-            <a:off x="320040" y="804672"/>
+            <a:off x="470916" y="804672"/>
             <a:ext cx="1591056" cy="1298448"/>
           </a:xfrm>
           <a:prstGeom prst="rect">
@@ -6672,7 +5058,7 @@
             <a:prstDash val="solid"/>
           </a:ln>
           <a:effectLst>
-            <a:outerShdw sx="100000" sy="100000" kx="0" ky="0" algn="bl" rotWithShape="0" blurRad="88900" dist="25400" dir="8100000">
+            <a:outerShdw blurRad="88900" dist="25400" dir="8100000" algn="bl" rotWithShape="0">
               <a:srgbClr val="000000">
                 <a:alpha val="14000"/>
               </a:srgbClr>
@@ -6688,7 +5074,7 @@
         </p:nvSpPr>
         <p:spPr>
           <a:xfrm>
-            <a:off x="320040" y="804672"/>
+            <a:off x="478737" y="804672"/>
             <a:ext cx="1591056" cy="292608"/>
           </a:xfrm>
           <a:prstGeom prst="rect">
@@ -6713,7 +5099,7 @@
         </p:nvSpPr>
         <p:spPr>
           <a:xfrm>
-            <a:off x="320040" y="841248"/>
+            <a:off x="478737" y="841248"/>
             <a:ext cx="1591056" cy="219456"/>
           </a:xfrm>
           <a:prstGeom prst="rect">
@@ -6726,7 +5112,7 @@
           <a:bodyPr wrap="square" rtlCol="0" anchor="ctr"/>
           <a:lstStyle/>
           <a:p>
-            <a:pPr algn="ctr" indent="0" marL="0">
+            <a:pPr marL="0" indent="0" algn="ctr">
               <a:buNone/>
             </a:pPr>
             <a:r>
@@ -6752,7 +5138,7 @@
         </p:nvSpPr>
         <p:spPr>
           <a:xfrm>
-            <a:off x="320040" y="1133856"/>
+            <a:off x="478737" y="1133856"/>
             <a:ext cx="1591056" cy="530352"/>
           </a:xfrm>
           <a:prstGeom prst="rect">
@@ -6765,7 +5151,7 @@
           <a:bodyPr wrap="square" rtlCol="0" anchor="ctr"/>
           <a:lstStyle/>
           <a:p>
-            <a:pPr algn="ctr" indent="0" marL="0">
+            <a:pPr marL="0" indent="0" algn="ctr">
               <a:buNone/>
             </a:pPr>
             <a:r>
@@ -6791,7 +5177,7 @@
         </p:nvSpPr>
         <p:spPr>
           <a:xfrm>
-            <a:off x="356616" y="1682496"/>
+            <a:off x="515313" y="1682496"/>
             <a:ext cx="1517904" cy="237744"/>
           </a:xfrm>
           <a:prstGeom prst="rect">
@@ -6804,7 +5190,7 @@
           <a:bodyPr wrap="square" rtlCol="0" anchor="ctr"/>
           <a:lstStyle/>
           <a:p>
-            <a:pPr algn="ctr" indent="0" marL="0">
+            <a:pPr marL="0" indent="0" algn="ctr">
               <a:buNone/>
             </a:pPr>
             <a:r>
@@ -6830,7 +5216,7 @@
         </p:nvSpPr>
         <p:spPr>
           <a:xfrm>
-            <a:off x="356616" y="1901952"/>
+            <a:off x="515313" y="1901952"/>
             <a:ext cx="1517904" cy="164592"/>
           </a:xfrm>
           <a:prstGeom prst="rect">
@@ -6843,7 +5229,7 @@
           <a:bodyPr wrap="square" rtlCol="0" anchor="ctr"/>
           <a:lstStyle/>
           <a:p>
-            <a:pPr algn="ctr" indent="0" marL="0">
+            <a:pPr marL="0" indent="0" algn="ctr">
               <a:buNone/>
             </a:pPr>
             <a:r>
@@ -6869,7 +5255,7 @@
         </p:nvSpPr>
         <p:spPr>
           <a:xfrm>
-            <a:off x="1956816" y="804672"/>
+            <a:off x="2107692" y="804672"/>
             <a:ext cx="1591056" cy="1298448"/>
           </a:xfrm>
           <a:prstGeom prst="rect">
@@ -6885,7 +5271,7 @@
             <a:prstDash val="solid"/>
           </a:ln>
           <a:effectLst>
-            <a:outerShdw sx="100000" sy="100000" kx="0" ky="0" algn="bl" rotWithShape="0" blurRad="88900" dist="25400" dir="8100000">
+            <a:outerShdw blurRad="88900" dist="25400" dir="8100000" algn="bl" rotWithShape="0">
               <a:srgbClr val="000000">
                 <a:alpha val="14000"/>
               </a:srgbClr>
@@ -6901,7 +5287,7 @@
         </p:nvSpPr>
         <p:spPr>
           <a:xfrm>
-            <a:off x="1956816" y="804672"/>
+            <a:off x="2115513" y="804672"/>
             <a:ext cx="1591056" cy="292608"/>
           </a:xfrm>
           <a:prstGeom prst="rect">
@@ -6926,7 +5312,7 @@
         </p:nvSpPr>
         <p:spPr>
           <a:xfrm>
-            <a:off x="1956816" y="841248"/>
+            <a:off x="2115513" y="841248"/>
             <a:ext cx="1591056" cy="219456"/>
           </a:xfrm>
           <a:prstGeom prst="rect">
@@ -6939,7 +5325,7 @@
           <a:bodyPr wrap="square" rtlCol="0" anchor="ctr"/>
           <a:lstStyle/>
           <a:p>
-            <a:pPr algn="ctr" indent="0" marL="0">
+            <a:pPr marL="0" indent="0" algn="ctr">
               <a:buNone/>
             </a:pPr>
             <a:r>
@@ -6965,7 +5351,7 @@
         </p:nvSpPr>
         <p:spPr>
           <a:xfrm>
-            <a:off x="1956816" y="1133856"/>
+            <a:off x="2115513" y="1133856"/>
             <a:ext cx="1591056" cy="530352"/>
           </a:xfrm>
           <a:prstGeom prst="rect">
@@ -6978,7 +5364,7 @@
           <a:bodyPr wrap="square" rtlCol="0" anchor="ctr"/>
           <a:lstStyle/>
           <a:p>
-            <a:pPr algn="ctr" indent="0" marL="0">
+            <a:pPr marL="0" indent="0" algn="ctr">
               <a:buNone/>
             </a:pPr>
             <a:r>
@@ -7004,7 +5390,7 @@
         </p:nvSpPr>
         <p:spPr>
           <a:xfrm>
-            <a:off x="1993392" y="1682496"/>
+            <a:off x="2152089" y="1682496"/>
             <a:ext cx="1517904" cy="237744"/>
           </a:xfrm>
           <a:prstGeom prst="rect">
@@ -7017,7 +5403,7 @@
           <a:bodyPr wrap="square" rtlCol="0" anchor="ctr"/>
           <a:lstStyle/>
           <a:p>
-            <a:pPr algn="ctr" indent="0" marL="0">
+            <a:pPr marL="0" indent="0" algn="ctr">
               <a:buNone/>
             </a:pPr>
             <a:r>
@@ -7043,7 +5429,7 @@
         </p:nvSpPr>
         <p:spPr>
           <a:xfrm>
-            <a:off x="1993392" y="1901952"/>
+            <a:off x="2152089" y="1901952"/>
             <a:ext cx="1517904" cy="164592"/>
           </a:xfrm>
           <a:prstGeom prst="rect">
@@ -7056,7 +5442,7 @@
           <a:bodyPr wrap="square" rtlCol="0" anchor="ctr"/>
           <a:lstStyle/>
           <a:p>
-            <a:pPr algn="ctr" indent="0" marL="0">
+            <a:pPr marL="0" indent="0" algn="ctr">
               <a:buNone/>
             </a:pPr>
             <a:r>
@@ -7082,7 +5468,7 @@
         </p:nvSpPr>
         <p:spPr>
           <a:xfrm>
-            <a:off x="3593592" y="804672"/>
+            <a:off x="3758787" y="804672"/>
             <a:ext cx="1591056" cy="1298448"/>
           </a:xfrm>
           <a:prstGeom prst="rect">
@@ -7098,7 +5484,7 @@
             <a:prstDash val="solid"/>
           </a:ln>
           <a:effectLst>
-            <a:outerShdw sx="100000" sy="100000" kx="0" ky="0" algn="bl" rotWithShape="0" blurRad="88900" dist="25400" dir="8100000">
+            <a:outerShdw blurRad="88900" dist="25400" dir="8100000" algn="bl" rotWithShape="0">
               <a:srgbClr val="000000">
                 <a:alpha val="14000"/>
               </a:srgbClr>
@@ -7114,7 +5500,7 @@
         </p:nvSpPr>
         <p:spPr>
           <a:xfrm>
-            <a:off x="3593592" y="804672"/>
+            <a:off x="3752289" y="804672"/>
             <a:ext cx="1591056" cy="292608"/>
           </a:xfrm>
           <a:prstGeom prst="rect">
@@ -7139,7 +5525,7 @@
         </p:nvSpPr>
         <p:spPr>
           <a:xfrm>
-            <a:off x="3593592" y="841248"/>
+            <a:off x="3752289" y="841248"/>
             <a:ext cx="1591056" cy="219456"/>
           </a:xfrm>
           <a:prstGeom prst="rect">
@@ -7152,7 +5538,7 @@
           <a:bodyPr wrap="square" rtlCol="0" anchor="ctr"/>
           <a:lstStyle/>
           <a:p>
-            <a:pPr algn="ctr" indent="0" marL="0">
+            <a:pPr marL="0" indent="0" algn="ctr">
               <a:buNone/>
             </a:pPr>
             <a:r>
@@ -7178,7 +5564,7 @@
         </p:nvSpPr>
         <p:spPr>
           <a:xfrm>
-            <a:off x="3593592" y="1133856"/>
+            <a:off x="3752289" y="1133856"/>
             <a:ext cx="1591056" cy="530352"/>
           </a:xfrm>
           <a:prstGeom prst="rect">
@@ -7191,7 +5577,7 @@
           <a:bodyPr wrap="square" rtlCol="0" anchor="ctr"/>
           <a:lstStyle/>
           <a:p>
-            <a:pPr algn="ctr" indent="0" marL="0">
+            <a:pPr marL="0" indent="0" algn="ctr">
               <a:buNone/>
             </a:pPr>
             <a:r>
@@ -7217,7 +5603,7 @@
         </p:nvSpPr>
         <p:spPr>
           <a:xfrm>
-            <a:off x="3630168" y="1682496"/>
+            <a:off x="3788865" y="1682496"/>
             <a:ext cx="1517904" cy="237744"/>
           </a:xfrm>
           <a:prstGeom prst="rect">
@@ -7230,7 +5616,7 @@
           <a:bodyPr wrap="square" rtlCol="0" anchor="ctr"/>
           <a:lstStyle/>
           <a:p>
-            <a:pPr algn="ctr" indent="0" marL="0">
+            <a:pPr marL="0" indent="0" algn="ctr">
               <a:buNone/>
             </a:pPr>
             <a:r>
@@ -7256,7 +5642,7 @@
         </p:nvSpPr>
         <p:spPr>
           <a:xfrm>
-            <a:off x="3630168" y="1901952"/>
+            <a:off x="3788865" y="1901952"/>
             <a:ext cx="1517904" cy="164592"/>
           </a:xfrm>
           <a:prstGeom prst="rect">
@@ -7269,7 +5655,7 @@
           <a:bodyPr wrap="square" rtlCol="0" anchor="ctr"/>
           <a:lstStyle/>
           <a:p>
-            <a:pPr algn="ctr" indent="0" marL="0">
+            <a:pPr marL="0" indent="0" algn="ctr">
               <a:buNone/>
             </a:pPr>
             <a:r>
@@ -7295,7 +5681,7 @@
         </p:nvSpPr>
         <p:spPr>
           <a:xfrm>
-            <a:off x="5230368" y="804672"/>
+            <a:off x="5383170" y="804672"/>
             <a:ext cx="1591056" cy="1298448"/>
           </a:xfrm>
           <a:prstGeom prst="rect">
@@ -7311,7 +5697,7 @@
             <a:prstDash val="solid"/>
           </a:ln>
           <a:effectLst>
-            <a:outerShdw sx="100000" sy="100000" kx="0" ky="0" algn="bl" rotWithShape="0" blurRad="88900" dist="25400" dir="8100000">
+            <a:outerShdw blurRad="88900" dist="25400" dir="8100000" algn="bl" rotWithShape="0">
               <a:srgbClr val="000000">
                 <a:alpha val="14000"/>
               </a:srgbClr>
@@ -7327,7 +5713,7 @@
         </p:nvSpPr>
         <p:spPr>
           <a:xfrm>
-            <a:off x="5230368" y="804672"/>
+            <a:off x="5389065" y="804672"/>
             <a:ext cx="1591056" cy="292608"/>
           </a:xfrm>
           <a:prstGeom prst="rect">
@@ -7352,7 +5738,7 @@
         </p:nvSpPr>
         <p:spPr>
           <a:xfrm>
-            <a:off x="5230368" y="841248"/>
+            <a:off x="5389065" y="841248"/>
             <a:ext cx="1591056" cy="219456"/>
           </a:xfrm>
           <a:prstGeom prst="rect">
@@ -7365,7 +5751,7 @@
           <a:bodyPr wrap="square" rtlCol="0" anchor="ctr"/>
           <a:lstStyle/>
           <a:p>
-            <a:pPr algn="ctr" indent="0" marL="0">
+            <a:pPr marL="0" indent="0" algn="ctr">
               <a:buNone/>
             </a:pPr>
             <a:r>
@@ -7391,7 +5777,7 @@
         </p:nvSpPr>
         <p:spPr>
           <a:xfrm>
-            <a:off x="5230368" y="1133856"/>
+            <a:off x="5389065" y="1133856"/>
             <a:ext cx="1591056" cy="530352"/>
           </a:xfrm>
           <a:prstGeom prst="rect">
@@ -7404,7 +5790,7 @@
           <a:bodyPr wrap="square" rtlCol="0" anchor="ctr"/>
           <a:lstStyle/>
           <a:p>
-            <a:pPr algn="ctr" indent="0" marL="0">
+            <a:pPr marL="0" indent="0" algn="ctr">
               <a:buNone/>
             </a:pPr>
             <a:r>
@@ -7430,7 +5816,7 @@
         </p:nvSpPr>
         <p:spPr>
           <a:xfrm>
-            <a:off x="5266944" y="1682496"/>
+            <a:off x="5425641" y="1682496"/>
             <a:ext cx="1517904" cy="237744"/>
           </a:xfrm>
           <a:prstGeom prst="rect">
@@ -7443,7 +5829,7 @@
           <a:bodyPr wrap="square" rtlCol="0" anchor="ctr"/>
           <a:lstStyle/>
           <a:p>
-            <a:pPr algn="ctr" indent="0" marL="0">
+            <a:pPr marL="0" indent="0" algn="ctr">
               <a:buNone/>
             </a:pPr>
             <a:r>
@@ -7469,7 +5855,7 @@
         </p:nvSpPr>
         <p:spPr>
           <a:xfrm>
-            <a:off x="5266944" y="1901952"/>
+            <a:off x="5425641" y="1901952"/>
             <a:ext cx="1517904" cy="164592"/>
           </a:xfrm>
           <a:prstGeom prst="rect">
@@ -7482,7 +5868,7 @@
           <a:bodyPr wrap="square" rtlCol="0" anchor="ctr"/>
           <a:lstStyle/>
           <a:p>
-            <a:pPr algn="ctr" indent="0" marL="0">
+            <a:pPr marL="0" indent="0" algn="ctr">
               <a:buNone/>
             </a:pPr>
             <a:r>
@@ -7508,7 +5894,7 @@
         </p:nvSpPr>
         <p:spPr>
           <a:xfrm>
-            <a:off x="6867144" y="804672"/>
+            <a:off x="7022592" y="804672"/>
             <a:ext cx="1591056" cy="1298448"/>
           </a:xfrm>
           <a:prstGeom prst="rect">
@@ -7524,7 +5910,7 @@
             <a:prstDash val="solid"/>
           </a:ln>
           <a:effectLst>
-            <a:outerShdw sx="100000" sy="100000" kx="0" ky="0" algn="bl" rotWithShape="0" blurRad="88900" dist="25400" dir="8100000">
+            <a:outerShdw blurRad="88900" dist="25400" dir="8100000" algn="bl" rotWithShape="0">
               <a:srgbClr val="000000">
                 <a:alpha val="14000"/>
               </a:srgbClr>
@@ -7540,7 +5926,7 @@
         </p:nvSpPr>
         <p:spPr>
           <a:xfrm>
-            <a:off x="6867144" y="804672"/>
+            <a:off x="7025841" y="804672"/>
             <a:ext cx="1591056" cy="292608"/>
           </a:xfrm>
           <a:prstGeom prst="rect">
@@ -7565,7 +5951,7 @@
         </p:nvSpPr>
         <p:spPr>
           <a:xfrm>
-            <a:off x="6867144" y="841248"/>
+            <a:off x="7025841" y="841248"/>
             <a:ext cx="1591056" cy="219456"/>
           </a:xfrm>
           <a:prstGeom prst="rect">
@@ -7578,7 +5964,7 @@
           <a:bodyPr wrap="square" rtlCol="0" anchor="ctr"/>
           <a:lstStyle/>
           <a:p>
-            <a:pPr algn="ctr" indent="0" marL="0">
+            <a:pPr marL="0" indent="0" algn="ctr">
               <a:buNone/>
             </a:pPr>
             <a:r>
@@ -7604,7 +5990,7 @@
         </p:nvSpPr>
         <p:spPr>
           <a:xfrm>
-            <a:off x="6867144" y="1133856"/>
+            <a:off x="7025841" y="1133856"/>
             <a:ext cx="1591056" cy="530352"/>
           </a:xfrm>
           <a:prstGeom prst="rect">
@@ -7617,7 +6003,7 @@
           <a:bodyPr wrap="square" rtlCol="0" anchor="ctr"/>
           <a:lstStyle/>
           <a:p>
-            <a:pPr algn="ctr" indent="0" marL="0">
+            <a:pPr marL="0" indent="0" algn="ctr">
               <a:buNone/>
             </a:pPr>
             <a:r>
@@ -7643,7 +6029,7 @@
         </p:nvSpPr>
         <p:spPr>
           <a:xfrm>
-            <a:off x="6903720" y="1682496"/>
+            <a:off x="7062417" y="1682496"/>
             <a:ext cx="1517904" cy="237744"/>
           </a:xfrm>
           <a:prstGeom prst="rect">
@@ -7656,7 +6042,7 @@
           <a:bodyPr wrap="square" rtlCol="0" anchor="ctr"/>
           <a:lstStyle/>
           <a:p>
-            <a:pPr algn="ctr" indent="0" marL="0">
+            <a:pPr marL="0" indent="0" algn="ctr">
               <a:buNone/>
             </a:pPr>
             <a:r>
@@ -7682,7 +6068,7 @@
         </p:nvSpPr>
         <p:spPr>
           <a:xfrm>
-            <a:off x="6903720" y="1901952"/>
+            <a:off x="7062417" y="1901952"/>
             <a:ext cx="1517904" cy="164592"/>
           </a:xfrm>
           <a:prstGeom prst="rect">
@@ -7695,7 +6081,7 @@
           <a:bodyPr wrap="square" rtlCol="0" anchor="ctr"/>
           <a:lstStyle/>
           <a:p>
-            <a:pPr algn="ctr" indent="0" marL="0">
+            <a:pPr marL="0" indent="0" algn="ctr">
               <a:buNone/>
             </a:pPr>
             <a:r>
@@ -7737,7 +6123,7 @@
             <a:prstDash val="solid"/>
           </a:ln>
           <a:effectLst>
-            <a:outerShdw sx="100000" sy="100000" kx="0" ky="0" algn="bl" rotWithShape="0" blurRad="88900" dist="25400" dir="8100000">
+            <a:outerShdw blurRad="88900" dist="25400" dir="8100000" algn="bl" rotWithShape="0">
               <a:srgbClr val="000000">
                 <a:alpha val="14000"/>
               </a:srgbClr>
@@ -7772,14 +6158,14 @@
       </p:sp>
       <p:pic>
         <p:nvPicPr>
-          <p:cNvPr id="35" name="Image 0" descr="preencoded.png">    </p:cNvPr>
+          <p:cNvPr id="35" name="Image 0" descr="preencoded.png"/>
           <p:cNvPicPr>
             <a:picLocks noChangeAspect="1"/>
           </p:cNvPicPr>
           <p:nvPr/>
         </p:nvPicPr>
         <p:blipFill>
-          <a:blip r:embed="rId1"/>
+          <a:blip r:embed="rId3"/>
           <a:stretch>
             <a:fillRect/>
           </a:stretch>
@@ -7815,7 +6201,7 @@
           <a:bodyPr wrap="square" rtlCol="0" anchor="ctr"/>
           <a:lstStyle/>
           <a:p>
-            <a:pPr indent="0" marL="0">
+            <a:pPr marL="0" indent="0">
               <a:buNone/>
             </a:pPr>
             <a:r>
@@ -7854,7 +6240,7 @@
           <a:bodyPr wrap="square" rtlCol="0" anchor="ctr"/>
           <a:lstStyle/>
           <a:p>
-            <a:pPr indent="0" marL="0">
+            <a:pPr marL="0" indent="0">
               <a:buNone/>
             </a:pPr>
             <a:r>
@@ -7871,7 +6257,7 @@
             <a:endParaRPr lang="en-US" sz="850" dirty="0"/>
           </a:p>
           <a:p>
-            <a:pPr indent="0" marL="0">
+            <a:pPr marL="0" indent="0">
               <a:buNone/>
             </a:pPr>
             <a:r>
@@ -7888,7 +6274,7 @@
             <a:endParaRPr lang="en-US" sz="850" dirty="0"/>
           </a:p>
           <a:p>
-            <a:pPr indent="0" marL="0">
+            <a:pPr marL="0" indent="0">
               <a:buNone/>
             </a:pPr>
             <a:r>
@@ -7905,7 +6291,7 @@
             <a:endParaRPr lang="en-US" sz="850" dirty="0"/>
           </a:p>
           <a:p>
-            <a:pPr indent="0" marL="0">
+            <a:pPr marL="0" indent="0">
               <a:buNone/>
             </a:pPr>
             <a:r>
@@ -7922,7 +6308,7 @@
             <a:endParaRPr lang="en-US" sz="850" dirty="0"/>
           </a:p>
           <a:p>
-            <a:pPr indent="0" marL="0">
+            <a:pPr marL="0" indent="0">
               <a:buNone/>
             </a:pPr>
             <a:r>
@@ -7939,13 +6325,13 @@
             <a:endParaRPr lang="en-US" sz="850" dirty="0"/>
           </a:p>
           <a:p>
-            <a:pPr indent="0" marL="0">
+            <a:pPr marL="0" indent="0">
               <a:buNone/>
             </a:pPr>
             <a:endParaRPr lang="en-US" sz="850" dirty="0"/>
           </a:p>
           <a:p>
-            <a:pPr indent="0" marL="0">
+            <a:pPr marL="0" indent="0">
               <a:buNone/>
             </a:pPr>
             <a:r>
@@ -7962,7 +6348,7 @@
             <a:endParaRPr lang="en-US" sz="850" dirty="0"/>
           </a:p>
           <a:p>
-            <a:pPr indent="0" marL="0">
+            <a:pPr marL="0" indent="0">
               <a:buNone/>
             </a:pPr>
             <a:r>
@@ -7979,7 +6365,7 @@
             <a:endParaRPr lang="en-US" sz="850" dirty="0"/>
           </a:p>
           <a:p>
-            <a:pPr indent="0" marL="0">
+            <a:pPr marL="0" indent="0">
               <a:buNone/>
             </a:pPr>
             <a:r>
@@ -7996,13 +6382,13 @@
             <a:endParaRPr lang="en-US" sz="850" dirty="0"/>
           </a:p>
           <a:p>
-            <a:pPr indent="0" marL="0">
+            <a:pPr marL="0" indent="0">
               <a:buNone/>
             </a:pPr>
             <a:endParaRPr lang="en-US" sz="850" dirty="0"/>
           </a:p>
           <a:p>
-            <a:pPr indent="0" marL="0">
+            <a:pPr marL="0" indent="0">
               <a:buNone/>
             </a:pPr>
             <a:r>
@@ -8019,7 +6405,7 @@
             <a:endParaRPr lang="en-US" sz="850" dirty="0"/>
           </a:p>
           <a:p>
-            <a:pPr indent="0" marL="0">
+            <a:pPr marL="0" indent="0">
               <a:buNone/>
             </a:pPr>
             <a:r>
@@ -8036,7 +6422,7 @@
             <a:endParaRPr lang="en-US" sz="850" dirty="0"/>
           </a:p>
           <a:p>
-            <a:pPr indent="0" marL="0">
+            <a:pPr marL="0" indent="0">
               <a:buNone/>
             </a:pPr>
             <a:r>
@@ -8078,7 +6464,7 @@
             <a:prstDash val="solid"/>
           </a:ln>
           <a:effectLst>
-            <a:outerShdw sx="100000" sy="100000" kx="0" ky="0" algn="bl" rotWithShape="0" blurRad="88900" dist="25400" dir="8100000">
+            <a:outerShdw blurRad="88900" dist="25400" dir="8100000" algn="bl" rotWithShape="0">
               <a:srgbClr val="000000">
                 <a:alpha val="14000"/>
               </a:srgbClr>
@@ -8113,14 +6499,14 @@
       </p:sp>
       <p:pic>
         <p:nvPicPr>
-          <p:cNvPr id="40" name="Image 1" descr="preencoded.png">    </p:cNvPr>
+          <p:cNvPr id="40" name="Image 1" descr="preencoded.png"/>
           <p:cNvPicPr>
             <a:picLocks noChangeAspect="1"/>
           </p:cNvPicPr>
           <p:nvPr/>
         </p:nvPicPr>
         <p:blipFill>
-          <a:blip r:embed="rId2"/>
+          <a:blip r:embed="rId4"/>
           <a:stretch>
             <a:fillRect/>
           </a:stretch>
@@ -8156,7 +6542,7 @@
           <a:bodyPr wrap="square" rtlCol="0" anchor="ctr"/>
           <a:lstStyle/>
           <a:p>
-            <a:pPr indent="0" marL="0">
+            <a:pPr marL="0" indent="0">
               <a:buNone/>
             </a:pPr>
             <a:r>
@@ -8220,7 +6606,7 @@
           <a:bodyPr wrap="square" rtlCol="0" anchor="ctr"/>
           <a:lstStyle/>
           <a:p>
-            <a:pPr indent="0" marL="0">
+            <a:pPr marL="0" indent="0">
               <a:buNone/>
             </a:pPr>
             <a:r>
@@ -8259,7 +6645,7 @@
           <a:bodyPr wrap="square" rtlCol="0" anchor="ctr"/>
           <a:lstStyle/>
           <a:p>
-            <a:pPr indent="0" marL="0">
+            <a:pPr marL="0" indent="0">
               <a:buNone/>
             </a:pPr>
             <a:r>
@@ -8323,7 +6709,7 @@
           <a:bodyPr wrap="square" rtlCol="0" anchor="ctr"/>
           <a:lstStyle/>
           <a:p>
-            <a:pPr indent="0" marL="0">
+            <a:pPr marL="0" indent="0">
               <a:buNone/>
             </a:pPr>
             <a:r>
@@ -8362,7 +6748,7 @@
           <a:bodyPr wrap="square" rtlCol="0" anchor="ctr"/>
           <a:lstStyle/>
           <a:p>
-            <a:pPr indent="0" marL="0">
+            <a:pPr marL="0" indent="0">
               <a:buNone/>
             </a:pPr>
             <a:r>
@@ -8426,7 +6812,7 @@
           <a:bodyPr wrap="square" rtlCol="0" anchor="ctr"/>
           <a:lstStyle/>
           <a:p>
-            <a:pPr indent="0" marL="0">
+            <a:pPr marL="0" indent="0">
               <a:buNone/>
             </a:pPr>
             <a:r>
@@ -8465,7 +6851,7 @@
           <a:bodyPr wrap="square" rtlCol="0" anchor="ctr"/>
           <a:lstStyle/>
           <a:p>
-            <a:pPr indent="0" marL="0">
+            <a:pPr marL="0" indent="0">
               <a:buNone/>
             </a:pPr>
             <a:r>
@@ -8529,7 +6915,7 @@
           <a:bodyPr wrap="square" rtlCol="0" anchor="ctr"/>
           <a:lstStyle/>
           <a:p>
-            <a:pPr indent="0" marL="0">
+            <a:pPr marL="0" indent="0">
               <a:buNone/>
             </a:pPr>
             <a:r>
@@ -8568,7 +6954,7 @@
           <a:bodyPr wrap="square" rtlCol="0" anchor="ctr"/>
           <a:lstStyle/>
           <a:p>
-            <a:pPr indent="0" marL="0">
+            <a:pPr marL="0" indent="0">
               <a:buNone/>
             </a:pPr>
             <a:r>
@@ -8632,7 +7018,7 @@
           <a:bodyPr wrap="square" rtlCol="0" anchor="ctr"/>
           <a:lstStyle/>
           <a:p>
-            <a:pPr indent="0" marL="0">
+            <a:pPr marL="0" indent="0">
               <a:buNone/>
             </a:pPr>
             <a:r>
@@ -8671,7 +7057,7 @@
           <a:bodyPr wrap="square" rtlCol="0" anchor="ctr"/>
           <a:lstStyle/>
           <a:p>
-            <a:pPr indent="0" marL="0">
+            <a:pPr marL="0" indent="0">
               <a:buNone/>
             </a:pPr>
             <a:r>
@@ -8735,7 +7121,7 @@
           <a:bodyPr wrap="square" rtlCol="0" anchor="ctr"/>
           <a:lstStyle/>
           <a:p>
-            <a:pPr indent="0" marL="0">
+            <a:pPr marL="0" indent="0">
               <a:buNone/>
             </a:pPr>
             <a:r>
@@ -8774,7 +7160,7 @@
           <a:bodyPr wrap="square" rtlCol="0" anchor="ctr"/>
           <a:lstStyle/>
           <a:p>
-            <a:pPr indent="0" marL="0">
+            <a:pPr marL="0" indent="0">
               <a:buNone/>
             </a:pPr>
             <a:r>
@@ -8808,6 +7194,7 @@
         <a:solidFill>
           <a:srgbClr val="F1F5F9"/>
         </a:solidFill>
+        <a:effectLst/>
       </p:bgPr>
     </p:bg>
     <p:spTree>
@@ -8845,7 +7232,7 @@
           <a:bodyPr wrap="square" rtlCol="0" anchor="ctr"/>
           <a:lstStyle/>
           <a:p>
-            <a:pPr indent="0" marL="0">
+            <a:pPr marL="0" indent="0">
               <a:buNone/>
             </a:pPr>
             <a:r>
@@ -8884,7 +7271,7 @@
           <a:bodyPr wrap="square" rtlCol="0" anchor="ctr"/>
           <a:lstStyle/>
           <a:p>
-            <a:pPr indent="0" marL="0">
+            <a:pPr marL="0" indent="0">
               <a:buNone/>
             </a:pPr>
             <a:r>
@@ -8926,7 +7313,7 @@
             <a:prstDash val="solid"/>
           </a:ln>
           <a:effectLst>
-            <a:outerShdw sx="100000" sy="100000" kx="0" ky="0" algn="bl" rotWithShape="0" blurRad="88900" dist="25400" dir="8100000">
+            <a:outerShdw blurRad="88900" dist="25400" dir="8100000" algn="bl" rotWithShape="0">
               <a:srgbClr val="000000">
                 <a:alpha val="14000"/>
               </a:srgbClr>
@@ -8955,7 +7342,7 @@
           <a:bodyPr wrap="square" rtlCol="0" anchor="ctr"/>
           <a:lstStyle/>
           <a:p>
-            <a:pPr algn="ctr" indent="0" marL="0">
+            <a:pPr marL="0" indent="0" algn="ctr">
               <a:buNone/>
             </a:pPr>
             <a:r>
@@ -8972,7 +7359,7 @@
             <a:endParaRPr lang="en-US" sz="950" dirty="0"/>
           </a:p>
           <a:p>
-            <a:pPr algn="ctr" indent="0" marL="0">
+            <a:pPr marL="0" indent="0" algn="ctr">
               <a:buNone/>
             </a:pPr>
             <a:r>
@@ -8989,7 +7376,7 @@
             <a:endParaRPr lang="en-US" sz="950" dirty="0"/>
           </a:p>
           <a:p>
-            <a:pPr algn="ctr" indent="0" marL="0">
+            <a:pPr marL="0" indent="0" algn="ctr">
               <a:buNone/>
             </a:pPr>
             <a:r>
@@ -9009,14 +7396,14 @@
       </p:sp>
       <p:pic>
         <p:nvPicPr>
-          <p:cNvPr id="6" name="Image 0" descr="preencoded.png">    </p:cNvPr>
+          <p:cNvPr id="6" name="Image 0" descr="preencoded.png"/>
           <p:cNvPicPr>
             <a:picLocks noChangeAspect="1"/>
           </p:cNvPicPr>
           <p:nvPr/>
         </p:nvPicPr>
         <p:blipFill>
-          <a:blip r:embed="rId1"/>
+          <a:blip r:embed="rId3"/>
           <a:stretch>
             <a:fillRect/>
           </a:stretch>
@@ -9055,7 +7442,7 @@
             <a:prstDash val="solid"/>
           </a:ln>
           <a:effectLst>
-            <a:outerShdw sx="100000" sy="100000" kx="0" ky="0" algn="bl" rotWithShape="0" blurRad="88900" dist="25400" dir="8100000">
+            <a:outerShdw blurRad="88900" dist="25400" dir="8100000" algn="bl" rotWithShape="0">
               <a:srgbClr val="000000">
                 <a:alpha val="14000"/>
               </a:srgbClr>
@@ -9084,7 +7471,7 @@
           <a:bodyPr wrap="square" rtlCol="0" anchor="ctr"/>
           <a:lstStyle/>
           <a:p>
-            <a:pPr algn="ctr" indent="0" marL="0">
+            <a:pPr marL="0" indent="0" algn="ctr">
               <a:buNone/>
             </a:pPr>
             <a:r>
@@ -9101,7 +7488,7 @@
             <a:endParaRPr lang="en-US" sz="950" dirty="0"/>
           </a:p>
           <a:p>
-            <a:pPr algn="ctr" indent="0" marL="0">
+            <a:pPr marL="0" indent="0" algn="ctr">
               <a:buNone/>
             </a:pPr>
             <a:r>
@@ -9118,7 +7505,7 @@
             <a:endParaRPr lang="en-US" sz="950" dirty="0"/>
           </a:p>
           <a:p>
-            <a:pPr algn="ctr" indent="0" marL="0">
+            <a:pPr marL="0" indent="0" algn="ctr">
               <a:buNone/>
             </a:pPr>
             <a:r>
@@ -9138,14 +7525,14 @@
       </p:sp>
       <p:pic>
         <p:nvPicPr>
-          <p:cNvPr id="9" name="Image 1" descr="preencoded.png">    </p:cNvPr>
+          <p:cNvPr id="9" name="Image 1" descr="preencoded.png"/>
           <p:cNvPicPr>
             <a:picLocks noChangeAspect="1"/>
           </p:cNvPicPr>
           <p:nvPr/>
         </p:nvPicPr>
         <p:blipFill>
-          <a:blip r:embed="rId2"/>
+          <a:blip r:embed="rId3"/>
           <a:stretch>
             <a:fillRect/>
           </a:stretch>
@@ -9184,7 +7571,7 @@
             <a:prstDash val="solid"/>
           </a:ln>
           <a:effectLst>
-            <a:outerShdw sx="100000" sy="100000" kx="0" ky="0" algn="bl" rotWithShape="0" blurRad="88900" dist="25400" dir="8100000">
+            <a:outerShdw blurRad="88900" dist="25400" dir="8100000" algn="bl" rotWithShape="0">
               <a:srgbClr val="000000">
                 <a:alpha val="14000"/>
               </a:srgbClr>
@@ -9213,7 +7600,7 @@
           <a:bodyPr wrap="square" rtlCol="0" anchor="ctr"/>
           <a:lstStyle/>
           <a:p>
-            <a:pPr algn="ctr" indent="0" marL="0">
+            <a:pPr marL="0" indent="0" algn="ctr">
               <a:buNone/>
             </a:pPr>
             <a:r>
@@ -9230,7 +7617,7 @@
             <a:endParaRPr lang="en-US" sz="950" dirty="0"/>
           </a:p>
           <a:p>
-            <a:pPr algn="ctr" indent="0" marL="0">
+            <a:pPr marL="0" indent="0" algn="ctr">
               <a:buNone/>
             </a:pPr>
             <a:r>
@@ -9247,7 +7634,7 @@
             <a:endParaRPr lang="en-US" sz="950" dirty="0"/>
           </a:p>
           <a:p>
-            <a:pPr algn="ctr" indent="0" marL="0">
+            <a:pPr marL="0" indent="0" algn="ctr">
               <a:buNone/>
             </a:pPr>
             <a:r>
@@ -9267,7 +7654,7 @@
       </p:sp>
       <p:pic>
         <p:nvPicPr>
-          <p:cNvPr id="12" name="Image 2" descr="preencoded.png">    </p:cNvPr>
+          <p:cNvPr id="12" name="Image 2" descr="preencoded.png"/>
           <p:cNvPicPr>
             <a:picLocks noChangeAspect="1"/>
           </p:cNvPicPr>
@@ -9313,7 +7700,7 @@
             <a:prstDash val="solid"/>
           </a:ln>
           <a:effectLst>
-            <a:outerShdw sx="100000" sy="100000" kx="0" ky="0" algn="bl" rotWithShape="0" blurRad="88900" dist="25400" dir="8100000">
+            <a:outerShdw blurRad="88900" dist="25400" dir="8100000" algn="bl" rotWithShape="0">
               <a:srgbClr val="000000">
                 <a:alpha val="14000"/>
               </a:srgbClr>
@@ -9342,7 +7729,7 @@
           <a:bodyPr wrap="square" rtlCol="0" anchor="ctr"/>
           <a:lstStyle/>
           <a:p>
-            <a:pPr algn="ctr" indent="0" marL="0">
+            <a:pPr marL="0" indent="0" algn="ctr">
               <a:buNone/>
             </a:pPr>
             <a:r>
@@ -9359,7 +7746,7 @@
             <a:endParaRPr lang="en-US" sz="950" dirty="0"/>
           </a:p>
           <a:p>
-            <a:pPr algn="ctr" indent="0" marL="0">
+            <a:pPr marL="0" indent="0" algn="ctr">
               <a:buNone/>
             </a:pPr>
             <a:r>
@@ -9379,14 +7766,14 @@
       </p:sp>
       <p:pic>
         <p:nvPicPr>
-          <p:cNvPr id="15" name="Image 3" descr="preencoded.png">    </p:cNvPr>
+          <p:cNvPr id="15" name="Image 3" descr="preencoded.png"/>
           <p:cNvPicPr>
             <a:picLocks noChangeAspect="1"/>
           </p:cNvPicPr>
           <p:nvPr/>
         </p:nvPicPr>
         <p:blipFill>
-          <a:blip r:embed="rId4"/>
+          <a:blip r:embed="rId3"/>
           <a:stretch>
             <a:fillRect/>
           </a:stretch>
@@ -9425,7 +7812,7 @@
             <a:prstDash val="solid"/>
           </a:ln>
           <a:effectLst>
-            <a:outerShdw sx="100000" sy="100000" kx="0" ky="0" algn="bl" rotWithShape="0" blurRad="88900" dist="25400" dir="8100000">
+            <a:outerShdw blurRad="88900" dist="25400" dir="8100000" algn="bl" rotWithShape="0">
               <a:srgbClr val="000000">
                 <a:alpha val="14000"/>
               </a:srgbClr>
@@ -9454,7 +7841,7 @@
           <a:bodyPr wrap="square" rtlCol="0" anchor="ctr"/>
           <a:lstStyle/>
           <a:p>
-            <a:pPr algn="ctr" indent="0" marL="0">
+            <a:pPr marL="0" indent="0" algn="ctr">
               <a:buNone/>
             </a:pPr>
             <a:r>
@@ -9471,7 +7858,7 @@
             <a:endParaRPr lang="en-US" sz="950" dirty="0"/>
           </a:p>
           <a:p>
-            <a:pPr algn="ctr" indent="0" marL="0">
+            <a:pPr marL="0" indent="0" algn="ctr">
               <a:buNone/>
             </a:pPr>
             <a:r>
@@ -9491,14 +7878,14 @@
       </p:sp>
       <p:pic>
         <p:nvPicPr>
-          <p:cNvPr id="18" name="Image 4" descr="preencoded.png">    </p:cNvPr>
+          <p:cNvPr id="18" name="Image 4" descr="preencoded.png"/>
           <p:cNvPicPr>
             <a:picLocks noChangeAspect="1"/>
           </p:cNvPicPr>
           <p:nvPr/>
         </p:nvPicPr>
         <p:blipFill>
-          <a:blip r:embed="rId5"/>
+          <a:blip r:embed="rId3"/>
           <a:stretch>
             <a:fillRect/>
           </a:stretch>
@@ -9537,7 +7924,7 @@
             <a:prstDash val="solid"/>
           </a:ln>
           <a:effectLst>
-            <a:outerShdw sx="100000" sy="100000" kx="0" ky="0" algn="bl" rotWithShape="0" blurRad="88900" dist="25400" dir="8100000">
+            <a:outerShdw blurRad="88900" dist="25400" dir="8100000" algn="bl" rotWithShape="0">
               <a:srgbClr val="000000">
                 <a:alpha val="14000"/>
               </a:srgbClr>
@@ -9566,7 +7953,7 @@
           <a:bodyPr wrap="square" rtlCol="0" anchor="ctr"/>
           <a:lstStyle/>
           <a:p>
-            <a:pPr algn="ctr" indent="0" marL="0">
+            <a:pPr marL="0" indent="0" algn="ctr">
               <a:buNone/>
             </a:pPr>
             <a:r>
@@ -9583,7 +7970,7 @@
             <a:endParaRPr lang="en-US" sz="950" dirty="0"/>
           </a:p>
           <a:p>
-            <a:pPr algn="ctr" indent="0" marL="0">
+            <a:pPr marL="0" indent="0" algn="ctr">
               <a:buNone/>
             </a:pPr>
             <a:r>
@@ -9625,7 +8012,7 @@
             <a:prstDash val="solid"/>
           </a:ln>
           <a:effectLst>
-            <a:outerShdw sx="100000" sy="100000" kx="0" ky="0" algn="bl" rotWithShape="0" blurRad="88900" dist="25400" dir="8100000">
+            <a:outerShdw blurRad="88900" dist="25400" dir="8100000" algn="bl" rotWithShape="0">
               <a:srgbClr val="000000">
                 <a:alpha val="14000"/>
               </a:srgbClr>
@@ -9679,7 +8066,7 @@
           <a:bodyPr wrap="square" rtlCol="0" anchor="ctr"/>
           <a:lstStyle/>
           <a:p>
-            <a:pPr indent="0" marL="0">
+            <a:pPr marL="0" indent="0">
               <a:buNone/>
             </a:pPr>
             <a:r>
@@ -9718,7 +8105,7 @@
           <a:bodyPr wrap="square" rtlCol="0" anchor="ctr"/>
           <a:lstStyle/>
           <a:p>
-            <a:pPr indent="0" marL="0">
+            <a:pPr marL="0" indent="0">
               <a:buNone/>
             </a:pPr>
             <a:r>
@@ -9735,7 +8122,7 @@
             <a:endParaRPr lang="en-US" sz="900" dirty="0"/>
           </a:p>
           <a:p>
-            <a:pPr indent="0" marL="0">
+            <a:pPr marL="0" indent="0">
               <a:buNone/>
             </a:pPr>
             <a:r>
@@ -9752,7 +8139,7 @@
             <a:endParaRPr lang="en-US" sz="900" dirty="0"/>
           </a:p>
           <a:p>
-            <a:pPr indent="0" marL="0">
+            <a:pPr marL="0" indent="0">
               <a:buNone/>
             </a:pPr>
             <a:r>
@@ -9769,7 +8156,7 @@
             <a:endParaRPr lang="en-US" sz="900" dirty="0"/>
           </a:p>
           <a:p>
-            <a:pPr indent="0" marL="0">
+            <a:pPr marL="0" indent="0">
               <a:buNone/>
             </a:pPr>
             <a:r>
@@ -9808,7 +8195,7 @@
           <a:bodyPr wrap="square" rtlCol="0" anchor="ctr"/>
           <a:lstStyle/>
           <a:p>
-            <a:pPr indent="0" marL="0">
+            <a:pPr marL="0" indent="0">
               <a:buNone/>
             </a:pPr>
             <a:r>
@@ -9872,7 +8259,7 @@
           <a:bodyPr wrap="square" rtlCol="0" anchor="ctr"/>
           <a:lstStyle/>
           <a:p>
-            <a:pPr indent="0" marL="0">
+            <a:pPr marL="0" indent="0">
               <a:buNone/>
             </a:pPr>
             <a:r>
@@ -9911,7 +8298,7 @@
           <a:bodyPr wrap="square" rtlCol="0" anchor="ctr"/>
           <a:lstStyle/>
           <a:p>
-            <a:pPr indent="0" marL="0">
+            <a:pPr marL="0" indent="0">
               <a:buNone/>
             </a:pPr>
             <a:r>
@@ -9975,7 +8362,7 @@
           <a:bodyPr wrap="square" rtlCol="0" anchor="ctr"/>
           <a:lstStyle/>
           <a:p>
-            <a:pPr indent="0" marL="0">
+            <a:pPr marL="0" indent="0">
               <a:buNone/>
             </a:pPr>
             <a:r>
@@ -10014,7 +8401,7 @@
           <a:bodyPr wrap="square" rtlCol="0" anchor="ctr"/>
           <a:lstStyle/>
           <a:p>
-            <a:pPr indent="0" marL="0">
+            <a:pPr marL="0" indent="0">
               <a:buNone/>
             </a:pPr>
             <a:r>
@@ -10078,7 +8465,7 @@
           <a:bodyPr wrap="square" rtlCol="0" anchor="ctr"/>
           <a:lstStyle/>
           <a:p>
-            <a:pPr indent="0" marL="0">
+            <a:pPr marL="0" indent="0">
               <a:buNone/>
             </a:pPr>
             <a:r>
@@ -10117,7 +8504,7 @@
           <a:bodyPr wrap="square" rtlCol="0" anchor="ctr"/>
           <a:lstStyle/>
           <a:p>
-            <a:pPr indent="0" marL="0">
+            <a:pPr marL="0" indent="0">
               <a:buNone/>
             </a:pPr>
             <a:r>
@@ -10181,7 +8568,7 @@
           <a:bodyPr wrap="square" rtlCol="0" anchor="ctr"/>
           <a:lstStyle/>
           <a:p>
-            <a:pPr indent="0" marL="0">
+            <a:pPr marL="0" indent="0">
               <a:buNone/>
             </a:pPr>
             <a:r>
@@ -10220,7 +8607,7 @@
           <a:bodyPr wrap="square" rtlCol="0" anchor="ctr"/>
           <a:lstStyle/>
           <a:p>
-            <a:pPr indent="0" marL="0">
+            <a:pPr marL="0" indent="0">
               <a:buNone/>
             </a:pPr>
             <a:r>
@@ -10284,7 +8671,7 @@
           <a:bodyPr wrap="square" rtlCol="0" anchor="ctr"/>
           <a:lstStyle/>
           <a:p>
-            <a:pPr indent="0" marL="0">
+            <a:pPr marL="0" indent="0">
               <a:buNone/>
             </a:pPr>
             <a:r>
@@ -10323,7 +8710,7 @@
           <a:bodyPr wrap="square" rtlCol="0" anchor="ctr"/>
           <a:lstStyle/>
           <a:p>
-            <a:pPr indent="0" marL="0">
+            <a:pPr marL="0" indent="0">
               <a:buNone/>
             </a:pPr>
             <a:r>
@@ -10357,6 +8744,7 @@
         <a:solidFill>
           <a:srgbClr val="1B2A4A"/>
         </a:solidFill>
+        <a:effectLst/>
       </p:bgPr>
     </p:bg>
     <p:spTree>
@@ -10394,7 +8782,7 @@
           <a:bodyPr wrap="square" rtlCol="0" anchor="ctr"/>
           <a:lstStyle/>
           <a:p>
-            <a:pPr indent="0" marL="0">
+            <a:pPr marL="0" indent="0">
               <a:buNone/>
             </a:pPr>
             <a:r>
@@ -10458,7 +8846,7 @@
           <a:bodyPr wrap="square" rtlCol="0" anchor="ctr"/>
           <a:lstStyle/>
           <a:p>
-            <a:pPr indent="0" marL="0">
+            <a:pPr marL="0" indent="0">
               <a:buNone/>
             </a:pPr>
             <a:r>
@@ -10497,7 +8885,7 @@
           <a:bodyPr wrap="square" rtlCol="0" anchor="ctr"/>
           <a:lstStyle/>
           <a:p>
-            <a:pPr indent="0" marL="0">
+            <a:pPr marL="0" indent="0">
               <a:buNone/>
             </a:pPr>
             <a:r>
@@ -10536,7 +8924,7 @@
           <a:bodyPr wrap="square" rtlCol="0" anchor="ctr"/>
           <a:lstStyle/>
           <a:p>
-            <a:pPr algn="ctr" indent="0" marL="0">
+            <a:pPr marL="0" indent="0" algn="ctr">
               <a:buNone/>
             </a:pPr>
             <a:r>
@@ -10575,7 +8963,7 @@
           <a:bodyPr wrap="square" rtlCol="0" anchor="ctr"/>
           <a:lstStyle/>
           <a:p>
-            <a:pPr algn="ctr" indent="0" marL="0">
+            <a:pPr marL="0" indent="0" algn="ctr">
               <a:buNone/>
             </a:pPr>
             <a:r>
@@ -10614,7 +9002,7 @@
           <a:bodyPr wrap="square" rtlCol="0" anchor="ctr"/>
           <a:lstStyle/>
           <a:p>
-            <a:pPr algn="ctr" indent="0" marL="0">
+            <a:pPr marL="0" indent="0" algn="ctr">
               <a:buNone/>
             </a:pPr>
             <a:r>
@@ -10653,7 +9041,7 @@
           <a:bodyPr wrap="square" rtlCol="0" anchor="ctr"/>
           <a:lstStyle/>
           <a:p>
-            <a:pPr algn="ctr" indent="0" marL="0">
+            <a:pPr marL="0" indent="0" algn="ctr">
               <a:buNone/>
             </a:pPr>
             <a:r>
@@ -10692,7 +9080,7 @@
           <a:bodyPr wrap="square" rtlCol="0" anchor="ctr"/>
           <a:lstStyle/>
           <a:p>
-            <a:pPr algn="ctr" indent="0" marL="0">
+            <a:pPr marL="0" indent="0" algn="ctr">
               <a:buNone/>
             </a:pPr>
             <a:r>
@@ -10709,7 +9097,7 @@
             <a:endParaRPr lang="en-US" sz="800" dirty="0"/>
           </a:p>
           <a:p>
-            <a:pPr algn="ctr" indent="0" marL="0">
+            <a:pPr marL="0" indent="0" algn="ctr">
               <a:buNone/>
             </a:pPr>
             <a:r>
@@ -10773,7 +9161,7 @@
           <a:bodyPr wrap="square" rtlCol="0" anchor="ctr"/>
           <a:lstStyle/>
           <a:p>
-            <a:pPr indent="0" marL="0">
+            <a:pPr marL="0" indent="0">
               <a:buNone/>
             </a:pPr>
             <a:r>
@@ -10812,7 +9200,7 @@
           <a:bodyPr wrap="square" rtlCol="0" anchor="ctr"/>
           <a:lstStyle/>
           <a:p>
-            <a:pPr indent="0" marL="0">
+            <a:pPr marL="0" indent="0">
               <a:buNone/>
             </a:pPr>
             <a:r>
@@ -10851,7 +9239,7 @@
           <a:bodyPr wrap="square" rtlCol="0" anchor="ctr"/>
           <a:lstStyle/>
           <a:p>
-            <a:pPr algn="ctr" indent="0" marL="0">
+            <a:pPr marL="0" indent="0" algn="ctr">
               <a:buNone/>
             </a:pPr>
             <a:r>
@@ -10890,7 +9278,7 @@
           <a:bodyPr wrap="square" rtlCol="0" anchor="ctr"/>
           <a:lstStyle/>
           <a:p>
-            <a:pPr algn="ctr" indent="0" marL="0">
+            <a:pPr marL="0" indent="0" algn="ctr">
               <a:buNone/>
             </a:pPr>
             <a:r>
@@ -10929,7 +9317,7 @@
           <a:bodyPr wrap="square" rtlCol="0" anchor="ctr"/>
           <a:lstStyle/>
           <a:p>
-            <a:pPr algn="ctr" indent="0" marL="0">
+            <a:pPr marL="0" indent="0" algn="ctr">
               <a:buNone/>
             </a:pPr>
             <a:r>
@@ -10995,7 +9383,7 @@
           <a:bodyPr wrap="square" rtlCol="0" anchor="ctr"/>
           <a:lstStyle/>
           <a:p>
-            <a:pPr algn="ctr" indent="0" marL="0">
+            <a:pPr marL="0" indent="0" algn="ctr">
               <a:buNone/>
             </a:pPr>
             <a:r>
@@ -11029,6 +9417,7 @@
         <a:solidFill>
           <a:srgbClr val="F1F5F9"/>
         </a:solidFill>
+        <a:effectLst/>
       </p:bgPr>
     </p:bg>
     <p:spTree>
@@ -11066,7 +9455,7 @@
           <a:bodyPr wrap="square" rtlCol="0" anchor="ctr"/>
           <a:lstStyle/>
           <a:p>
-            <a:pPr indent="0" marL="0">
+            <a:pPr marL="0" indent="0">
               <a:buNone/>
             </a:pPr>
             <a:r>
@@ -11086,7 +9475,7 @@
       </p:sp>
       <p:graphicFrame>
         <p:nvGraphicFramePr>
-          <p:cNvPr id="3" name="Chart 0" descr=""/>
+          <p:cNvPr id="3" name="Chart 0"/>
           <p:cNvGraphicFramePr/>
           <p:nvPr/>
         </p:nvGraphicFramePr>
@@ -11094,15 +9483,15 @@
           <a:off x="365760" y="804672"/>
           <a:ext cx="4023360" cy="3200400"/>
         </p:xfrm>
-        <a:graphic xmlns:a="http://schemas.openxmlformats.org/drawingml/2006/main">
+        <a:graphic>
           <a:graphicData uri="http://schemas.openxmlformats.org/drawingml/2006/chart">
-            <c:chart xmlns:c="http://schemas.openxmlformats.org/drawingml/2006/chart" r:id="rId1"/>
+            <c:chart xmlns:c="http://schemas.openxmlformats.org/drawingml/2006/chart" xmlns:r="http://schemas.openxmlformats.org/officeDocument/2006/relationships" r:id="rId3"/>
           </a:graphicData>
         </a:graphic>
       </p:graphicFrame>
       <p:graphicFrame>
         <p:nvGraphicFramePr>
-          <p:cNvPr id="4" name="Chart 1" descr=""/>
+          <p:cNvPr id="4" name="Chart 1"/>
           <p:cNvGraphicFramePr/>
           <p:nvPr/>
         </p:nvGraphicFramePr>
@@ -11110,9 +9499,9 @@
           <a:off x="4663440" y="804672"/>
           <a:ext cx="4023360" cy="3200400"/>
         </p:xfrm>
-        <a:graphic xmlns:a="http://schemas.openxmlformats.org/drawingml/2006/main">
+        <a:graphic>
           <a:graphicData uri="http://schemas.openxmlformats.org/drawingml/2006/chart">
-            <c:chart xmlns:c="http://schemas.openxmlformats.org/drawingml/2006/chart" r:id="rId2"/>
+            <c:chart xmlns:c="http://schemas.openxmlformats.org/drawingml/2006/chart" xmlns:r="http://schemas.openxmlformats.org/officeDocument/2006/relationships" r:id="rId4"/>
           </a:graphicData>
         </a:graphic>
       </p:graphicFrame>
@@ -11140,7 +9529,7 @@
             <a:prstDash val="solid"/>
           </a:ln>
           <a:effectLst>
-            <a:outerShdw sx="100000" sy="100000" kx="0" ky="0" algn="bl" rotWithShape="0" blurRad="88900" dist="25400" dir="8100000">
+            <a:outerShdw blurRad="88900" dist="25400" dir="8100000" algn="bl" rotWithShape="0">
               <a:srgbClr val="000000">
                 <a:alpha val="14000"/>
               </a:srgbClr>
@@ -11169,7 +9558,7 @@
           <a:bodyPr wrap="square" rtlCol="0" anchor="ctr"/>
           <a:lstStyle/>
           <a:p>
-            <a:pPr indent="0" marL="0">
+            <a:pPr marL="0" indent="0">
               <a:buNone/>
             </a:pPr>
             <a:r>
@@ -11288,6 +9677,7 @@
         <a:solidFill>
           <a:srgbClr val="F1F5F9"/>
         </a:solidFill>
+        <a:effectLst/>
       </p:bgPr>
     </p:bg>
     <p:spTree>
@@ -11325,7 +9715,7 @@
           <a:bodyPr wrap="square" rtlCol="0" anchor="ctr"/>
           <a:lstStyle/>
           <a:p>
-            <a:pPr indent="0" marL="0">
+            <a:pPr marL="0" indent="0">
               <a:buNone/>
             </a:pPr>
             <a:r>
@@ -11364,7 +9754,7 @@
           <a:bodyPr wrap="square" rtlCol="0" anchor="ctr"/>
           <a:lstStyle/>
           <a:p>
-            <a:pPr algn="r" indent="0" marL="0">
+            <a:pPr marL="0" indent="0" algn="r">
               <a:buNone/>
             </a:pPr>
             <a:r>
@@ -11403,7 +9793,7 @@
           <a:bodyPr wrap="square" rtlCol="0" anchor="ctr"/>
           <a:lstStyle/>
           <a:p>
-            <a:pPr algn="r" indent="0" marL="0">
+            <a:pPr marL="0" indent="0" algn="r">
               <a:buNone/>
             </a:pPr>
             <a:r>
@@ -11442,7 +9832,7 @@
           <a:bodyPr wrap="square" rtlCol="0" anchor="ctr"/>
           <a:lstStyle/>
           <a:p>
-            <a:pPr algn="r" indent="0" marL="0">
+            <a:pPr marL="0" indent="0" algn="r">
               <a:buNone/>
             </a:pPr>
             <a:r>
@@ -11481,7 +9871,7 @@
           <a:bodyPr wrap="square" rtlCol="0" anchor="ctr"/>
           <a:lstStyle/>
           <a:p>
-            <a:pPr algn="r" indent="0" marL="0">
+            <a:pPr marL="0" indent="0" algn="r">
               <a:buNone/>
             </a:pPr>
             <a:r>
@@ -11520,7 +9910,7 @@
           <a:bodyPr wrap="square" rtlCol="0" anchor="ctr"/>
           <a:lstStyle/>
           <a:p>
-            <a:pPr algn="r" indent="0" marL="0">
+            <a:pPr marL="0" indent="0" algn="r">
               <a:buNone/>
             </a:pPr>
             <a:r>
@@ -11559,7 +9949,7 @@
           <a:bodyPr wrap="square" rtlCol="0" anchor="ctr"/>
           <a:lstStyle/>
           <a:p>
-            <a:pPr algn="ctr" indent="0" marL="0">
+            <a:pPr marL="0" indent="0" algn="ctr">
               <a:buNone/>
             </a:pPr>
             <a:r>
@@ -11598,7 +9988,7 @@
           <a:bodyPr wrap="square" rtlCol="0" anchor="ctr"/>
           <a:lstStyle/>
           <a:p>
-            <a:pPr algn="ctr" indent="0" marL="0">
+            <a:pPr marL="0" indent="0" algn="ctr">
               <a:buNone/>
             </a:pPr>
             <a:r>
@@ -11637,7 +10027,7 @@
           <a:bodyPr wrap="square" rtlCol="0" anchor="ctr"/>
           <a:lstStyle/>
           <a:p>
-            <a:pPr algn="ctr" indent="0" marL="0">
+            <a:pPr marL="0" indent="0" algn="ctr">
               <a:buNone/>
             </a:pPr>
             <a:r>
@@ -11676,7 +10066,7 @@
           <a:bodyPr wrap="square" rtlCol="0" anchor="ctr"/>
           <a:lstStyle/>
           <a:p>
-            <a:pPr algn="ctr" indent="0" marL="0">
+            <a:pPr marL="0" indent="0" algn="ctr">
               <a:buNone/>
             </a:pPr>
             <a:r>
@@ -11715,7 +10105,7 @@
           <a:bodyPr wrap="square" rtlCol="0" anchor="ctr"/>
           <a:lstStyle/>
           <a:p>
-            <a:pPr algn="ctr" indent="0" marL="0">
+            <a:pPr marL="0" indent="0" algn="ctr">
               <a:buNone/>
             </a:pPr>
             <a:r>
@@ -11779,7 +10169,7 @@
           <a:bodyPr wrap="square" rtlCol="0" anchor="ctr"/>
           <a:lstStyle/>
           <a:p>
-            <a:pPr algn="ctr" indent="0" marL="0">
+            <a:pPr marL="0" indent="0" algn="ctr">
               <a:buNone/>
             </a:pPr>
             <a:r>
@@ -11843,7 +10233,7 @@
           <a:bodyPr wrap="square" rtlCol="0" anchor="ctr"/>
           <a:lstStyle/>
           <a:p>
-            <a:pPr algn="ctr" indent="0" marL="0">
+            <a:pPr marL="0" indent="0" algn="ctr">
               <a:buNone/>
             </a:pPr>
             <a:r>
@@ -11907,7 +10297,7 @@
           <a:bodyPr wrap="square" rtlCol="0" anchor="ctr"/>
           <a:lstStyle/>
           <a:p>
-            <a:pPr algn="ctr" indent="0" marL="0">
+            <a:pPr marL="0" indent="0" algn="ctr">
               <a:buNone/>
             </a:pPr>
             <a:r>
@@ -11971,7 +10361,7 @@
           <a:bodyPr wrap="square" rtlCol="0" anchor="ctr"/>
           <a:lstStyle/>
           <a:p>
-            <a:pPr algn="ctr" indent="0" marL="0">
+            <a:pPr marL="0" indent="0" algn="ctr">
               <a:buNone/>
             </a:pPr>
             <a:r>
@@ -12035,7 +10425,7 @@
           <a:bodyPr wrap="square" rtlCol="0" anchor="ctr"/>
           <a:lstStyle/>
           <a:p>
-            <a:pPr algn="ctr" indent="0" marL="0">
+            <a:pPr marL="0" indent="0" algn="ctr">
               <a:buNone/>
             </a:pPr>
             <a:r>
@@ -12099,7 +10489,7 @@
           <a:bodyPr wrap="square" rtlCol="0" anchor="ctr"/>
           <a:lstStyle/>
           <a:p>
-            <a:pPr algn="ctr" indent="0" marL="0">
+            <a:pPr marL="0" indent="0" algn="ctr">
               <a:buNone/>
             </a:pPr>
             <a:r>
@@ -12163,7 +10553,7 @@
           <a:bodyPr wrap="square" rtlCol="0" anchor="ctr"/>
           <a:lstStyle/>
           <a:p>
-            <a:pPr algn="ctr" indent="0" marL="0">
+            <a:pPr marL="0" indent="0" algn="ctr">
               <a:buNone/>
             </a:pPr>
             <a:r>
@@ -12227,7 +10617,7 @@
           <a:bodyPr wrap="square" rtlCol="0" anchor="ctr"/>
           <a:lstStyle/>
           <a:p>
-            <a:pPr algn="ctr" indent="0" marL="0">
+            <a:pPr marL="0" indent="0" algn="ctr">
               <a:buNone/>
             </a:pPr>
             <a:r>
@@ -12291,7 +10681,7 @@
           <a:bodyPr wrap="square" rtlCol="0" anchor="ctr"/>
           <a:lstStyle/>
           <a:p>
-            <a:pPr algn="ctr" indent="0" marL="0">
+            <a:pPr marL="0" indent="0" algn="ctr">
               <a:buNone/>
             </a:pPr>
             <a:r>
@@ -12355,7 +10745,7 @@
           <a:bodyPr wrap="square" rtlCol="0" anchor="ctr"/>
           <a:lstStyle/>
           <a:p>
-            <a:pPr algn="ctr" indent="0" marL="0">
+            <a:pPr marL="0" indent="0" algn="ctr">
               <a:buNone/>
             </a:pPr>
             <a:r>
@@ -12419,7 +10809,7 @@
           <a:bodyPr wrap="square" rtlCol="0" anchor="ctr"/>
           <a:lstStyle/>
           <a:p>
-            <a:pPr algn="ctr" indent="0" marL="0">
+            <a:pPr marL="0" indent="0" algn="ctr">
               <a:buNone/>
             </a:pPr>
             <a:r>
@@ -12483,7 +10873,7 @@
           <a:bodyPr wrap="square" rtlCol="0" anchor="ctr"/>
           <a:lstStyle/>
           <a:p>
-            <a:pPr algn="ctr" indent="0" marL="0">
+            <a:pPr marL="0" indent="0" algn="ctr">
               <a:buNone/>
             </a:pPr>
             <a:r>
@@ -12547,7 +10937,7 @@
           <a:bodyPr wrap="square" rtlCol="0" anchor="ctr"/>
           <a:lstStyle/>
           <a:p>
-            <a:pPr algn="ctr" indent="0" marL="0">
+            <a:pPr marL="0" indent="0" algn="ctr">
               <a:buNone/>
             </a:pPr>
             <a:r>
@@ -12611,7 +11001,7 @@
           <a:bodyPr wrap="square" rtlCol="0" anchor="ctr"/>
           <a:lstStyle/>
           <a:p>
-            <a:pPr algn="ctr" indent="0" marL="0">
+            <a:pPr marL="0" indent="0" algn="ctr">
               <a:buNone/>
             </a:pPr>
             <a:r>
@@ -12675,7 +11065,7 @@
           <a:bodyPr wrap="square" rtlCol="0" anchor="ctr"/>
           <a:lstStyle/>
           <a:p>
-            <a:pPr algn="ctr" indent="0" marL="0">
+            <a:pPr marL="0" indent="0" algn="ctr">
               <a:buNone/>
             </a:pPr>
             <a:r>
@@ -12739,7 +11129,7 @@
           <a:bodyPr wrap="square" rtlCol="0" anchor="ctr"/>
           <a:lstStyle/>
           <a:p>
-            <a:pPr algn="ctr" indent="0" marL="0">
+            <a:pPr marL="0" indent="0" algn="ctr">
               <a:buNone/>
             </a:pPr>
             <a:r>
@@ -12803,7 +11193,7 @@
           <a:bodyPr wrap="square" rtlCol="0" anchor="ctr"/>
           <a:lstStyle/>
           <a:p>
-            <a:pPr algn="ctr" indent="0" marL="0">
+            <a:pPr marL="0" indent="0" algn="ctr">
               <a:buNone/>
             </a:pPr>
             <a:r>
@@ -12867,7 +11257,7 @@
           <a:bodyPr wrap="square" rtlCol="0" anchor="ctr"/>
           <a:lstStyle/>
           <a:p>
-            <a:pPr algn="ctr" indent="0" marL="0">
+            <a:pPr marL="0" indent="0" algn="ctr">
               <a:buNone/>
             </a:pPr>
             <a:r>
@@ -12931,7 +11321,7 @@
           <a:bodyPr wrap="square" rtlCol="0" anchor="ctr"/>
           <a:lstStyle/>
           <a:p>
-            <a:pPr algn="ctr" indent="0" marL="0">
+            <a:pPr marL="0" indent="0" algn="ctr">
               <a:buNone/>
             </a:pPr>
             <a:r>
@@ -12995,7 +11385,7 @@
           <a:bodyPr wrap="square" rtlCol="0" anchor="ctr"/>
           <a:lstStyle/>
           <a:p>
-            <a:pPr algn="ctr" indent="0" marL="0">
+            <a:pPr marL="0" indent="0" algn="ctr">
               <a:buNone/>
             </a:pPr>
             <a:r>
@@ -13059,7 +11449,7 @@
           <a:bodyPr wrap="square" rtlCol="0" anchor="ctr"/>
           <a:lstStyle/>
           <a:p>
-            <a:pPr algn="ctr" indent="0" marL="0">
+            <a:pPr marL="0" indent="0" algn="ctr">
               <a:buNone/>
             </a:pPr>
             <a:r>
@@ -13123,7 +11513,7 @@
           <a:bodyPr wrap="square" rtlCol="0" anchor="ctr"/>
           <a:lstStyle/>
           <a:p>
-            <a:pPr algn="ctr" indent="0" marL="0">
+            <a:pPr marL="0" indent="0" algn="ctr">
               <a:buNone/>
             </a:pPr>
             <a:r>
@@ -13187,7 +11577,7 @@
           <a:bodyPr wrap="square" rtlCol="0" anchor="ctr"/>
           <a:lstStyle/>
           <a:p>
-            <a:pPr algn="ctr" indent="0" marL="0">
+            <a:pPr marL="0" indent="0" algn="ctr">
               <a:buNone/>
             </a:pPr>
             <a:r>
@@ -13251,7 +11641,7 @@
           <a:bodyPr wrap="square" rtlCol="0" anchor="ctr"/>
           <a:lstStyle/>
           <a:p>
-            <a:pPr algn="ctr" indent="0" marL="0">
+            <a:pPr marL="0" indent="0" algn="ctr">
               <a:buNone/>
             </a:pPr>
             <a:r>
@@ -13315,7 +11705,7 @@
           <a:bodyPr wrap="square" rtlCol="0" anchor="ctr"/>
           <a:lstStyle/>
           <a:p>
-            <a:pPr algn="ctr" indent="0" marL="0">
+            <a:pPr marL="0" indent="0" algn="ctr">
               <a:buNone/>
             </a:pPr>
             <a:r>
@@ -13354,7 +11744,7 @@
           <a:bodyPr wrap="square" rtlCol="0" anchor="ctr"/>
           <a:lstStyle/>
           <a:p>
-            <a:pPr algn="ctr" indent="0" marL="0">
+            <a:pPr marL="0" indent="0" algn="ctr">
               <a:buNone/>
             </a:pPr>
             <a:r>
@@ -13393,7 +11783,7 @@
           <a:bodyPr wrap="square" rtlCol="0" anchor="ctr"/>
           <a:lstStyle/>
           <a:p>
-            <a:pPr algn="ctr" indent="0" marL="0">
+            <a:pPr marL="0" indent="0" algn="ctr">
               <a:buNone/>
             </a:pPr>
             <a:r>
@@ -13435,7 +11825,7 @@
             <a:prstDash val="solid"/>
           </a:ln>
           <a:effectLst>
-            <a:outerShdw sx="100000" sy="100000" kx="0" ky="0" algn="bl" rotWithShape="0" blurRad="88900" dist="25400" dir="8100000">
+            <a:outerShdw blurRad="88900" dist="25400" dir="8100000" algn="bl" rotWithShape="0">
               <a:srgbClr val="000000">
                 <a:alpha val="14000"/>
               </a:srgbClr>
@@ -13489,7 +11879,7 @@
           <a:bodyPr wrap="square" rtlCol="0" anchor="ctr"/>
           <a:lstStyle/>
           <a:p>
-            <a:pPr algn="ctr" indent="0" marL="0">
+            <a:pPr marL="0" indent="0" algn="ctr">
               <a:buNone/>
             </a:pPr>
             <a:r>
@@ -13553,7 +11943,7 @@
           <a:bodyPr wrap="square" rtlCol="0" anchor="ctr"/>
           <a:lstStyle/>
           <a:p>
-            <a:pPr algn="ctr" indent="0" marL="0">
+            <a:pPr marL="0" indent="0" algn="ctr">
               <a:buNone/>
             </a:pPr>
             <a:r>
@@ -13570,7 +11960,7 @@
             <a:endParaRPr lang="en-US" sz="1000" dirty="0"/>
           </a:p>
           <a:p>
-            <a:pPr algn="ctr" indent="0" marL="0">
+            <a:pPr marL="0" indent="0" algn="ctr">
               <a:buNone/>
             </a:pPr>
             <a:r>
@@ -13609,7 +11999,7 @@
           <a:bodyPr wrap="square" rtlCol="0" anchor="ctr"/>
           <a:lstStyle/>
           <a:p>
-            <a:pPr algn="ctr" indent="0" marL="0">
+            <a:pPr marL="0" indent="0" algn="ctr">
               <a:buNone/>
             </a:pPr>
             <a:r>
@@ -13626,7 +12016,7 @@
             <a:endParaRPr lang="en-US" sz="900" dirty="0"/>
           </a:p>
           <a:p>
-            <a:pPr algn="ctr" indent="0" marL="0">
+            <a:pPr marL="0" indent="0" algn="ctr">
               <a:buNone/>
             </a:pPr>
             <a:r>
@@ -13690,7 +12080,7 @@
           <a:bodyPr wrap="square" rtlCol="0" anchor="ctr"/>
           <a:lstStyle/>
           <a:p>
-            <a:pPr algn="ctr" indent="0" marL="0">
+            <a:pPr marL="0" indent="0" algn="ctr">
               <a:buNone/>
             </a:pPr>
             <a:r>
@@ -13707,7 +12097,7 @@
             <a:endParaRPr lang="en-US" sz="1000" dirty="0"/>
           </a:p>
           <a:p>
-            <a:pPr algn="ctr" indent="0" marL="0">
+            <a:pPr marL="0" indent="0" algn="ctr">
               <a:buNone/>
             </a:pPr>
             <a:r>
@@ -13746,7 +12136,7 @@
           <a:bodyPr wrap="square" rtlCol="0" anchor="ctr"/>
           <a:lstStyle/>
           <a:p>
-            <a:pPr algn="ctr" indent="0" marL="0">
+            <a:pPr marL="0" indent="0" algn="ctr">
               <a:buNone/>
             </a:pPr>
             <a:r>
@@ -13763,7 +12153,7 @@
             <a:endParaRPr lang="en-US" sz="900" dirty="0"/>
           </a:p>
           <a:p>
-            <a:pPr algn="ctr" indent="0" marL="0">
+            <a:pPr marL="0" indent="0" algn="ctr">
               <a:buNone/>
             </a:pPr>
             <a:r>
@@ -13827,7 +12217,7 @@
           <a:bodyPr wrap="square" rtlCol="0" anchor="ctr"/>
           <a:lstStyle/>
           <a:p>
-            <a:pPr algn="ctr" indent="0" marL="0">
+            <a:pPr marL="0" indent="0" algn="ctr">
               <a:buNone/>
             </a:pPr>
             <a:r>
@@ -13866,7 +12256,7 @@
           <a:bodyPr wrap="square" rtlCol="0" anchor="ctr"/>
           <a:lstStyle/>
           <a:p>
-            <a:pPr algn="ctr" indent="0" marL="0">
+            <a:pPr marL="0" indent="0" algn="ctr">
               <a:buNone/>
             </a:pPr>
             <a:r>
@@ -13883,7 +12273,7 @@
             <a:endParaRPr lang="en-US" sz="900" dirty="0"/>
           </a:p>
           <a:p>
-            <a:pPr algn="ctr" indent="0" marL="0">
+            <a:pPr marL="0" indent="0" algn="ctr">
               <a:buNone/>
             </a:pPr>
             <a:r>
@@ -13925,7 +12315,7 @@
             <a:prstDash val="solid"/>
           </a:ln>
           <a:effectLst>
-            <a:outerShdw sx="100000" sy="100000" kx="0" ky="0" algn="bl" rotWithShape="0" blurRad="88900" dist="25400" dir="8100000">
+            <a:outerShdw blurRad="88900" dist="25400" dir="8100000" algn="bl" rotWithShape="0">
               <a:srgbClr val="000000">
                 <a:alpha val="14000"/>
               </a:srgbClr>
@@ -13954,7 +12344,7 @@
           <a:bodyPr wrap="square" rtlCol="0" anchor="ctr"/>
           <a:lstStyle/>
           <a:p>
-            <a:pPr algn="ctr" indent="0" marL="0">
+            <a:pPr marL="0" indent="0" algn="ctr">
               <a:buNone/>
             </a:pPr>
             <a:r>
@@ -13988,6 +12378,7 @@
         <a:solidFill>
           <a:srgbClr val="F1F5F9"/>
         </a:solidFill>
+        <a:effectLst/>
       </p:bgPr>
     </p:bg>
     <p:spTree>
@@ -14025,7 +12416,7 @@
           <a:bodyPr wrap="square" rtlCol="0" anchor="ctr"/>
           <a:lstStyle/>
           <a:p>
-            <a:pPr indent="0" marL="0">
+            <a:pPr marL="0" indent="0">
               <a:buNone/>
             </a:pPr>
             <a:r>
@@ -14067,7 +12458,7 @@
             <a:prstDash val="solid"/>
           </a:ln>
           <a:effectLst>
-            <a:outerShdw sx="100000" sy="100000" kx="0" ky="0" algn="bl" rotWithShape="0" blurRad="88900" dist="25400" dir="8100000">
+            <a:outerShdw blurRad="88900" dist="25400" dir="8100000" algn="bl" rotWithShape="0">
               <a:srgbClr val="000000">
                 <a:alpha val="14000"/>
               </a:srgbClr>
@@ -14102,14 +12493,14 @@
       </p:sp>
       <p:pic>
         <p:nvPicPr>
-          <p:cNvPr id="5" name="Image 0" descr="preencoded.png">    </p:cNvPr>
+          <p:cNvPr id="5" name="Image 0" descr="preencoded.png"/>
           <p:cNvPicPr>
             <a:picLocks noChangeAspect="1"/>
           </p:cNvPicPr>
           <p:nvPr/>
         </p:nvPicPr>
         <p:blipFill>
-          <a:blip r:embed="rId1"/>
+          <a:blip r:embed="rId3"/>
           <a:stretch>
             <a:fillRect/>
           </a:stretch>
@@ -14145,7 +12536,7 @@
           <a:bodyPr wrap="square" rtlCol="0" anchor="ctr"/>
           <a:lstStyle/>
           <a:p>
-            <a:pPr indent="0" marL="0">
+            <a:pPr marL="0" indent="0">
               <a:buNone/>
             </a:pPr>
             <a:r>
@@ -14272,7 +12663,7 @@
             <a:prstDash val="solid"/>
           </a:ln>
           <a:effectLst>
-            <a:outerShdw sx="100000" sy="100000" kx="0" ky="0" algn="bl" rotWithShape="0" blurRad="88900" dist="25400" dir="8100000">
+            <a:outerShdw blurRad="88900" dist="25400" dir="8100000" algn="bl" rotWithShape="0">
               <a:srgbClr val="000000">
                 <a:alpha val="14000"/>
               </a:srgbClr>
@@ -14307,14 +12698,14 @@
       </p:sp>
       <p:pic>
         <p:nvPicPr>
-          <p:cNvPr id="10" name="Image 1" descr="preencoded.png">    </p:cNvPr>
+          <p:cNvPr id="10" name="Image 1" descr="preencoded.png"/>
           <p:cNvPicPr>
             <a:picLocks noChangeAspect="1"/>
           </p:cNvPicPr>
           <p:nvPr/>
         </p:nvPicPr>
         <p:blipFill>
-          <a:blip r:embed="rId2"/>
+          <a:blip r:embed="rId4"/>
           <a:stretch>
             <a:fillRect/>
           </a:stretch>
@@ -14350,7 +12741,7 @@
           <a:bodyPr wrap="square" rtlCol="0" anchor="ctr"/>
           <a:lstStyle/>
           <a:p>
-            <a:pPr indent="0" marL="0">
+            <a:pPr marL="0" indent="0">
               <a:buNone/>
             </a:pPr>
             <a:r>
@@ -14477,7 +12868,7 @@
             <a:prstDash val="solid"/>
           </a:ln>
           <a:effectLst>
-            <a:outerShdw sx="100000" sy="100000" kx="0" ky="0" algn="bl" rotWithShape="0" blurRad="88900" dist="25400" dir="8100000">
+            <a:outerShdw blurRad="88900" dist="25400" dir="8100000" algn="bl" rotWithShape="0">
               <a:srgbClr val="000000">
                 <a:alpha val="14000"/>
               </a:srgbClr>
@@ -14512,14 +12903,14 @@
       </p:sp>
       <p:pic>
         <p:nvPicPr>
-          <p:cNvPr id="15" name="Image 2" descr="preencoded.png">    </p:cNvPr>
+          <p:cNvPr id="15" name="Image 2" descr="preencoded.png"/>
           <p:cNvPicPr>
             <a:picLocks noChangeAspect="1"/>
           </p:cNvPicPr>
           <p:nvPr/>
         </p:nvPicPr>
         <p:blipFill>
-          <a:blip r:embed="rId3"/>
+          <a:blip r:embed="rId5"/>
           <a:stretch>
             <a:fillRect/>
           </a:stretch>
@@ -14555,7 +12946,7 @@
           <a:bodyPr wrap="square" rtlCol="0" anchor="ctr"/>
           <a:lstStyle/>
           <a:p>
-            <a:pPr indent="0" marL="0">
+            <a:pPr marL="0" indent="0">
               <a:buNone/>
             </a:pPr>
             <a:r>
@@ -14682,7 +13073,7 @@
             <a:prstDash val="solid"/>
           </a:ln>
           <a:effectLst>
-            <a:outerShdw sx="100000" sy="100000" kx="0" ky="0" algn="bl" rotWithShape="0" blurRad="88900" dist="25400" dir="8100000">
+            <a:outerShdw blurRad="88900" dist="25400" dir="8100000" algn="bl" rotWithShape="0">
               <a:srgbClr val="000000">
                 <a:alpha val="14000"/>
               </a:srgbClr>
@@ -14692,14 +13083,14 @@
       </p:sp>
       <p:pic>
         <p:nvPicPr>
-          <p:cNvPr id="19" name="Image 3" descr="preencoded.png">    </p:cNvPr>
+          <p:cNvPr id="19" name="Image 3" descr="preencoded.png"/>
           <p:cNvPicPr>
             <a:picLocks noChangeAspect="1"/>
           </p:cNvPicPr>
           <p:nvPr/>
         </p:nvPicPr>
         <p:blipFill>
-          <a:blip r:embed="rId4"/>
+          <a:blip r:embed="rId6"/>
           <a:stretch>
             <a:fillRect/>
           </a:stretch>
@@ -14735,7 +13126,7 @@
           <a:bodyPr wrap="square" rtlCol="0" anchor="ctr"/>
           <a:lstStyle/>
           <a:p>
-            <a:pPr indent="0" marL="0">
+            <a:pPr marL="0" indent="0">
               <a:buNone/>
             </a:pPr>
             <a:r>
@@ -14774,7 +13165,7 @@
           <a:bodyPr wrap="square" rtlCol="0" anchor="ctr"/>
           <a:lstStyle/>
           <a:p>
-            <a:pPr indent="0" marL="0">
+            <a:pPr marL="0" indent="0">
               <a:buNone/>
             </a:pPr>
             <a:r>
@@ -15093,4 +13484,265 @@
     </a:ext>
   </a:extLst>
 </a:theme>
+</file>
+
+<file path=ppt/theme/theme2.xml><?xml version="1.0" encoding="utf-8"?>
+<a:theme xmlns:a="http://schemas.openxmlformats.org/drawingml/2006/main" name="Office 테마">
+  <a:themeElements>
+    <a:clrScheme name="Office">
+      <a:dk1>
+        <a:sysClr val="windowText" lastClr="000000"/>
+      </a:dk1>
+      <a:lt1>
+        <a:sysClr val="window" lastClr="FFFFFF"/>
+      </a:lt1>
+      <a:dk2>
+        <a:srgbClr val="44546A"/>
+      </a:dk2>
+      <a:lt2>
+        <a:srgbClr val="E7E6E6"/>
+      </a:lt2>
+      <a:accent1>
+        <a:srgbClr val="5B9BD5"/>
+      </a:accent1>
+      <a:accent2>
+        <a:srgbClr val="ED7D31"/>
+      </a:accent2>
+      <a:accent3>
+        <a:srgbClr val="A5A5A5"/>
+      </a:accent3>
+      <a:accent4>
+        <a:srgbClr val="FFC000"/>
+      </a:accent4>
+      <a:accent5>
+        <a:srgbClr val="4472C4"/>
+      </a:accent5>
+      <a:accent6>
+        <a:srgbClr val="70AD47"/>
+      </a:accent6>
+      <a:hlink>
+        <a:srgbClr val="0563C1"/>
+      </a:hlink>
+      <a:folHlink>
+        <a:srgbClr val="954F72"/>
+      </a:folHlink>
+    </a:clrScheme>
+    <a:fontScheme name="Office">
+      <a:majorFont>
+        <a:latin typeface="맑은 고딕" panose="020F0302020204030204"/>
+        <a:ea typeface=""/>
+        <a:cs typeface=""/>
+        <a:font script="Jpan" typeface="游ゴシック Light"/>
+        <a:font script="Hang" typeface="맑은 고딕"/>
+        <a:font script="Hans" typeface="等线 Light"/>
+        <a:font script="Hant" typeface="新細明體"/>
+        <a:font script="Arab" typeface="Times New Roman"/>
+        <a:font script="Hebr" typeface="Times New Roman"/>
+        <a:font script="Thai" typeface="Angsana New"/>
+        <a:font script="Ethi" typeface="Nyala"/>
+        <a:font script="Beng" typeface="Vrinda"/>
+        <a:font script="Gujr" typeface="Shruti"/>
+        <a:font script="Khmr" typeface="MoolBoran"/>
+        <a:font script="Knda" typeface="Tunga"/>
+        <a:font script="Guru" typeface="Raavi"/>
+        <a:font script="Cans" typeface="Euphemia"/>
+        <a:font script="Cher" typeface="Plantagenet Cherokee"/>
+        <a:font script="Yiii" typeface="Microsoft Yi Baiti"/>
+        <a:font script="Tibt" typeface="Microsoft Himalaya"/>
+        <a:font script="Thaa" typeface="MV Boli"/>
+        <a:font script="Deva" typeface="Mangal"/>
+        <a:font script="Telu" typeface="Gautami"/>
+        <a:font script="Taml" typeface="Latha"/>
+        <a:font script="Syrc" typeface="Estrangelo Edessa"/>
+        <a:font script="Orya" typeface="Kalinga"/>
+        <a:font script="Mlym" typeface="Kartika"/>
+        <a:font script="Laoo" typeface="DokChampa"/>
+        <a:font script="Sinh" typeface="Iskoola Pota"/>
+        <a:font script="Mong" typeface="Mongolian Baiti"/>
+        <a:font script="Viet" typeface="Times New Roman"/>
+        <a:font script="Uigh" typeface="Microsoft Uighur"/>
+        <a:font script="Geor" typeface="Sylfaen"/>
+      </a:majorFont>
+      <a:minorFont>
+        <a:latin typeface="맑은 고딕" panose="020F0502020204030204"/>
+        <a:ea typeface=""/>
+        <a:cs typeface=""/>
+        <a:font script="Jpan" typeface="游ゴシック"/>
+        <a:font script="Hang" typeface="맑은 고딕"/>
+        <a:font script="Hans" typeface="等线"/>
+        <a:font script="Hant" typeface="新細明體"/>
+        <a:font script="Arab" typeface="Arial"/>
+        <a:font script="Hebr" typeface="Arial"/>
+        <a:font script="Thai" typeface="Cordia New"/>
+        <a:font script="Ethi" typeface="Nyala"/>
+        <a:font script="Beng" typeface="Vrinda"/>
+        <a:font script="Gujr" typeface="Shruti"/>
+        <a:font script="Khmr" typeface="DaunPenh"/>
+        <a:font script="Knda" typeface="Tunga"/>
+        <a:font script="Guru" typeface="Raavi"/>
+        <a:font script="Cans" typeface="Euphemia"/>
+        <a:font script="Cher" typeface="Plantagenet Cherokee"/>
+        <a:font script="Yiii" typeface="Microsoft Yi Baiti"/>
+        <a:font script="Tibt" typeface="Microsoft Himalaya"/>
+        <a:font script="Thaa" typeface="MV Boli"/>
+        <a:font script="Deva" typeface="Mangal"/>
+        <a:font script="Telu" typeface="Gautami"/>
+        <a:font script="Taml" typeface="Latha"/>
+        <a:font script="Syrc" typeface="Estrangelo Edessa"/>
+        <a:font script="Orya" typeface="Kalinga"/>
+        <a:font script="Mlym" typeface="Kartika"/>
+        <a:font script="Laoo" typeface="DokChampa"/>
+        <a:font script="Sinh" typeface="Iskoola Pota"/>
+        <a:font script="Mong" typeface="Mongolian Baiti"/>
+        <a:font script="Viet" typeface="Arial"/>
+        <a:font script="Uigh" typeface="Microsoft Uighur"/>
+        <a:font script="Geor" typeface="Sylfaen"/>
+      </a:minorFont>
+    </a:fontScheme>
+    <a:fmtScheme name="Office">
+      <a:fillStyleLst>
+        <a:solidFill>
+          <a:schemeClr val="phClr"/>
+        </a:solidFill>
+        <a:gradFill rotWithShape="1">
+          <a:gsLst>
+            <a:gs pos="0">
+              <a:schemeClr val="phClr">
+                <a:lumMod val="110000"/>
+                <a:satMod val="105000"/>
+                <a:tint val="67000"/>
+              </a:schemeClr>
+            </a:gs>
+            <a:gs pos="50000">
+              <a:schemeClr val="phClr">
+                <a:lumMod val="105000"/>
+                <a:satMod val="103000"/>
+                <a:tint val="73000"/>
+              </a:schemeClr>
+            </a:gs>
+            <a:gs pos="100000">
+              <a:schemeClr val="phClr">
+                <a:lumMod val="105000"/>
+                <a:satMod val="109000"/>
+                <a:tint val="81000"/>
+              </a:schemeClr>
+            </a:gs>
+          </a:gsLst>
+          <a:lin ang="5400000" scaled="0"/>
+        </a:gradFill>
+        <a:gradFill rotWithShape="1">
+          <a:gsLst>
+            <a:gs pos="0">
+              <a:schemeClr val="phClr">
+                <a:satMod val="103000"/>
+                <a:lumMod val="102000"/>
+                <a:tint val="94000"/>
+              </a:schemeClr>
+            </a:gs>
+            <a:gs pos="50000">
+              <a:schemeClr val="phClr">
+                <a:satMod val="110000"/>
+                <a:lumMod val="100000"/>
+                <a:shade val="100000"/>
+              </a:schemeClr>
+            </a:gs>
+            <a:gs pos="100000">
+              <a:schemeClr val="phClr">
+                <a:lumMod val="99000"/>
+                <a:satMod val="120000"/>
+                <a:shade val="78000"/>
+              </a:schemeClr>
+            </a:gs>
+          </a:gsLst>
+          <a:lin ang="5400000" scaled="0"/>
+        </a:gradFill>
+      </a:fillStyleLst>
+      <a:lnStyleLst>
+        <a:ln w="6350" cap="flat" cmpd="sng" algn="ctr">
+          <a:solidFill>
+            <a:schemeClr val="phClr"/>
+          </a:solidFill>
+          <a:prstDash val="solid"/>
+          <a:miter lim="800000"/>
+        </a:ln>
+        <a:ln w="12700" cap="flat" cmpd="sng" algn="ctr">
+          <a:solidFill>
+            <a:schemeClr val="phClr"/>
+          </a:solidFill>
+          <a:prstDash val="solid"/>
+          <a:miter lim="800000"/>
+        </a:ln>
+        <a:ln w="19050" cap="flat" cmpd="sng" algn="ctr">
+          <a:solidFill>
+            <a:schemeClr val="phClr"/>
+          </a:solidFill>
+          <a:prstDash val="solid"/>
+          <a:miter lim="800000"/>
+        </a:ln>
+      </a:lnStyleLst>
+      <a:effectStyleLst>
+        <a:effectStyle>
+          <a:effectLst/>
+        </a:effectStyle>
+        <a:effectStyle>
+          <a:effectLst/>
+        </a:effectStyle>
+        <a:effectStyle>
+          <a:effectLst>
+            <a:outerShdw blurRad="57150" dist="19050" dir="5400000" algn="ctr" rotWithShape="0">
+              <a:srgbClr val="000000">
+                <a:alpha val="63000"/>
+              </a:srgbClr>
+            </a:outerShdw>
+          </a:effectLst>
+        </a:effectStyle>
+      </a:effectStyleLst>
+      <a:bgFillStyleLst>
+        <a:solidFill>
+          <a:schemeClr val="phClr"/>
+        </a:solidFill>
+        <a:solidFill>
+          <a:schemeClr val="phClr">
+            <a:tint val="95000"/>
+            <a:satMod val="170000"/>
+          </a:schemeClr>
+        </a:solidFill>
+        <a:gradFill rotWithShape="1">
+          <a:gsLst>
+            <a:gs pos="0">
+              <a:schemeClr val="phClr">
+                <a:tint val="93000"/>
+                <a:satMod val="150000"/>
+                <a:shade val="98000"/>
+                <a:lumMod val="102000"/>
+              </a:schemeClr>
+            </a:gs>
+            <a:gs pos="50000">
+              <a:schemeClr val="phClr">
+                <a:tint val="98000"/>
+                <a:satMod val="130000"/>
+                <a:shade val="90000"/>
+                <a:lumMod val="103000"/>
+              </a:schemeClr>
+            </a:gs>
+            <a:gs pos="100000">
+              <a:schemeClr val="phClr">
+                <a:shade val="63000"/>
+                <a:satMod val="120000"/>
+              </a:schemeClr>
+            </a:gs>
+          </a:gsLst>
+          <a:lin ang="5400000" scaled="0"/>
+        </a:gradFill>
+      </a:bgFillStyleLst>
+    </a:fmtScheme>
+  </a:themeElements>
+  <a:objectDefaults/>
+  <a:extraClrSchemeLst/>
+  <a:extLst>
+    <a:ext uri="{05A4C25C-085E-4340-85A3-A5531E510DB2}">
+      <thm15:themeFamily xmlns:thm15="http://schemas.microsoft.com/office/thememl/2012/main" name="Office Theme" id="{62F939B6-93AF-4DB8-9C6B-D6C7DFDC589F}" vid="{4A3C46E8-61CC-4603-A589-7422A47A8E4A}"/>
+    </a:ext>
+  </a:extLst>
+</a:theme>
 </file>